--- a/docs/presentation.pptx
+++ b/docs/presentation.pptx
@@ -9264,7 +9264,46 @@
         </p:nvSpPr>
         <p:spPr>
           <a:xfrm>
-            <a:off x="731520" y="274320"/>
+            <a:off x="731520" y="137160"/>
+            <a:ext cx="7680960" cy="365760"/>
+          </a:xfrm>
+          <a:prstGeom prst="rect">
+            <a:avLst/>
+          </a:prstGeom>
+          <a:noFill/>
+          <a:ln/>
+        </p:spPr>
+        <p:txBody>
+          <a:bodyPr wrap="square" lIns="0" tIns="0" rIns="0" bIns="0" rtlCol="0" anchor="ctr"/>
+          <a:lstStyle/>
+          <a:p>
+            <a:pPr indent="0" marL="0">
+              <a:buNone/>
+            </a:pPr>
+            <a:r>
+              <a:rPr lang="en-US" sz="1400" b="1" dirty="0">
+                <a:solidFill>
+                  <a:srgbClr val="F39C12"/>
+                </a:solidFill>
+                <a:latin typeface="Calibri" pitchFamily="34" charset="0"/>
+                <a:ea typeface="Calibri" pitchFamily="34" charset="-122"/>
+                <a:cs typeface="Calibri" pitchFamily="34" charset="-120"/>
+              </a:rPr>
+              <a:t>Spark Structured Streaming</a:t>
+            </a:r>
+            <a:endParaRPr lang="en-US" sz="1400" dirty="0"/>
+          </a:p>
+        </p:txBody>
+      </p:sp>
+      <p:sp>
+        <p:nvSpPr>
+          <p:cNvPr id="4" name="Text 2"/>
+          <p:cNvSpPr/>
+          <p:nvPr/>
+        </p:nvSpPr>
+        <p:spPr>
+          <a:xfrm>
+            <a:off x="731520" y="457200"/>
             <a:ext cx="7680960" cy="457200"/>
           </a:xfrm>
           <a:prstGeom prst="rect">
@@ -9281,46 +9320,7 @@
               <a:buNone/>
             </a:pPr>
             <a:r>
-              <a:rPr lang="en-US" sz="1400" b="1" dirty="0">
-                <a:solidFill>
-                  <a:srgbClr val="F39C12"/>
-                </a:solidFill>
-                <a:latin typeface="Calibri" pitchFamily="34" charset="0"/>
-                <a:ea typeface="Calibri" pitchFamily="34" charset="-122"/>
-                <a:cs typeface="Calibri" pitchFamily="34" charset="-120"/>
-              </a:rPr>
-              <a:t>Spark Structured Streaming</a:t>
-            </a:r>
-            <a:endParaRPr lang="en-US" sz="1400" dirty="0"/>
-          </a:p>
-        </p:txBody>
-      </p:sp>
-      <p:sp>
-        <p:nvSpPr>
-          <p:cNvPr id="4" name="Text 2"/>
-          <p:cNvSpPr/>
-          <p:nvPr/>
-        </p:nvSpPr>
-        <p:spPr>
-          <a:xfrm>
-            <a:off x="731520" y="640080"/>
-            <a:ext cx="7680960" cy="548640"/>
-          </a:xfrm>
-          <a:prstGeom prst="rect">
-            <a:avLst/>
-          </a:prstGeom>
-          <a:noFill/>
-          <a:ln/>
-        </p:spPr>
-        <p:txBody>
-          <a:bodyPr wrap="square" lIns="0" tIns="0" rIns="0" bIns="0" rtlCol="0" anchor="ctr"/>
-          <a:lstStyle/>
-          <a:p>
-            <a:pPr indent="0" marL="0">
-              <a:buNone/>
-            </a:pPr>
-            <a:r>
-              <a:rPr lang="en-US" sz="3200" b="1" dirty="0">
+              <a:rPr lang="en-US" sz="3000" b="1" dirty="0">
                 <a:solidFill>
                   <a:srgbClr val="FFFFFF"/>
                 </a:solidFill>
@@ -9328,9 +9328,9 @@
                 <a:ea typeface="Georgia" pitchFamily="34" charset="-122"/>
                 <a:cs typeface="Georgia" pitchFamily="34" charset="-120"/>
               </a:rPr>
-              <a:t>Risk Detection with Windowing</a:t>
-            </a:r>
-            <a:endParaRPr lang="en-US" sz="3200" dirty="0"/>
+              <a:t>What Windowing Does</a:t>
+            </a:r>
+            <a:endParaRPr lang="en-US" sz="3000" dirty="0"/>
           </a:p>
         </p:txBody>
       </p:sp>
@@ -9342,34 +9342,34 @@
         </p:nvSpPr>
         <p:spPr>
           <a:xfrm>
-            <a:off x="731520" y="1371600"/>
-            <a:ext cx="7680960" cy="365760"/>
-          </a:xfrm>
-          <a:prstGeom prst="rect">
-            <a:avLst/>
-          </a:prstGeom>
-          <a:noFill/>
-          <a:ln/>
-        </p:spPr>
-        <p:txBody>
-          <a:bodyPr wrap="square" lIns="0" tIns="0" rIns="0" bIns="0" rtlCol="0" anchor="ctr"/>
-          <a:lstStyle/>
-          <a:p>
-            <a:pPr indent="0" marL="0">
-              <a:buNone/>
-            </a:pPr>
-            <a:r>
-              <a:rPr lang="en-US" sz="1600" b="1" dirty="0">
-                <a:solidFill>
-                  <a:srgbClr val="FFFFFF"/>
-                </a:solidFill>
-                <a:latin typeface="Calibri" pitchFamily="34" charset="0"/>
-                <a:ea typeface="Calibri" pitchFamily="34" charset="-122"/>
-                <a:cs typeface="Calibri" pitchFamily="34" charset="-120"/>
-              </a:rPr>
-              <a:t>60-Second Tumbling Windows</a:t>
-            </a:r>
-            <a:endParaRPr lang="en-US" sz="1600" dirty="0"/>
+            <a:off x="365760" y="1005840"/>
+            <a:ext cx="4023360" cy="274320"/>
+          </a:xfrm>
+          <a:prstGeom prst="rect">
+            <a:avLst/>
+          </a:prstGeom>
+          <a:noFill/>
+          <a:ln/>
+        </p:spPr>
+        <p:txBody>
+          <a:bodyPr wrap="square" lIns="0" tIns="0" rIns="0" bIns="0" rtlCol="0" anchor="ctr"/>
+          <a:lstStyle/>
+          <a:p>
+            <a:pPr algn="ctr" indent="0" marL="0">
+              <a:buNone/>
+            </a:pPr>
+            <a:r>
+              <a:rPr lang="en-US" sz="1300" b="1" dirty="0">
+                <a:solidFill>
+                  <a:srgbClr val="718096"/>
+                </a:solidFill>
+                <a:latin typeface="Calibri" pitchFamily="34" charset="0"/>
+                <a:ea typeface="Calibri" pitchFamily="34" charset="-122"/>
+                <a:cs typeface="Calibri" pitchFamily="34" charset="-120"/>
+              </a:rPr>
+              <a:t>Raw Order Stream</a:t>
+            </a:r>
+            <a:endParaRPr lang="en-US" sz="1300" dirty="0"/>
           </a:p>
         </p:txBody>
       </p:sp>
@@ -9381,20 +9381,18 @@
         </p:nvSpPr>
         <p:spPr>
           <a:xfrm>
-            <a:off x="731520" y="1828800"/>
-            <a:ext cx="2560320" cy="914400"/>
-          </a:xfrm>
-          <a:prstGeom prst="rect">
-            <a:avLst/>
-          </a:prstGeom>
-          <a:solidFill>
-            <a:srgbClr val="232842"/>
-          </a:solidFill>
-          <a:ln w="25400">
+            <a:off x="548640" y="2468880"/>
+            <a:ext cx="3657600" cy="0"/>
+          </a:xfrm>
+          <a:prstGeom prst="line">
+            <a:avLst/>
+          </a:prstGeom>
+          <a:noFill/>
+          <a:ln w="12700">
             <a:solidFill>
-              <a:srgbClr val="4A90D9"/>
+              <a:srgbClr val="718096"/>
             </a:solidFill>
-            <a:prstDash val="solid"/>
+            <a:prstDash val="dash"/>
           </a:ln>
         </p:spPr>
       </p:sp>
@@ -9406,49 +9404,649 @@
         </p:nvSpPr>
         <p:spPr>
           <a:xfrm>
-            <a:off x="731520" y="1828800"/>
-            <a:ext cx="2560320" cy="457200"/>
-          </a:xfrm>
-          <a:prstGeom prst="rect">
-            <a:avLst/>
-          </a:prstGeom>
-          <a:noFill/>
-          <a:ln/>
-        </p:spPr>
-        <p:txBody>
-          <a:bodyPr wrap="square" lIns="0" tIns="0" rIns="0" bIns="0" rtlCol="0" anchor="ctr"/>
-          <a:lstStyle/>
-          <a:p>
-            <a:pPr algn="ctr" indent="0" marL="0">
-              <a:buNone/>
-            </a:pPr>
-            <a:r>
-              <a:rPr lang="en-US" sz="1000" dirty="0">
-                <a:solidFill>
-                  <a:srgbClr val="4A90D9"/>
+            <a:off x="365760" y="2560320"/>
+            <a:ext cx="457200" cy="228600"/>
+          </a:xfrm>
+          <a:prstGeom prst="rect">
+            <a:avLst/>
+          </a:prstGeom>
+          <a:noFill/>
+          <a:ln/>
+        </p:spPr>
+        <p:txBody>
+          <a:bodyPr wrap="square" lIns="0" tIns="0" rIns="0" bIns="0" rtlCol="0" anchor="ctr"/>
+          <a:lstStyle/>
+          <a:p>
+            <a:pPr indent="0" marL="0">
+              <a:buNone/>
+            </a:pPr>
+            <a:r>
+              <a:rPr lang="en-US" sz="900" dirty="0">
+                <a:solidFill>
+                  <a:srgbClr val="718096"/>
                 </a:solidFill>
                 <a:latin typeface="Consolas" pitchFamily="34" charset="0"/>
                 <a:ea typeface="Consolas" pitchFamily="34" charset="-122"/>
                 <a:cs typeface="Consolas" pitchFamily="34" charset="-120"/>
               </a:rPr>
-              <a:t>Window 1</a:t>
-            </a:r>
-            <a:endParaRPr lang="en-US" sz="1000" dirty="0"/>
-          </a:p>
-          <a:p>
-            <a:pPr algn="ctr" indent="0" marL="0">
-              <a:buNone/>
-            </a:pPr>
-            <a:r>
-              <a:rPr lang="en-US" sz="1000" dirty="0">
-                <a:solidFill>
-                  <a:srgbClr val="4A90D9"/>
+              <a:t>:00</a:t>
+            </a:r>
+            <a:endParaRPr lang="en-US" sz="900" dirty="0"/>
+          </a:p>
+        </p:txBody>
+      </p:sp>
+      <p:sp>
+        <p:nvSpPr>
+          <p:cNvPr id="8" name="Text 6"/>
+          <p:cNvSpPr/>
+          <p:nvPr/>
+        </p:nvSpPr>
+        <p:spPr>
+          <a:xfrm>
+            <a:off x="2103120" y="2560320"/>
+            <a:ext cx="457200" cy="228600"/>
+          </a:xfrm>
+          <a:prstGeom prst="rect">
+            <a:avLst/>
+          </a:prstGeom>
+          <a:noFill/>
+          <a:ln/>
+        </p:spPr>
+        <p:txBody>
+          <a:bodyPr wrap="square" lIns="0" tIns="0" rIns="0" bIns="0" rtlCol="0" anchor="ctr"/>
+          <a:lstStyle/>
+          <a:p>
+            <a:pPr indent="0" marL="0">
+              <a:buNone/>
+            </a:pPr>
+            <a:r>
+              <a:rPr lang="en-US" sz="900" dirty="0">
+                <a:solidFill>
+                  <a:srgbClr val="718096"/>
                 </a:solidFill>
                 <a:latin typeface="Consolas" pitchFamily="34" charset="0"/>
                 <a:ea typeface="Consolas" pitchFamily="34" charset="-122"/>
                 <a:cs typeface="Consolas" pitchFamily="34" charset="-120"/>
               </a:rPr>
-              <a:t>:00 – :60</a:t>
+              <a:t>:30</a:t>
+            </a:r>
+            <a:endParaRPr lang="en-US" sz="900" dirty="0"/>
+          </a:p>
+        </p:txBody>
+      </p:sp>
+      <p:sp>
+        <p:nvSpPr>
+          <p:cNvPr id="9" name="Text 7"/>
+          <p:cNvSpPr/>
+          <p:nvPr/>
+        </p:nvSpPr>
+        <p:spPr>
+          <a:xfrm>
+            <a:off x="3840480" y="2560320"/>
+            <a:ext cx="457200" cy="228600"/>
+          </a:xfrm>
+          <a:prstGeom prst="rect">
+            <a:avLst/>
+          </a:prstGeom>
+          <a:noFill/>
+          <a:ln/>
+        </p:spPr>
+        <p:txBody>
+          <a:bodyPr wrap="square" lIns="0" tIns="0" rIns="0" bIns="0" rtlCol="0" anchor="ctr"/>
+          <a:lstStyle/>
+          <a:p>
+            <a:pPr indent="0" marL="0">
+              <a:buNone/>
+            </a:pPr>
+            <a:r>
+              <a:rPr lang="en-US" sz="900" dirty="0">
+                <a:solidFill>
+                  <a:srgbClr val="718096"/>
+                </a:solidFill>
+                <a:latin typeface="Consolas" pitchFamily="34" charset="0"/>
+                <a:ea typeface="Consolas" pitchFamily="34" charset="-122"/>
+                <a:cs typeface="Consolas" pitchFamily="34" charset="-120"/>
+              </a:rPr>
+              <a:t>:60</a:t>
+            </a:r>
+            <a:endParaRPr lang="en-US" sz="900" dirty="0"/>
+          </a:p>
+        </p:txBody>
+      </p:sp>
+      <p:sp>
+        <p:nvSpPr>
+          <p:cNvPr id="10" name="Shape 8"/>
+          <p:cNvSpPr/>
+          <p:nvPr/>
+        </p:nvSpPr>
+        <p:spPr>
+          <a:xfrm>
+            <a:off x="640080" y="1463040"/>
+            <a:ext cx="91440" cy="91440"/>
+          </a:xfrm>
+          <a:prstGeom prst="ellipse">
+            <a:avLst/>
+          </a:prstGeom>
+          <a:solidFill>
+            <a:srgbClr val="4A90D9"/>
+          </a:solidFill>
+          <a:ln/>
+        </p:spPr>
+      </p:sp>
+      <p:sp>
+        <p:nvSpPr>
+          <p:cNvPr id="11" name="Shape 9"/>
+          <p:cNvSpPr/>
+          <p:nvPr/>
+        </p:nvSpPr>
+        <p:spPr>
+          <a:xfrm>
+            <a:off x="822960" y="1920240"/>
+            <a:ext cx="91440" cy="91440"/>
+          </a:xfrm>
+          <a:prstGeom prst="ellipse">
+            <a:avLst/>
+          </a:prstGeom>
+          <a:solidFill>
+            <a:srgbClr val="27AE60"/>
+          </a:solidFill>
+          <a:ln/>
+        </p:spPr>
+      </p:sp>
+      <p:sp>
+        <p:nvSpPr>
+          <p:cNvPr id="12" name="Shape 10"/>
+          <p:cNvSpPr/>
+          <p:nvPr/>
+        </p:nvSpPr>
+        <p:spPr>
+          <a:xfrm>
+            <a:off x="1005840" y="1645920"/>
+            <a:ext cx="91440" cy="91440"/>
+          </a:xfrm>
+          <a:prstGeom prst="ellipse">
+            <a:avLst/>
+          </a:prstGeom>
+          <a:solidFill>
+            <a:srgbClr val="F39C12"/>
+          </a:solidFill>
+          <a:ln/>
+        </p:spPr>
+      </p:sp>
+      <p:sp>
+        <p:nvSpPr>
+          <p:cNvPr id="13" name="Shape 11"/>
+          <p:cNvSpPr/>
+          <p:nvPr/>
+        </p:nvSpPr>
+        <p:spPr>
+          <a:xfrm>
+            <a:off x="1097280" y="2194560"/>
+            <a:ext cx="91440" cy="91440"/>
+          </a:xfrm>
+          <a:prstGeom prst="ellipse">
+            <a:avLst/>
+          </a:prstGeom>
+          <a:solidFill>
+            <a:srgbClr val="E74C3C"/>
+          </a:solidFill>
+          <a:ln/>
+        </p:spPr>
+      </p:sp>
+      <p:sp>
+        <p:nvSpPr>
+          <p:cNvPr id="14" name="Shape 12"/>
+          <p:cNvSpPr/>
+          <p:nvPr/>
+        </p:nvSpPr>
+        <p:spPr>
+          <a:xfrm>
+            <a:off x="1280160" y="1371600"/>
+            <a:ext cx="91440" cy="91440"/>
+          </a:xfrm>
+          <a:prstGeom prst="ellipse">
+            <a:avLst/>
+          </a:prstGeom>
+          <a:solidFill>
+            <a:srgbClr val="9B59B6"/>
+          </a:solidFill>
+          <a:ln/>
+        </p:spPr>
+      </p:sp>
+      <p:sp>
+        <p:nvSpPr>
+          <p:cNvPr id="15" name="Shape 13"/>
+          <p:cNvSpPr/>
+          <p:nvPr/>
+        </p:nvSpPr>
+        <p:spPr>
+          <a:xfrm>
+            <a:off x="1463040" y="1828800"/>
+            <a:ext cx="91440" cy="91440"/>
+          </a:xfrm>
+          <a:prstGeom prst="ellipse">
+            <a:avLst/>
+          </a:prstGeom>
+          <a:solidFill>
+            <a:srgbClr val="4A90D9"/>
+          </a:solidFill>
+          <a:ln/>
+        </p:spPr>
+      </p:sp>
+      <p:sp>
+        <p:nvSpPr>
+          <p:cNvPr id="16" name="Shape 14"/>
+          <p:cNvSpPr/>
+          <p:nvPr/>
+        </p:nvSpPr>
+        <p:spPr>
+          <a:xfrm>
+            <a:off x="1554480" y="1554480"/>
+            <a:ext cx="91440" cy="91440"/>
+          </a:xfrm>
+          <a:prstGeom prst="ellipse">
+            <a:avLst/>
+          </a:prstGeom>
+          <a:solidFill>
+            <a:srgbClr val="27AE60"/>
+          </a:solidFill>
+          <a:ln/>
+        </p:spPr>
+      </p:sp>
+      <p:sp>
+        <p:nvSpPr>
+          <p:cNvPr id="17" name="Shape 15"/>
+          <p:cNvSpPr/>
+          <p:nvPr/>
+        </p:nvSpPr>
+        <p:spPr>
+          <a:xfrm>
+            <a:off x="1737360" y="2103120"/>
+            <a:ext cx="91440" cy="91440"/>
+          </a:xfrm>
+          <a:prstGeom prst="ellipse">
+            <a:avLst/>
+          </a:prstGeom>
+          <a:solidFill>
+            <a:srgbClr val="F39C12"/>
+          </a:solidFill>
+          <a:ln/>
+        </p:spPr>
+      </p:sp>
+      <p:sp>
+        <p:nvSpPr>
+          <p:cNvPr id="18" name="Shape 16"/>
+          <p:cNvSpPr/>
+          <p:nvPr/>
+        </p:nvSpPr>
+        <p:spPr>
+          <a:xfrm>
+            <a:off x="1828800" y="1737360"/>
+            <a:ext cx="91440" cy="91440"/>
+          </a:xfrm>
+          <a:prstGeom prst="ellipse">
+            <a:avLst/>
+          </a:prstGeom>
+          <a:solidFill>
+            <a:srgbClr val="E74C3C"/>
+          </a:solidFill>
+          <a:ln/>
+        </p:spPr>
+      </p:sp>
+      <p:sp>
+        <p:nvSpPr>
+          <p:cNvPr id="19" name="Shape 17"/>
+          <p:cNvSpPr/>
+          <p:nvPr/>
+        </p:nvSpPr>
+        <p:spPr>
+          <a:xfrm>
+            <a:off x="2011680" y="1463040"/>
+            <a:ext cx="91440" cy="91440"/>
+          </a:xfrm>
+          <a:prstGeom prst="ellipse">
+            <a:avLst/>
+          </a:prstGeom>
+          <a:solidFill>
+            <a:srgbClr val="9B59B6"/>
+          </a:solidFill>
+          <a:ln/>
+        </p:spPr>
+      </p:sp>
+      <p:sp>
+        <p:nvSpPr>
+          <p:cNvPr id="20" name="Shape 18"/>
+          <p:cNvSpPr/>
+          <p:nvPr/>
+        </p:nvSpPr>
+        <p:spPr>
+          <a:xfrm>
+            <a:off x="2103120" y="2011680"/>
+            <a:ext cx="91440" cy="91440"/>
+          </a:xfrm>
+          <a:prstGeom prst="ellipse">
+            <a:avLst/>
+          </a:prstGeom>
+          <a:solidFill>
+            <a:srgbClr val="4A90D9"/>
+          </a:solidFill>
+          <a:ln/>
+        </p:spPr>
+      </p:sp>
+      <p:sp>
+        <p:nvSpPr>
+          <p:cNvPr id="21" name="Shape 19"/>
+          <p:cNvSpPr/>
+          <p:nvPr/>
+        </p:nvSpPr>
+        <p:spPr>
+          <a:xfrm>
+            <a:off x="2286000" y="2286000"/>
+            <a:ext cx="91440" cy="91440"/>
+          </a:xfrm>
+          <a:prstGeom prst="ellipse">
+            <a:avLst/>
+          </a:prstGeom>
+          <a:solidFill>
+            <a:srgbClr val="27AE60"/>
+          </a:solidFill>
+          <a:ln/>
+        </p:spPr>
+      </p:sp>
+      <p:sp>
+        <p:nvSpPr>
+          <p:cNvPr id="22" name="Shape 20"/>
+          <p:cNvSpPr/>
+          <p:nvPr/>
+        </p:nvSpPr>
+        <p:spPr>
+          <a:xfrm>
+            <a:off x="2377440" y="1645920"/>
+            <a:ext cx="91440" cy="91440"/>
+          </a:xfrm>
+          <a:prstGeom prst="ellipse">
+            <a:avLst/>
+          </a:prstGeom>
+          <a:solidFill>
+            <a:srgbClr val="F39C12"/>
+          </a:solidFill>
+          <a:ln/>
+        </p:spPr>
+      </p:sp>
+      <p:sp>
+        <p:nvSpPr>
+          <p:cNvPr id="23" name="Shape 21"/>
+          <p:cNvSpPr/>
+          <p:nvPr/>
+        </p:nvSpPr>
+        <p:spPr>
+          <a:xfrm>
+            <a:off x="2560320" y="1920240"/>
+            <a:ext cx="91440" cy="91440"/>
+          </a:xfrm>
+          <a:prstGeom prst="ellipse">
+            <a:avLst/>
+          </a:prstGeom>
+          <a:solidFill>
+            <a:srgbClr val="E74C3C"/>
+          </a:solidFill>
+          <a:ln/>
+        </p:spPr>
+      </p:sp>
+      <p:sp>
+        <p:nvSpPr>
+          <p:cNvPr id="24" name="Shape 22"/>
+          <p:cNvSpPr/>
+          <p:nvPr/>
+        </p:nvSpPr>
+        <p:spPr>
+          <a:xfrm>
+            <a:off x="2651760" y="1371600"/>
+            <a:ext cx="91440" cy="91440"/>
+          </a:xfrm>
+          <a:prstGeom prst="ellipse">
+            <a:avLst/>
+          </a:prstGeom>
+          <a:solidFill>
+            <a:srgbClr val="9B59B6"/>
+          </a:solidFill>
+          <a:ln/>
+        </p:spPr>
+      </p:sp>
+      <p:sp>
+        <p:nvSpPr>
+          <p:cNvPr id="25" name="Shape 23"/>
+          <p:cNvSpPr/>
+          <p:nvPr/>
+        </p:nvSpPr>
+        <p:spPr>
+          <a:xfrm>
+            <a:off x="2834640" y="2194560"/>
+            <a:ext cx="91440" cy="91440"/>
+          </a:xfrm>
+          <a:prstGeom prst="ellipse">
+            <a:avLst/>
+          </a:prstGeom>
+          <a:solidFill>
+            <a:srgbClr val="4A90D9"/>
+          </a:solidFill>
+          <a:ln/>
+        </p:spPr>
+      </p:sp>
+      <p:sp>
+        <p:nvSpPr>
+          <p:cNvPr id="26" name="Shape 24"/>
+          <p:cNvSpPr/>
+          <p:nvPr/>
+        </p:nvSpPr>
+        <p:spPr>
+          <a:xfrm>
+            <a:off x="2926080" y="1554480"/>
+            <a:ext cx="91440" cy="91440"/>
+          </a:xfrm>
+          <a:prstGeom prst="ellipse">
+            <a:avLst/>
+          </a:prstGeom>
+          <a:solidFill>
+            <a:srgbClr val="27AE60"/>
+          </a:solidFill>
+          <a:ln/>
+        </p:spPr>
+      </p:sp>
+      <p:sp>
+        <p:nvSpPr>
+          <p:cNvPr id="27" name="Shape 25"/>
+          <p:cNvSpPr/>
+          <p:nvPr/>
+        </p:nvSpPr>
+        <p:spPr>
+          <a:xfrm>
+            <a:off x="3017520" y="1828800"/>
+            <a:ext cx="91440" cy="91440"/>
+          </a:xfrm>
+          <a:prstGeom prst="ellipse">
+            <a:avLst/>
+          </a:prstGeom>
+          <a:solidFill>
+            <a:srgbClr val="F39C12"/>
+          </a:solidFill>
+          <a:ln/>
+        </p:spPr>
+      </p:sp>
+      <p:sp>
+        <p:nvSpPr>
+          <p:cNvPr id="28" name="Shape 26"/>
+          <p:cNvSpPr/>
+          <p:nvPr/>
+        </p:nvSpPr>
+        <p:spPr>
+          <a:xfrm>
+            <a:off x="3200400" y="2103120"/>
+            <a:ext cx="91440" cy="91440"/>
+          </a:xfrm>
+          <a:prstGeom prst="ellipse">
+            <a:avLst/>
+          </a:prstGeom>
+          <a:solidFill>
+            <a:srgbClr val="E74C3C"/>
+          </a:solidFill>
+          <a:ln/>
+        </p:spPr>
+      </p:sp>
+      <p:sp>
+        <p:nvSpPr>
+          <p:cNvPr id="29" name="Shape 27"/>
+          <p:cNvSpPr/>
+          <p:nvPr/>
+        </p:nvSpPr>
+        <p:spPr>
+          <a:xfrm>
+            <a:off x="3291840" y="1463040"/>
+            <a:ext cx="91440" cy="91440"/>
+          </a:xfrm>
+          <a:prstGeom prst="ellipse">
+            <a:avLst/>
+          </a:prstGeom>
+          <a:solidFill>
+            <a:srgbClr val="9B59B6"/>
+          </a:solidFill>
+          <a:ln/>
+        </p:spPr>
+      </p:sp>
+      <p:sp>
+        <p:nvSpPr>
+          <p:cNvPr id="30" name="Shape 28"/>
+          <p:cNvSpPr/>
+          <p:nvPr/>
+        </p:nvSpPr>
+        <p:spPr>
+          <a:xfrm>
+            <a:off x="3383280" y="2286000"/>
+            <a:ext cx="91440" cy="91440"/>
+          </a:xfrm>
+          <a:prstGeom prst="ellipse">
+            <a:avLst/>
+          </a:prstGeom>
+          <a:solidFill>
+            <a:srgbClr val="4A90D9"/>
+          </a:solidFill>
+          <a:ln/>
+        </p:spPr>
+      </p:sp>
+      <p:sp>
+        <p:nvSpPr>
+          <p:cNvPr id="31" name="Shape 29"/>
+          <p:cNvSpPr/>
+          <p:nvPr/>
+        </p:nvSpPr>
+        <p:spPr>
+          <a:xfrm>
+            <a:off x="3566160" y="1737360"/>
+            <a:ext cx="91440" cy="91440"/>
+          </a:xfrm>
+          <a:prstGeom prst="ellipse">
+            <a:avLst/>
+          </a:prstGeom>
+          <a:solidFill>
+            <a:srgbClr val="27AE60"/>
+          </a:solidFill>
+          <a:ln/>
+        </p:spPr>
+      </p:sp>
+      <p:sp>
+        <p:nvSpPr>
+          <p:cNvPr id="32" name="Shape 30"/>
+          <p:cNvSpPr/>
+          <p:nvPr/>
+        </p:nvSpPr>
+        <p:spPr>
+          <a:xfrm>
+            <a:off x="3657600" y="2011680"/>
+            <a:ext cx="91440" cy="91440"/>
+          </a:xfrm>
+          <a:prstGeom prst="ellipse">
+            <a:avLst/>
+          </a:prstGeom>
+          <a:solidFill>
+            <a:srgbClr val="F39C12"/>
+          </a:solidFill>
+          <a:ln/>
+        </p:spPr>
+      </p:sp>
+      <p:sp>
+        <p:nvSpPr>
+          <p:cNvPr id="33" name="Shape 31"/>
+          <p:cNvSpPr/>
+          <p:nvPr/>
+        </p:nvSpPr>
+        <p:spPr>
+          <a:xfrm>
+            <a:off x="3840480" y="1645920"/>
+            <a:ext cx="91440" cy="91440"/>
+          </a:xfrm>
+          <a:prstGeom prst="ellipse">
+            <a:avLst/>
+          </a:prstGeom>
+          <a:solidFill>
+            <a:srgbClr val="E74C3C"/>
+          </a:solidFill>
+          <a:ln/>
+        </p:spPr>
+      </p:sp>
+      <p:sp>
+        <p:nvSpPr>
+          <p:cNvPr id="34" name="Shape 32"/>
+          <p:cNvSpPr/>
+          <p:nvPr/>
+        </p:nvSpPr>
+        <p:spPr>
+          <a:xfrm>
+            <a:off x="3931920" y="1920240"/>
+            <a:ext cx="91440" cy="91440"/>
+          </a:xfrm>
+          <a:prstGeom prst="ellipse">
+            <a:avLst/>
+          </a:prstGeom>
+          <a:solidFill>
+            <a:srgbClr val="9B59B6"/>
+          </a:solidFill>
+          <a:ln/>
+        </p:spPr>
+      </p:sp>
+      <p:sp>
+        <p:nvSpPr>
+          <p:cNvPr id="35" name="Text 33"/>
+          <p:cNvSpPr/>
+          <p:nvPr/>
+        </p:nvSpPr>
+        <p:spPr>
+          <a:xfrm>
+            <a:off x="365760" y="2834640"/>
+            <a:ext cx="4023360" cy="228600"/>
+          </a:xfrm>
+          <a:prstGeom prst="rect">
+            <a:avLst/>
+          </a:prstGeom>
+          <a:noFill/>
+          <a:ln/>
+        </p:spPr>
+        <p:txBody>
+          <a:bodyPr wrap="square" lIns="0" tIns="0" rIns="0" bIns="0" rtlCol="0" anchor="ctr"/>
+          <a:lstStyle/>
+          <a:p>
+            <a:pPr algn="ctr" indent="0" marL="0">
+              <a:buNone/>
+            </a:pPr>
+            <a:r>
+              <a:rPr lang="en-US" sz="1000" i="1" dirty="0">
+                <a:solidFill>
+                  <a:srgbClr val="718096"/>
+                </a:solidFill>
+                <a:latin typeface="Calibri" pitchFamily="34" charset="0"/>
+                <a:ea typeface="Calibri" pitchFamily="34" charset="-122"/>
+                <a:cs typeface="Calibri" pitchFamily="34" charset="-120"/>
+              </a:rPr>
+              <a:t>Individual orders — hard to see patterns</a:t>
             </a:r>
             <a:endParaRPr lang="en-US" sz="1000" dirty="0"/>
           </a:p>
@@ -9456,114 +10054,131 @@
       </p:sp>
       <p:sp>
         <p:nvSpPr>
-          <p:cNvPr id="8" name="Shape 6"/>
-          <p:cNvSpPr/>
-          <p:nvPr/>
-        </p:nvSpPr>
-        <p:spPr>
-          <a:xfrm>
-            <a:off x="914400" y="2286000"/>
-            <a:ext cx="109728" cy="109728"/>
-          </a:xfrm>
-          <a:prstGeom prst="ellipse">
-            <a:avLst/>
-          </a:prstGeom>
-          <a:solidFill>
-            <a:srgbClr val="4A90D9"/>
-          </a:solidFill>
-          <a:ln/>
-        </p:spPr>
-      </p:sp>
-      <p:sp>
-        <p:nvSpPr>
-          <p:cNvPr id="9" name="Shape 7"/>
-          <p:cNvSpPr/>
-          <p:nvPr/>
-        </p:nvSpPr>
-        <p:spPr>
-          <a:xfrm>
-            <a:off x="1234440" y="2286000"/>
-            <a:ext cx="109728" cy="109728"/>
-          </a:xfrm>
-          <a:prstGeom prst="ellipse">
-            <a:avLst/>
-          </a:prstGeom>
-          <a:solidFill>
-            <a:srgbClr val="4A90D9"/>
-          </a:solidFill>
-          <a:ln/>
-        </p:spPr>
-      </p:sp>
-      <p:sp>
-        <p:nvSpPr>
-          <p:cNvPr id="10" name="Shape 8"/>
-          <p:cNvSpPr/>
-          <p:nvPr/>
-        </p:nvSpPr>
-        <p:spPr>
-          <a:xfrm>
-            <a:off x="1554480" y="2286000"/>
-            <a:ext cx="109728" cy="109728"/>
-          </a:xfrm>
-          <a:prstGeom prst="ellipse">
-            <a:avLst/>
-          </a:prstGeom>
-          <a:solidFill>
-            <a:srgbClr val="4A90D9"/>
-          </a:solidFill>
-          <a:ln/>
-        </p:spPr>
-      </p:sp>
-      <p:sp>
-        <p:nvSpPr>
-          <p:cNvPr id="11" name="Shape 9"/>
-          <p:cNvSpPr/>
-          <p:nvPr/>
-        </p:nvSpPr>
-        <p:spPr>
-          <a:xfrm>
-            <a:off x="1874520" y="2286000"/>
-            <a:ext cx="109728" cy="109728"/>
-          </a:xfrm>
-          <a:prstGeom prst="ellipse">
-            <a:avLst/>
-          </a:prstGeom>
-          <a:solidFill>
-            <a:srgbClr val="4A90D9"/>
-          </a:solidFill>
-          <a:ln/>
-        </p:spPr>
-      </p:sp>
-      <p:sp>
-        <p:nvSpPr>
-          <p:cNvPr id="12" name="Shape 10"/>
-          <p:cNvSpPr/>
-          <p:nvPr/>
-        </p:nvSpPr>
-        <p:spPr>
-          <a:xfrm>
-            <a:off x="2194560" y="2286000"/>
-            <a:ext cx="109728" cy="109728"/>
-          </a:xfrm>
-          <a:prstGeom prst="ellipse">
-            <a:avLst/>
-          </a:prstGeom>
-          <a:solidFill>
-            <a:srgbClr val="4A90D9"/>
-          </a:solidFill>
-          <a:ln/>
-        </p:spPr>
-      </p:sp>
-      <p:sp>
-        <p:nvSpPr>
-          <p:cNvPr id="13" name="Shape 11"/>
-          <p:cNvSpPr/>
-          <p:nvPr/>
-        </p:nvSpPr>
-        <p:spPr>
-          <a:xfrm>
-            <a:off x="3474720" y="1828800"/>
-            <a:ext cx="2560320" cy="914400"/>
+          <p:cNvPr id="36" name="Text 34"/>
+          <p:cNvSpPr/>
+          <p:nvPr/>
+        </p:nvSpPr>
+        <p:spPr>
+          <a:xfrm>
+            <a:off x="4114800" y="1828800"/>
+            <a:ext cx="548640" cy="548640"/>
+          </a:xfrm>
+          <a:prstGeom prst="rect">
+            <a:avLst/>
+          </a:prstGeom>
+          <a:noFill/>
+          <a:ln/>
+        </p:spPr>
+        <p:txBody>
+          <a:bodyPr wrap="square" lIns="0" tIns="0" rIns="0" bIns="0" rtlCol="0" anchor="ctr"/>
+          <a:lstStyle/>
+          <a:p>
+            <a:pPr algn="ctr" indent="0" marL="0">
+              <a:buNone/>
+            </a:pPr>
+            <a:r>
+              <a:rPr lang="en-US" sz="3200" b="1" dirty="0">
+                <a:solidFill>
+                  <a:srgbClr val="F39C12"/>
+                </a:solidFill>
+                <a:latin typeface="Calibri" pitchFamily="34" charset="0"/>
+                <a:ea typeface="Calibri" pitchFamily="34" charset="-122"/>
+                <a:cs typeface="Calibri" pitchFamily="34" charset="-120"/>
+              </a:rPr>
+              <a:t>→</a:t>
+            </a:r>
+            <a:endParaRPr lang="en-US" sz="3200" dirty="0"/>
+          </a:p>
+        </p:txBody>
+      </p:sp>
+      <p:sp>
+        <p:nvSpPr>
+          <p:cNvPr id="37" name="Text 35"/>
+          <p:cNvSpPr/>
+          <p:nvPr/>
+        </p:nvSpPr>
+        <p:spPr>
+          <a:xfrm>
+            <a:off x="4023360" y="2286000"/>
+            <a:ext cx="731520" cy="274320"/>
+          </a:xfrm>
+          <a:prstGeom prst="rect">
+            <a:avLst/>
+          </a:prstGeom>
+          <a:noFill/>
+          <a:ln/>
+        </p:spPr>
+        <p:txBody>
+          <a:bodyPr wrap="square" lIns="0" tIns="0" rIns="0" bIns="0" rtlCol="0" anchor="ctr"/>
+          <a:lstStyle/>
+          <a:p>
+            <a:pPr algn="ctr" indent="0" marL="0">
+              <a:buNone/>
+            </a:pPr>
+            <a:r>
+              <a:rPr lang="en-US" sz="1000" dirty="0">
+                <a:solidFill>
+                  <a:srgbClr val="F39C12"/>
+                </a:solidFill>
+                <a:latin typeface="Calibri" pitchFamily="34" charset="0"/>
+                <a:ea typeface="Calibri" pitchFamily="34" charset="-122"/>
+                <a:cs typeface="Calibri" pitchFamily="34" charset="-120"/>
+              </a:rPr>
+              <a:t>Spark</a:t>
+            </a:r>
+            <a:endParaRPr lang="en-US" sz="1000" dirty="0"/>
+          </a:p>
+        </p:txBody>
+      </p:sp>
+      <p:sp>
+        <p:nvSpPr>
+          <p:cNvPr id="38" name="Text 36"/>
+          <p:cNvSpPr/>
+          <p:nvPr/>
+        </p:nvSpPr>
+        <p:spPr>
+          <a:xfrm>
+            <a:off x="4754880" y="1005840"/>
+            <a:ext cx="4023360" cy="274320"/>
+          </a:xfrm>
+          <a:prstGeom prst="rect">
+            <a:avLst/>
+          </a:prstGeom>
+          <a:noFill/>
+          <a:ln/>
+        </p:spPr>
+        <p:txBody>
+          <a:bodyPr wrap="square" lIns="0" tIns="0" rIns="0" bIns="0" rtlCol="0" anchor="ctr"/>
+          <a:lstStyle/>
+          <a:p>
+            <a:pPr algn="ctr" indent="0" marL="0">
+              <a:buNone/>
+            </a:pPr>
+            <a:r>
+              <a:rPr lang="en-US" sz="1300" b="1" dirty="0">
+                <a:solidFill>
+                  <a:srgbClr val="FFFFFF"/>
+                </a:solidFill>
+                <a:latin typeface="Calibri" pitchFamily="34" charset="0"/>
+                <a:ea typeface="Calibri" pitchFamily="34" charset="-122"/>
+                <a:cs typeface="Calibri" pitchFamily="34" charset="-120"/>
+              </a:rPr>
+              <a:t>Windowed Risk Signals</a:t>
+            </a:r>
+            <a:endParaRPr lang="en-US" sz="1300" dirty="0"/>
+          </a:p>
+        </p:txBody>
+      </p:sp>
+      <p:sp>
+        <p:nvSpPr>
+          <p:cNvPr id="39" name="Shape 37"/>
+          <p:cNvSpPr/>
+          <p:nvPr/>
+        </p:nvSpPr>
+        <p:spPr>
+          <a:xfrm>
+            <a:off x="4846320" y="1371600"/>
+            <a:ext cx="3840480" cy="640080"/>
           </a:xfrm>
           <a:prstGeom prst="rect">
             <a:avLst/>
@@ -9581,26 +10196,26 @@
       </p:sp>
       <p:sp>
         <p:nvSpPr>
-          <p:cNvPr id="14" name="Text 12"/>
-          <p:cNvSpPr/>
-          <p:nvPr/>
-        </p:nvSpPr>
-        <p:spPr>
-          <a:xfrm>
-            <a:off x="3474720" y="1828800"/>
-            <a:ext cx="2560320" cy="457200"/>
-          </a:xfrm>
-          <a:prstGeom prst="rect">
-            <a:avLst/>
-          </a:prstGeom>
-          <a:noFill/>
-          <a:ln/>
-        </p:spPr>
-        <p:txBody>
-          <a:bodyPr wrap="square" lIns="0" tIns="0" rIns="0" bIns="0" rtlCol="0" anchor="ctr"/>
-          <a:lstStyle/>
-          <a:p>
-            <a:pPr algn="ctr" indent="0" marL="0">
+          <p:cNvPr id="40" name="Text 38"/>
+          <p:cNvSpPr/>
+          <p:nvPr/>
+        </p:nvSpPr>
+        <p:spPr>
+          <a:xfrm>
+            <a:off x="5029200" y="1371600"/>
+            <a:ext cx="2286000" cy="320040"/>
+          </a:xfrm>
+          <a:prstGeom prst="rect">
+            <a:avLst/>
+          </a:prstGeom>
+          <a:noFill/>
+          <a:ln/>
+        </p:spPr>
+        <p:txBody>
+          <a:bodyPr wrap="square" lIns="0" tIns="0" rIns="0" bIns="0" rtlCol="0" anchor="ctr"/>
+          <a:lstStyle/>
+          <a:p>
+            <a:pPr indent="0" marL="0">
               <a:buNone/>
             </a:pPr>
             <a:r>
@@ -9612,24 +10227,85 @@
                 <a:ea typeface="Consolas" pitchFamily="34" charset="-122"/>
                 <a:cs typeface="Consolas" pitchFamily="34" charset="-120"/>
               </a:rPr>
-              <a:t>Window 2</a:t>
+              <a:t>Acct 12345  |  :00–:60</a:t>
             </a:r>
             <a:endParaRPr lang="en-US" sz="1000" dirty="0"/>
           </a:p>
-          <a:p>
-            <a:pPr algn="ctr" indent="0" marL="0">
+        </p:txBody>
+      </p:sp>
+      <p:sp>
+        <p:nvSpPr>
+          <p:cNvPr id="41" name="Text 39"/>
+          <p:cNvSpPr/>
+          <p:nvPr/>
+        </p:nvSpPr>
+        <p:spPr>
+          <a:xfrm>
+            <a:off x="7498080" y="1371600"/>
+            <a:ext cx="1005840" cy="320040"/>
+          </a:xfrm>
+          <a:prstGeom prst="rect">
+            <a:avLst/>
+          </a:prstGeom>
+          <a:noFill/>
+          <a:ln/>
+        </p:spPr>
+        <p:txBody>
+          <a:bodyPr wrap="square" lIns="0" tIns="0" rIns="0" bIns="0" rtlCol="0" anchor="ctr"/>
+          <a:lstStyle/>
+          <a:p>
+            <a:pPr algn="r" indent="0" marL="0">
+              <a:buNone/>
+            </a:pPr>
+            <a:r>
+              <a:rPr lang="en-US" sz="1100" b="1" dirty="0">
+                <a:solidFill>
+                  <a:srgbClr val="27AE60"/>
+                </a:solidFill>
+                <a:latin typeface="Calibri" pitchFamily="34" charset="0"/>
+                <a:ea typeface="Calibri" pitchFamily="34" charset="-122"/>
+                <a:cs typeface="Calibri" pitchFamily="34" charset="-120"/>
+              </a:rPr>
+              <a:t>NORMAL</a:t>
+            </a:r>
+            <a:endParaRPr lang="en-US" sz="1100" dirty="0"/>
+          </a:p>
+        </p:txBody>
+      </p:sp>
+      <p:sp>
+        <p:nvSpPr>
+          <p:cNvPr id="42" name="Text 40"/>
+          <p:cNvSpPr/>
+          <p:nvPr/>
+        </p:nvSpPr>
+        <p:spPr>
+          <a:xfrm>
+            <a:off x="5029200" y="1691640"/>
+            <a:ext cx="3474720" cy="274320"/>
+          </a:xfrm>
+          <a:prstGeom prst="rect">
+            <a:avLst/>
+          </a:prstGeom>
+          <a:noFill/>
+          <a:ln/>
+        </p:spPr>
+        <p:txBody>
+          <a:bodyPr wrap="square" lIns="0" tIns="0" rIns="0" bIns="0" rtlCol="0" anchor="ctr"/>
+          <a:lstStyle/>
+          <a:p>
+            <a:pPr indent="0" marL="0">
               <a:buNone/>
             </a:pPr>
             <a:r>
               <a:rPr lang="en-US" sz="1000" dirty="0">
                 <a:solidFill>
-                  <a:srgbClr val="27AE60"/>
+                  <a:srgbClr val="A0AEC0"/>
                 </a:solidFill>
                 <a:latin typeface="Consolas" pitchFamily="34" charset="0"/>
                 <a:ea typeface="Consolas" pitchFamily="34" charset="-122"/>
                 <a:cs typeface="Consolas" pitchFamily="34" charset="-120"/>
               </a:rPr>
-              <a:t>:00 – :60</a:t>
+              <a:t>12 orders  |  $48K  |  4 symbols</a:t>
             </a:r>
             <a:endParaRPr lang="en-US" sz="1000" dirty="0"/>
           </a:p>
@@ -9637,184 +10313,24 @@
       </p:sp>
       <p:sp>
         <p:nvSpPr>
-          <p:cNvPr id="15" name="Shape 13"/>
-          <p:cNvSpPr/>
-          <p:nvPr/>
-        </p:nvSpPr>
-        <p:spPr>
-          <a:xfrm>
-            <a:off x="3657600" y="2286000"/>
-            <a:ext cx="109728" cy="109728"/>
-          </a:xfrm>
-          <a:prstGeom prst="ellipse">
-            <a:avLst/>
-          </a:prstGeom>
-          <a:solidFill>
-            <a:srgbClr val="27AE60"/>
-          </a:solidFill>
-          <a:ln/>
-        </p:spPr>
-      </p:sp>
-      <p:sp>
-        <p:nvSpPr>
-          <p:cNvPr id="16" name="Shape 14"/>
-          <p:cNvSpPr/>
-          <p:nvPr/>
-        </p:nvSpPr>
-        <p:spPr>
-          <a:xfrm>
-            <a:off x="3977640" y="2286000"/>
-            <a:ext cx="109728" cy="109728"/>
-          </a:xfrm>
-          <a:prstGeom prst="ellipse">
-            <a:avLst/>
-          </a:prstGeom>
-          <a:solidFill>
-            <a:srgbClr val="27AE60"/>
-          </a:solidFill>
-          <a:ln/>
-        </p:spPr>
-      </p:sp>
-      <p:sp>
-        <p:nvSpPr>
-          <p:cNvPr id="17" name="Shape 15"/>
-          <p:cNvSpPr/>
-          <p:nvPr/>
-        </p:nvSpPr>
-        <p:spPr>
-          <a:xfrm>
-            <a:off x="4297680" y="2286000"/>
-            <a:ext cx="109728" cy="109728"/>
-          </a:xfrm>
-          <a:prstGeom prst="ellipse">
-            <a:avLst/>
-          </a:prstGeom>
-          <a:solidFill>
-            <a:srgbClr val="27AE60"/>
-          </a:solidFill>
-          <a:ln/>
-        </p:spPr>
-      </p:sp>
-      <p:sp>
-        <p:nvSpPr>
-          <p:cNvPr id="18" name="Shape 16"/>
-          <p:cNvSpPr/>
-          <p:nvPr/>
-        </p:nvSpPr>
-        <p:spPr>
-          <a:xfrm>
-            <a:off x="4617720" y="2286000"/>
-            <a:ext cx="109728" cy="109728"/>
-          </a:xfrm>
-          <a:prstGeom prst="ellipse">
-            <a:avLst/>
-          </a:prstGeom>
-          <a:solidFill>
-            <a:srgbClr val="27AE60"/>
-          </a:solidFill>
-          <a:ln/>
-        </p:spPr>
-      </p:sp>
-      <p:sp>
-        <p:nvSpPr>
-          <p:cNvPr id="19" name="Shape 17"/>
-          <p:cNvSpPr/>
-          <p:nvPr/>
-        </p:nvSpPr>
-        <p:spPr>
-          <a:xfrm>
-            <a:off x="4937760" y="2286000"/>
-            <a:ext cx="109728" cy="109728"/>
-          </a:xfrm>
-          <a:prstGeom prst="ellipse">
-            <a:avLst/>
-          </a:prstGeom>
-          <a:solidFill>
-            <a:srgbClr val="27AE60"/>
-          </a:solidFill>
-          <a:ln/>
-        </p:spPr>
-      </p:sp>
-      <p:sp>
-        <p:nvSpPr>
-          <p:cNvPr id="20" name="Shape 18"/>
-          <p:cNvSpPr/>
-          <p:nvPr/>
-        </p:nvSpPr>
-        <p:spPr>
-          <a:xfrm>
-            <a:off x="5257800" y="2286000"/>
-            <a:ext cx="109728" cy="109728"/>
-          </a:xfrm>
-          <a:prstGeom prst="ellipse">
-            <a:avLst/>
-          </a:prstGeom>
-          <a:solidFill>
-            <a:srgbClr val="27AE60"/>
-          </a:solidFill>
-          <a:ln/>
-        </p:spPr>
-      </p:sp>
-      <p:sp>
-        <p:nvSpPr>
-          <p:cNvPr id="21" name="Shape 19"/>
-          <p:cNvSpPr/>
-          <p:nvPr/>
-        </p:nvSpPr>
-        <p:spPr>
-          <a:xfrm>
-            <a:off x="5577840" y="2286000"/>
-            <a:ext cx="109728" cy="109728"/>
-          </a:xfrm>
-          <a:prstGeom prst="ellipse">
-            <a:avLst/>
-          </a:prstGeom>
-          <a:solidFill>
-            <a:srgbClr val="27AE60"/>
-          </a:solidFill>
-          <a:ln/>
-        </p:spPr>
-      </p:sp>
-      <p:sp>
-        <p:nvSpPr>
-          <p:cNvPr id="22" name="Shape 20"/>
-          <p:cNvSpPr/>
-          <p:nvPr/>
-        </p:nvSpPr>
-        <p:spPr>
-          <a:xfrm>
-            <a:off x="3657600" y="2514600"/>
-            <a:ext cx="109728" cy="109728"/>
-          </a:xfrm>
-          <a:prstGeom prst="ellipse">
-            <a:avLst/>
-          </a:prstGeom>
-          <a:solidFill>
-            <a:srgbClr val="27AE60"/>
-          </a:solidFill>
-          <a:ln/>
-        </p:spPr>
-      </p:sp>
-      <p:sp>
-        <p:nvSpPr>
-          <p:cNvPr id="23" name="Shape 21"/>
-          <p:cNvSpPr/>
-          <p:nvPr/>
-        </p:nvSpPr>
-        <p:spPr>
-          <a:xfrm>
-            <a:off x="6217920" y="1828800"/>
-            <a:ext cx="2560320" cy="914400"/>
-          </a:xfrm>
-          <a:prstGeom prst="rect">
-            <a:avLst/>
-          </a:prstGeom>
-          <a:solidFill>
-            <a:srgbClr val="232842"/>
+          <p:cNvPr id="43" name="Shape 41"/>
+          <p:cNvSpPr/>
+          <p:nvPr/>
+        </p:nvSpPr>
+        <p:spPr>
+          <a:xfrm>
+            <a:off x="4846320" y="2148840"/>
+            <a:ext cx="3840480" cy="640080"/>
+          </a:xfrm>
+          <a:prstGeom prst="rect">
+            <a:avLst/>
+          </a:prstGeom>
+          <a:solidFill>
+            <a:srgbClr val="2A1520"/>
           </a:solidFill>
           <a:ln w="25400">
             <a:solidFill>
-              <a:srgbClr val="F39C12"/>
+              <a:srgbClr val="E74C3C"/>
             </a:solidFill>
             <a:prstDash val="solid"/>
           </a:ln>
@@ -9822,55 +10338,116 @@
       </p:sp>
       <p:sp>
         <p:nvSpPr>
-          <p:cNvPr id="24" name="Text 22"/>
-          <p:cNvSpPr/>
-          <p:nvPr/>
-        </p:nvSpPr>
-        <p:spPr>
-          <a:xfrm>
-            <a:off x="6217920" y="1828800"/>
-            <a:ext cx="2560320" cy="457200"/>
-          </a:xfrm>
-          <a:prstGeom prst="rect">
-            <a:avLst/>
-          </a:prstGeom>
-          <a:noFill/>
-          <a:ln/>
-        </p:spPr>
-        <p:txBody>
-          <a:bodyPr wrap="square" lIns="0" tIns="0" rIns="0" bIns="0" rtlCol="0" anchor="ctr"/>
-          <a:lstStyle/>
-          <a:p>
-            <a:pPr algn="ctr" indent="0" marL="0">
+          <p:cNvPr id="44" name="Text 42"/>
+          <p:cNvSpPr/>
+          <p:nvPr/>
+        </p:nvSpPr>
+        <p:spPr>
+          <a:xfrm>
+            <a:off x="5029200" y="2148840"/>
+            <a:ext cx="2286000" cy="320040"/>
+          </a:xfrm>
+          <a:prstGeom prst="rect">
+            <a:avLst/>
+          </a:prstGeom>
+          <a:noFill/>
+          <a:ln/>
+        </p:spPr>
+        <p:txBody>
+          <a:bodyPr wrap="square" lIns="0" tIns="0" rIns="0" bIns="0" rtlCol="0" anchor="ctr"/>
+          <a:lstStyle/>
+          <a:p>
+            <a:pPr indent="0" marL="0">
               <a:buNone/>
             </a:pPr>
             <a:r>
               <a:rPr lang="en-US" sz="1000" dirty="0">
                 <a:solidFill>
-                  <a:srgbClr val="F39C12"/>
+                  <a:srgbClr val="E74C3C"/>
                 </a:solidFill>
                 <a:latin typeface="Consolas" pitchFamily="34" charset="0"/>
                 <a:ea typeface="Consolas" pitchFamily="34" charset="-122"/>
                 <a:cs typeface="Consolas" pitchFamily="34" charset="-120"/>
               </a:rPr>
-              <a:t>Window 3</a:t>
+              <a:t>Acct 67890  |  :00–:60</a:t>
             </a:r>
             <a:endParaRPr lang="en-US" sz="1000" dirty="0"/>
           </a:p>
-          <a:p>
-            <a:pPr algn="ctr" indent="0" marL="0">
+        </p:txBody>
+      </p:sp>
+      <p:sp>
+        <p:nvSpPr>
+          <p:cNvPr id="45" name="Text 43"/>
+          <p:cNvSpPr/>
+          <p:nvPr/>
+        </p:nvSpPr>
+        <p:spPr>
+          <a:xfrm>
+            <a:off x="7498080" y="2148840"/>
+            <a:ext cx="1005840" cy="320040"/>
+          </a:xfrm>
+          <a:prstGeom prst="rect">
+            <a:avLst/>
+          </a:prstGeom>
+          <a:noFill/>
+          <a:ln/>
+        </p:spPr>
+        <p:txBody>
+          <a:bodyPr wrap="square" lIns="0" tIns="0" rIns="0" bIns="0" rtlCol="0" anchor="ctr"/>
+          <a:lstStyle/>
+          <a:p>
+            <a:pPr algn="r" indent="0" marL="0">
+              <a:buNone/>
+            </a:pPr>
+            <a:r>
+              <a:rPr lang="en-US" sz="1100" b="1" dirty="0">
+                <a:solidFill>
+                  <a:srgbClr val="E74C3C"/>
+                </a:solidFill>
+                <a:latin typeface="Calibri" pitchFamily="34" charset="0"/>
+                <a:ea typeface="Calibri" pitchFamily="34" charset="-122"/>
+                <a:cs typeface="Calibri" pitchFamily="34" charset="-120"/>
+              </a:rPr>
+              <a:t>BREACH</a:t>
+            </a:r>
+            <a:endParaRPr lang="en-US" sz="1100" dirty="0"/>
+          </a:p>
+        </p:txBody>
+      </p:sp>
+      <p:sp>
+        <p:nvSpPr>
+          <p:cNvPr id="46" name="Text 44"/>
+          <p:cNvSpPr/>
+          <p:nvPr/>
+        </p:nvSpPr>
+        <p:spPr>
+          <a:xfrm>
+            <a:off x="5029200" y="2468880"/>
+            <a:ext cx="3474720" cy="274320"/>
+          </a:xfrm>
+          <a:prstGeom prst="rect">
+            <a:avLst/>
+          </a:prstGeom>
+          <a:noFill/>
+          <a:ln/>
+        </p:spPr>
+        <p:txBody>
+          <a:bodyPr wrap="square" lIns="0" tIns="0" rIns="0" bIns="0" rtlCol="0" anchor="ctr"/>
+          <a:lstStyle/>
+          <a:p>
+            <a:pPr indent="0" marL="0">
               <a:buNone/>
             </a:pPr>
             <a:r>
               <a:rPr lang="en-US" sz="1000" dirty="0">
                 <a:solidFill>
-                  <a:srgbClr val="F39C12"/>
+                  <a:srgbClr val="E74C3C"/>
                 </a:solidFill>
                 <a:latin typeface="Consolas" pitchFamily="34" charset="0"/>
                 <a:ea typeface="Consolas" pitchFamily="34" charset="-122"/>
                 <a:cs typeface="Consolas" pitchFamily="34" charset="-120"/>
               </a:rPr>
-              <a:t>:00 – :60</a:t>
+              <a:t>147 orders  |  $1.2M  |  92% AAPL</a:t>
             </a:r>
             <a:endParaRPr lang="en-US" sz="1000" dirty="0"/>
           </a:p>
@@ -9878,287 +10455,133 @@
       </p:sp>
       <p:sp>
         <p:nvSpPr>
-          <p:cNvPr id="25" name="Shape 23"/>
-          <p:cNvSpPr/>
-          <p:nvPr/>
-        </p:nvSpPr>
-        <p:spPr>
-          <a:xfrm>
-            <a:off x="6400800" y="2286000"/>
-            <a:ext cx="109728" cy="109728"/>
-          </a:xfrm>
-          <a:prstGeom prst="ellipse">
-            <a:avLst/>
-          </a:prstGeom>
-          <a:solidFill>
-            <a:srgbClr val="F39C12"/>
-          </a:solidFill>
-          <a:ln/>
-        </p:spPr>
-      </p:sp>
-      <p:sp>
-        <p:nvSpPr>
-          <p:cNvPr id="26" name="Shape 24"/>
-          <p:cNvSpPr/>
-          <p:nvPr/>
-        </p:nvSpPr>
-        <p:spPr>
-          <a:xfrm>
-            <a:off x="6720840" y="2286000"/>
-            <a:ext cx="109728" cy="109728"/>
-          </a:xfrm>
-          <a:prstGeom prst="ellipse">
-            <a:avLst/>
-          </a:prstGeom>
-          <a:solidFill>
-            <a:srgbClr val="F39C12"/>
-          </a:solidFill>
-          <a:ln/>
-        </p:spPr>
-      </p:sp>
-      <p:sp>
-        <p:nvSpPr>
-          <p:cNvPr id="27" name="Shape 25"/>
-          <p:cNvSpPr/>
-          <p:nvPr/>
-        </p:nvSpPr>
-        <p:spPr>
-          <a:xfrm>
-            <a:off x="7040880" y="2286000"/>
-            <a:ext cx="109728" cy="109728"/>
-          </a:xfrm>
-          <a:prstGeom prst="ellipse">
-            <a:avLst/>
-          </a:prstGeom>
-          <a:solidFill>
-            <a:srgbClr val="F39C12"/>
-          </a:solidFill>
-          <a:ln/>
-        </p:spPr>
-      </p:sp>
-      <p:sp>
-        <p:nvSpPr>
-          <p:cNvPr id="28" name="Shape 26"/>
-          <p:cNvSpPr/>
-          <p:nvPr/>
-        </p:nvSpPr>
-        <p:spPr>
-          <a:xfrm>
-            <a:off x="7360920" y="2286000"/>
-            <a:ext cx="109728" cy="109728"/>
-          </a:xfrm>
-          <a:prstGeom prst="ellipse">
-            <a:avLst/>
-          </a:prstGeom>
-          <a:solidFill>
-            <a:srgbClr val="F39C12"/>
-          </a:solidFill>
-          <a:ln/>
-        </p:spPr>
-      </p:sp>
-      <p:sp>
-        <p:nvSpPr>
-          <p:cNvPr id="29" name="Shape 27"/>
-          <p:cNvSpPr/>
-          <p:nvPr/>
-        </p:nvSpPr>
-        <p:spPr>
-          <a:xfrm>
-            <a:off x="7680960" y="2286000"/>
-            <a:ext cx="109728" cy="109728"/>
-          </a:xfrm>
-          <a:prstGeom prst="ellipse">
-            <a:avLst/>
-          </a:prstGeom>
-          <a:solidFill>
-            <a:srgbClr val="F39C12"/>
-          </a:solidFill>
-          <a:ln/>
-        </p:spPr>
-      </p:sp>
-      <p:sp>
-        <p:nvSpPr>
-          <p:cNvPr id="30" name="Shape 28"/>
-          <p:cNvSpPr/>
-          <p:nvPr/>
-        </p:nvSpPr>
-        <p:spPr>
-          <a:xfrm>
-            <a:off x="8001000" y="2286000"/>
-            <a:ext cx="109728" cy="109728"/>
-          </a:xfrm>
-          <a:prstGeom prst="ellipse">
-            <a:avLst/>
-          </a:prstGeom>
-          <a:solidFill>
-            <a:srgbClr val="F39C12"/>
-          </a:solidFill>
-          <a:ln/>
-        </p:spPr>
-      </p:sp>
-      <p:sp>
-        <p:nvSpPr>
-          <p:cNvPr id="31" name="Shape 29"/>
-          <p:cNvSpPr/>
-          <p:nvPr/>
-        </p:nvSpPr>
-        <p:spPr>
-          <a:xfrm>
-            <a:off x="8321040" y="2286000"/>
-            <a:ext cx="109728" cy="109728"/>
-          </a:xfrm>
-          <a:prstGeom prst="ellipse">
-            <a:avLst/>
-          </a:prstGeom>
-          <a:solidFill>
-            <a:srgbClr val="F39C12"/>
-          </a:solidFill>
-          <a:ln/>
-        </p:spPr>
-      </p:sp>
-      <p:sp>
-        <p:nvSpPr>
-          <p:cNvPr id="32" name="Shape 30"/>
-          <p:cNvSpPr/>
-          <p:nvPr/>
-        </p:nvSpPr>
-        <p:spPr>
-          <a:xfrm>
-            <a:off x="6400800" y="2514600"/>
-            <a:ext cx="109728" cy="109728"/>
-          </a:xfrm>
-          <a:prstGeom prst="ellipse">
-            <a:avLst/>
-          </a:prstGeom>
-          <a:solidFill>
-            <a:srgbClr val="F39C12"/>
-          </a:solidFill>
-          <a:ln/>
-        </p:spPr>
-      </p:sp>
-      <p:sp>
-        <p:nvSpPr>
-          <p:cNvPr id="33" name="Shape 31"/>
-          <p:cNvSpPr/>
-          <p:nvPr/>
-        </p:nvSpPr>
-        <p:spPr>
-          <a:xfrm>
-            <a:off x="6720840" y="2514600"/>
-            <a:ext cx="109728" cy="109728"/>
-          </a:xfrm>
-          <a:prstGeom prst="ellipse">
-            <a:avLst/>
-          </a:prstGeom>
-          <a:solidFill>
-            <a:srgbClr val="F39C12"/>
-          </a:solidFill>
-          <a:ln/>
-        </p:spPr>
-      </p:sp>
-      <p:sp>
-        <p:nvSpPr>
-          <p:cNvPr id="34" name="Shape 32"/>
-          <p:cNvSpPr/>
-          <p:nvPr/>
-        </p:nvSpPr>
-        <p:spPr>
-          <a:xfrm>
-            <a:off x="7040880" y="2514600"/>
-            <a:ext cx="109728" cy="109728"/>
-          </a:xfrm>
-          <a:prstGeom prst="ellipse">
-            <a:avLst/>
-          </a:prstGeom>
-          <a:solidFill>
-            <a:srgbClr val="F39C12"/>
-          </a:solidFill>
-          <a:ln/>
-        </p:spPr>
-      </p:sp>
-      <p:sp>
-        <p:nvSpPr>
-          <p:cNvPr id="35" name="Shape 33"/>
-          <p:cNvSpPr/>
-          <p:nvPr/>
-        </p:nvSpPr>
-        <p:spPr>
-          <a:xfrm>
-            <a:off x="7360920" y="2514600"/>
-            <a:ext cx="109728" cy="109728"/>
-          </a:xfrm>
-          <a:prstGeom prst="ellipse">
-            <a:avLst/>
-          </a:prstGeom>
-          <a:solidFill>
-            <a:srgbClr val="F39C12"/>
-          </a:solidFill>
-          <a:ln/>
-        </p:spPr>
-      </p:sp>
-      <p:sp>
-        <p:nvSpPr>
-          <p:cNvPr id="36" name="Shape 34"/>
-          <p:cNvSpPr/>
-          <p:nvPr/>
-        </p:nvSpPr>
-        <p:spPr>
-          <a:xfrm>
-            <a:off x="731520" y="3017520"/>
-            <a:ext cx="7680960" cy="1645920"/>
-          </a:xfrm>
-          <a:prstGeom prst="rect">
-            <a:avLst/>
-          </a:prstGeom>
-          <a:solidFill>
-            <a:srgbClr val="171B2E"/>
-          </a:solidFill>
-          <a:ln/>
-        </p:spPr>
-      </p:sp>
-      <p:sp>
-        <p:nvSpPr>
-          <p:cNvPr id="37" name="Text 35"/>
-          <p:cNvSpPr/>
-          <p:nvPr/>
-        </p:nvSpPr>
-        <p:spPr>
-          <a:xfrm>
-            <a:off x="914400" y="3108960"/>
-            <a:ext cx="7315200" cy="1463040"/>
-          </a:xfrm>
-          <a:prstGeom prst="rect">
-            <a:avLst/>
-          </a:prstGeom>
-          <a:noFill/>
-          <a:ln/>
-        </p:spPr>
-        <p:txBody>
-          <a:bodyPr wrap="square" lIns="0" tIns="0" rIns="0" bIns="0" rtlCol="0" anchor="ctr"/>
-          <a:lstStyle/>
-          <a:p>
-            <a:pPr indent="0" marL="0">
-              <a:buNone/>
-            </a:pPr>
-            <a:r>
-              <a:rPr lang="en-US" sz="1200" dirty="0">
-                <a:solidFill>
-                  <a:srgbClr val="A0AEC0"/>
+          <p:cNvPr id="47" name="Shape 45"/>
+          <p:cNvSpPr/>
+          <p:nvPr/>
+        </p:nvSpPr>
+        <p:spPr>
+          <a:xfrm>
+            <a:off x="4846320" y="2926080"/>
+            <a:ext cx="3840480" cy="640080"/>
+          </a:xfrm>
+          <a:prstGeom prst="rect">
+            <a:avLst/>
+          </a:prstGeom>
+          <a:solidFill>
+            <a:srgbClr val="232842"/>
+          </a:solidFill>
+          <a:ln w="25400">
+            <a:solidFill>
+              <a:srgbClr val="27AE60"/>
+            </a:solidFill>
+            <a:prstDash val="solid"/>
+          </a:ln>
+        </p:spPr>
+      </p:sp>
+      <p:sp>
+        <p:nvSpPr>
+          <p:cNvPr id="48" name="Text 46"/>
+          <p:cNvSpPr/>
+          <p:nvPr/>
+        </p:nvSpPr>
+        <p:spPr>
+          <a:xfrm>
+            <a:off x="5029200" y="2926080"/>
+            <a:ext cx="2286000" cy="320040"/>
+          </a:xfrm>
+          <a:prstGeom prst="rect">
+            <a:avLst/>
+          </a:prstGeom>
+          <a:noFill/>
+          <a:ln/>
+        </p:spPr>
+        <p:txBody>
+          <a:bodyPr wrap="square" lIns="0" tIns="0" rIns="0" bIns="0" rtlCol="0" anchor="ctr"/>
+          <a:lstStyle/>
+          <a:p>
+            <a:pPr indent="0" marL="0">
+              <a:buNone/>
+            </a:pPr>
+            <a:r>
+              <a:rPr lang="en-US" sz="1000" dirty="0">
+                <a:solidFill>
+                  <a:srgbClr val="27AE60"/>
                 </a:solidFill>
                 <a:latin typeface="Consolas" pitchFamily="34" charset="0"/>
                 <a:ea typeface="Consolas" pitchFamily="34" charset="-122"/>
                 <a:cs typeface="Consolas" pitchFamily="34" charset="-120"/>
               </a:rPr>
-              <a:t>orders_df</a:t>
-            </a:r>
-            <a:endParaRPr lang="en-US" sz="1200" dirty="0"/>
-          </a:p>
-          <a:p>
-            <a:pPr indent="0" marL="0">
-              <a:buNone/>
-            </a:pPr>
-            <a:r>
-              <a:rPr lang="en-US" sz="1200" dirty="0">
+              <a:t>Acct 54321  |  :00–:60</a:t>
+            </a:r>
+            <a:endParaRPr lang="en-US" sz="1000" dirty="0"/>
+          </a:p>
+        </p:txBody>
+      </p:sp>
+      <p:sp>
+        <p:nvSpPr>
+          <p:cNvPr id="49" name="Text 47"/>
+          <p:cNvSpPr/>
+          <p:nvPr/>
+        </p:nvSpPr>
+        <p:spPr>
+          <a:xfrm>
+            <a:off x="7498080" y="2926080"/>
+            <a:ext cx="1005840" cy="320040"/>
+          </a:xfrm>
+          <a:prstGeom prst="rect">
+            <a:avLst/>
+          </a:prstGeom>
+          <a:noFill/>
+          <a:ln/>
+        </p:spPr>
+        <p:txBody>
+          <a:bodyPr wrap="square" lIns="0" tIns="0" rIns="0" bIns="0" rtlCol="0" anchor="ctr"/>
+          <a:lstStyle/>
+          <a:p>
+            <a:pPr algn="r" indent="0" marL="0">
+              <a:buNone/>
+            </a:pPr>
+            <a:r>
+              <a:rPr lang="en-US" sz="1100" b="1" dirty="0">
+                <a:solidFill>
+                  <a:srgbClr val="27AE60"/>
+                </a:solidFill>
+                <a:latin typeface="Calibri" pitchFamily="34" charset="0"/>
+                <a:ea typeface="Calibri" pitchFamily="34" charset="-122"/>
+                <a:cs typeface="Calibri" pitchFamily="34" charset="-120"/>
+              </a:rPr>
+              <a:t>NORMAL</a:t>
+            </a:r>
+            <a:endParaRPr lang="en-US" sz="1100" dirty="0"/>
+          </a:p>
+        </p:txBody>
+      </p:sp>
+      <p:sp>
+        <p:nvSpPr>
+          <p:cNvPr id="50" name="Text 48"/>
+          <p:cNvSpPr/>
+          <p:nvPr/>
+        </p:nvSpPr>
+        <p:spPr>
+          <a:xfrm>
+            <a:off x="5029200" y="3246120"/>
+            <a:ext cx="3474720" cy="274320"/>
+          </a:xfrm>
+          <a:prstGeom prst="rect">
+            <a:avLst/>
+          </a:prstGeom>
+          <a:noFill/>
+          <a:ln/>
+        </p:spPr>
+        <p:txBody>
+          <a:bodyPr wrap="square" lIns="0" tIns="0" rIns="0" bIns="0" rtlCol="0" anchor="ctr"/>
+          <a:lstStyle/>
+          <a:p>
+            <a:pPr indent="0" marL="0">
+              <a:buNone/>
+            </a:pPr>
+            <a:r>
+              <a:rPr lang="en-US" sz="1000" dirty="0">
                 <a:solidFill>
                   <a:srgbClr val="A0AEC0"/>
                 </a:solidFill>
@@ -10166,16 +10589,97 @@
                 <a:ea typeface="Consolas" pitchFamily="34" charset="-122"/>
                 <a:cs typeface="Consolas" pitchFamily="34" charset="-120"/>
               </a:rPr>
-              <a:t>  .withWatermark("event_time", "60 seconds")</a:t>
-            </a:r>
-            <a:endParaRPr lang="en-US" sz="1200" dirty="0"/>
-          </a:p>
-          <a:p>
-            <a:pPr indent="0" marL="0">
-              <a:buNone/>
-            </a:pPr>
-            <a:r>
-              <a:rPr lang="en-US" sz="1200" dirty="0">
+              <a:t>8 orders  |  $22K  |  3 symbols</a:t>
+            </a:r>
+            <a:endParaRPr lang="en-US" sz="1000" dirty="0"/>
+          </a:p>
+        </p:txBody>
+      </p:sp>
+      <p:sp>
+        <p:nvSpPr>
+          <p:cNvPr id="51" name="Text 49"/>
+          <p:cNvSpPr/>
+          <p:nvPr/>
+        </p:nvSpPr>
+        <p:spPr>
+          <a:xfrm>
+            <a:off x="4754880" y="3657600"/>
+            <a:ext cx="4023360" cy="228600"/>
+          </a:xfrm>
+          <a:prstGeom prst="rect">
+            <a:avLst/>
+          </a:prstGeom>
+          <a:noFill/>
+          <a:ln/>
+        </p:spPr>
+        <p:txBody>
+          <a:bodyPr wrap="square" lIns="0" tIns="0" rIns="0" bIns="0" rtlCol="0" anchor="ctr"/>
+          <a:lstStyle/>
+          <a:p>
+            <a:pPr algn="ctr" indent="0" marL="0">
+              <a:buNone/>
+            </a:pPr>
+            <a:r>
+              <a:rPr lang="en-US" sz="1000" i="1" dirty="0">
+                <a:solidFill>
+                  <a:srgbClr val="718096"/>
+                </a:solidFill>
+                <a:latin typeface="Calibri" pitchFamily="34" charset="0"/>
+                <a:ea typeface="Calibri" pitchFamily="34" charset="-122"/>
+                <a:cs typeface="Calibri" pitchFamily="34" charset="-120"/>
+              </a:rPr>
+              <a:t>One summary per account per 60 seconds — breaches trigger automatic KILL</a:t>
+            </a:r>
+            <a:endParaRPr lang="en-US" sz="1000" dirty="0"/>
+          </a:p>
+        </p:txBody>
+      </p:sp>
+      <p:sp>
+        <p:nvSpPr>
+          <p:cNvPr id="52" name="Shape 50"/>
+          <p:cNvSpPr/>
+          <p:nvPr/>
+        </p:nvSpPr>
+        <p:spPr>
+          <a:xfrm>
+            <a:off x="365760" y="4069080"/>
+            <a:ext cx="8412480" cy="914400"/>
+          </a:xfrm>
+          <a:prstGeom prst="rect">
+            <a:avLst/>
+          </a:prstGeom>
+          <a:solidFill>
+            <a:srgbClr val="171B2E"/>
+          </a:solidFill>
+          <a:ln/>
+        </p:spPr>
+      </p:sp>
+      <p:sp>
+        <p:nvSpPr>
+          <p:cNvPr id="53" name="Text 51"/>
+          <p:cNvSpPr/>
+          <p:nvPr/>
+        </p:nvSpPr>
+        <p:spPr>
+          <a:xfrm>
+            <a:off x="548640" y="4160520"/>
+            <a:ext cx="8046720" cy="365760"/>
+          </a:xfrm>
+          <a:prstGeom prst="rect">
+            <a:avLst/>
+          </a:prstGeom>
+          <a:noFill/>
+          <a:ln/>
+        </p:spPr>
+        <p:txBody>
+          <a:bodyPr wrap="square" lIns="0" tIns="0" rIns="0" bIns="0" rtlCol="0" anchor="ctr"/>
+          <a:lstStyle/>
+          <a:p>
+            <a:pPr indent="0" marL="0">
+              <a:buNone/>
+            </a:pPr>
+            <a:r>
+              <a:rPr lang="en-US" sz="1100" dirty="0">
                 <a:solidFill>
                   <a:srgbClr val="A0AEC0"/>
                 </a:solidFill>
@@ -10183,77 +10687,132 @@
                 <a:ea typeface="Consolas" pitchFamily="34" charset="-122"/>
                 <a:cs typeface="Consolas" pitchFamily="34" charset="-120"/>
               </a:rPr>
-              <a:t>  .groupBy(</a:t>
-            </a:r>
-            <a:endParaRPr lang="en-US" sz="1200" dirty="0"/>
-          </a:p>
-          <a:p>
-            <a:pPr indent="0" marL="0">
-              <a:buNone/>
-            </a:pPr>
-            <a:r>
-              <a:rPr lang="en-US" sz="1200" dirty="0">
-                <a:solidFill>
-                  <a:srgbClr val="4A90D9"/>
+              <a:t>.groupBy(</a:t>
+            </a:r>
+            <a:pPr indent="0" marL="0">
+              <a:buNone/>
+            </a:pPr>
+            <a:r>
+              <a:rPr lang="en-US" sz="1100" dirty="0">
+                <a:solidFill>
+                  <a:srgbClr val="F39C12"/>
                 </a:solidFill>
                 <a:latin typeface="Consolas" pitchFamily="34" charset="0"/>
                 <a:ea typeface="Consolas" pitchFamily="34" charset="-122"/>
                 <a:cs typeface="Consolas" pitchFamily="34" charset="-120"/>
               </a:rPr>
-              <a:t>      window(event_time, '60 seconds'),</a:t>
-            </a:r>
-            <a:endParaRPr lang="en-US" sz="1200" dirty="0"/>
-          </a:p>
-          <a:p>
-            <a:pPr indent="0" marL="0">
-              <a:buNone/>
-            </a:pPr>
-            <a:r>
-              <a:rPr lang="en-US" sz="1200" dirty="0">
-                <a:solidFill>
-                  <a:srgbClr val="27AE60"/>
+              <a:t>window(event_time, '60 seconds')</a:t>
+            </a:r>
+            <a:pPr indent="0" marL="0">
+              <a:buNone/>
+            </a:pPr>
+            <a:r>
+              <a:rPr lang="en-US" sz="1100" dirty="0">
+                <a:solidFill>
+                  <a:srgbClr val="A0AEC0"/>
                 </a:solidFill>
                 <a:latin typeface="Consolas" pitchFamily="34" charset="0"/>
                 <a:ea typeface="Consolas" pitchFamily="34" charset="-122"/>
                 <a:cs typeface="Consolas" pitchFamily="34" charset="-120"/>
               </a:rPr>
-              <a:t>      account_id</a:t>
-            </a:r>
-            <a:endParaRPr lang="en-US" sz="1200" dirty="0"/>
-          </a:p>
-          <a:p>
-            <a:pPr indent="0" marL="0">
-              <a:buNone/>
-            </a:pPr>
-            <a:r>
-              <a:rPr lang="en-US" sz="1200" dirty="0">
-                <a:solidFill>
-                  <a:srgbClr val="A0AEC0"/>
+              <a:t>, </a:t>
+            </a:r>
+            <a:pPr indent="0" marL="0">
+              <a:buNone/>
+            </a:pPr>
+            <a:r>
+              <a:rPr lang="en-US" sz="1100" dirty="0">
+                <a:solidFill>
+                  <a:srgbClr val="4A90D9"/>
                 </a:solidFill>
                 <a:latin typeface="Consolas" pitchFamily="34" charset="0"/>
                 <a:ea typeface="Consolas" pitchFamily="34" charset="-122"/>
                 <a:cs typeface="Consolas" pitchFamily="34" charset="-120"/>
               </a:rPr>
-              <a:t>  )</a:t>
-            </a:r>
-            <a:endParaRPr lang="en-US" sz="1200" dirty="0"/>
-          </a:p>
-          <a:p>
-            <a:pPr indent="0" marL="0">
-              <a:buNone/>
-            </a:pPr>
-            <a:r>
-              <a:rPr lang="en-US" sz="1200" dirty="0">
-                <a:solidFill>
-                  <a:srgbClr val="F39C12"/>
+              <a:t>account_id</a:t>
+            </a:r>
+            <a:pPr indent="0" marL="0">
+              <a:buNone/>
+            </a:pPr>
+            <a:r>
+              <a:rPr lang="en-US" sz="1100" dirty="0">
+                <a:solidFill>
+                  <a:srgbClr val="A0AEC0"/>
                 </a:solidFill>
                 <a:latin typeface="Consolas" pitchFamily="34" charset="0"/>
                 <a:ea typeface="Consolas" pitchFamily="34" charset="-122"/>
                 <a:cs typeface="Consolas" pitchFamily="34" charset="-120"/>
               </a:rPr>
-              <a:t>  .agg(count(*), sum(notional), collect_list(symbol))</a:t>
-            </a:r>
-            <a:endParaRPr lang="en-US" sz="1200" dirty="0"/>
+              <a:t>).agg(</a:t>
+            </a:r>
+            <a:pPr indent="0" marL="0">
+              <a:buNone/>
+            </a:pPr>
+            <a:r>
+              <a:rPr lang="en-US" sz="1100" dirty="0">
+                <a:solidFill>
+                  <a:srgbClr val="27AE60"/>
+                </a:solidFill>
+                <a:latin typeface="Consolas" pitchFamily="34" charset="0"/>
+                <a:ea typeface="Consolas" pitchFamily="34" charset="-122"/>
+                <a:cs typeface="Consolas" pitchFamily="34" charset="-120"/>
+              </a:rPr>
+              <a:t>count(*), sum(notional), collect_list(symbol)</a:t>
+            </a:r>
+            <a:pPr indent="0" marL="0">
+              <a:buNone/>
+            </a:pPr>
+            <a:r>
+              <a:rPr lang="en-US" sz="1100" dirty="0">
+                <a:solidFill>
+                  <a:srgbClr val="A0AEC0"/>
+                </a:solidFill>
+                <a:latin typeface="Consolas" pitchFamily="34" charset="0"/>
+                <a:ea typeface="Consolas" pitchFamily="34" charset="-122"/>
+                <a:cs typeface="Consolas" pitchFamily="34" charset="-120"/>
+              </a:rPr>
+              <a:t>)</a:t>
+            </a:r>
+            <a:endParaRPr lang="en-US" sz="1100" dirty="0"/>
+          </a:p>
+        </p:txBody>
+      </p:sp>
+      <p:sp>
+        <p:nvSpPr>
+          <p:cNvPr id="54" name="Text 52"/>
+          <p:cNvSpPr/>
+          <p:nvPr/>
+        </p:nvSpPr>
+        <p:spPr>
+          <a:xfrm>
+            <a:off x="548640" y="4526280"/>
+            <a:ext cx="8046720" cy="320040"/>
+          </a:xfrm>
+          <a:prstGeom prst="rect">
+            <a:avLst/>
+          </a:prstGeom>
+          <a:noFill/>
+          <a:ln/>
+        </p:spPr>
+        <p:txBody>
+          <a:bodyPr wrap="square" lIns="0" tIns="0" rIns="0" bIns="0" rtlCol="0" anchor="ctr"/>
+          <a:lstStyle/>
+          <a:p>
+            <a:pPr indent="0" marL="0">
+              <a:buNone/>
+            </a:pPr>
+            <a:r>
+              <a:rPr lang="en-US" sz="1100" dirty="0">
+                <a:solidFill>
+                  <a:srgbClr val="F39C12"/>
+                </a:solidFill>
+                <a:latin typeface="Calibri" pitchFamily="34" charset="0"/>
+                <a:ea typeface="Calibri" pitchFamily="34" charset="-122"/>
+                <a:cs typeface="Calibri" pitchFamily="34" charset="-120"/>
+              </a:rPr>
+              <a:t>Raw chaos in → structured risk signals out → automatic action on breach</a:t>
+            </a:r>
+            <a:endParaRPr lang="en-US" sz="1100" dirty="0"/>
           </a:p>
         </p:txBody>
       </p:sp>

--- a/docs/presentation.pptx
+++ b/docs/presentation.pptx
@@ -5,7 +5,7 @@
     <p:sldMasterId id="2147483648" r:id="rId1"/>
   </p:sldMasterIdLst>
   <p:notesMasterIdLst>
-    <p:notesMasterId r:id="rId23"/>
+    <p:notesMasterId r:id="rId26"/>
   </p:notesMasterIdLst>
   <p:sldIdLst>
     <p:sldId id="256" r:id="rId2"/>
@@ -20,15 +20,18 @@
     <p:sldId id="262" r:id="rId11"/>
     <p:sldId id="263" r:id="rId12"/>
     <p:sldId id="264" r:id="rId13"/>
-    <p:sldId id="274" r:id="rId14"/>
-    <p:sldId id="265" r:id="rId15"/>
-    <p:sldId id="266" r:id="rId16"/>
-    <p:sldId id="267" r:id="rId17"/>
-    <p:sldId id="268" r:id="rId18"/>
-    <p:sldId id="277" r:id="rId19"/>
-    <p:sldId id="269" r:id="rId20"/>
-    <p:sldId id="270" r:id="rId21"/>
-    <p:sldId id="272" r:id="rId22"/>
+    <p:sldId id="280" r:id="rId14"/>
+    <p:sldId id="282" r:id="rId15"/>
+    <p:sldId id="274" r:id="rId16"/>
+    <p:sldId id="265" r:id="rId17"/>
+    <p:sldId id="266" r:id="rId18"/>
+    <p:sldId id="267" r:id="rId19"/>
+    <p:sldId id="268" r:id="rId20"/>
+    <p:sldId id="283" r:id="rId21"/>
+    <p:sldId id="277" r:id="rId22"/>
+    <p:sldId id="269" r:id="rId23"/>
+    <p:sldId id="270" r:id="rId24"/>
+    <p:sldId id="272" r:id="rId25"/>
   </p:sldIdLst>
   <p:sldSz cx="9144000" cy="5143500" type="screen16x9"/>
   <p:notesSz cx="5143500" cy="9144000"/>
@@ -346,7 +349,13 @@
   <p:cSld>
     <p:spTree>
       <p:nvGrpSpPr>
-        <p:cNvPr id="1" name=""/>
+        <p:cNvPr id="1" name="">
+          <a:extLst>
+            <a:ext uri="{FF2B5EF4-FFF2-40B4-BE49-F238E27FC236}">
+              <a16:creationId xmlns:a16="http://schemas.microsoft.com/office/drawing/2014/main" id="{2C8C9B7C-FE14-A137-5854-92220FC314AB}"/>
+            </a:ext>
+          </a:extLst>
+        </p:cNvPr>
         <p:cNvGrpSpPr/>
         <p:nvPr/>
       </p:nvGrpSpPr>
@@ -360,7 +369,13 @@
       </p:grpSpPr>
       <p:sp>
         <p:nvSpPr>
-          <p:cNvPr id="2" name="Slide Image Placeholder 1"/>
+          <p:cNvPr id="2" name="Slide Image Placeholder 1">
+            <a:extLst>
+              <a:ext uri="{FF2B5EF4-FFF2-40B4-BE49-F238E27FC236}">
+                <a16:creationId xmlns:a16="http://schemas.microsoft.com/office/drawing/2014/main" id="{016A4094-993D-B3C4-1CCA-328D42E22C5A}"/>
+              </a:ext>
+            </a:extLst>
+          </p:cNvPr>
           <p:cNvSpPr>
             <a:spLocks noGrp="1" noRot="1" noChangeAspect="1"/>
           </p:cNvSpPr>
@@ -372,7 +387,13 @@
       </p:sp>
       <p:sp>
         <p:nvSpPr>
-          <p:cNvPr id="3" name="Notes Placeholder 2"/>
+          <p:cNvPr id="3" name="Notes Placeholder 2">
+            <a:extLst>
+              <a:ext uri="{FF2B5EF4-FFF2-40B4-BE49-F238E27FC236}">
+                <a16:creationId xmlns:a16="http://schemas.microsoft.com/office/drawing/2014/main" id="{E0B3FB2C-C75A-5925-6326-A6170791A367}"/>
+              </a:ext>
+            </a:extLst>
+          </p:cNvPr>
           <p:cNvSpPr>
             <a:spLocks noGrp="1"/>
           </p:cNvSpPr>
@@ -391,7 +412,13 @@
       </p:sp>
       <p:sp>
         <p:nvSpPr>
-          <p:cNvPr id="4" name="Slide Number Placeholder 3"/>
+          <p:cNvPr id="4" name="Slide Number Placeholder 3">
+            <a:extLst>
+              <a:ext uri="{FF2B5EF4-FFF2-40B4-BE49-F238E27FC236}">
+                <a16:creationId xmlns:a16="http://schemas.microsoft.com/office/drawing/2014/main" id="{C4061630-7F41-D493-4E03-6BC949DE2FAE}"/>
+              </a:ext>
+            </a:extLst>
+          </p:cNvPr>
           <p:cNvSpPr>
             <a:spLocks noGrp="1"/>
           </p:cNvSpPr>
@@ -406,7 +433,7 @@
           <a:p>
             <a:fld id="{F7021451-1387-4CA6-816F-3879F97B5CBC}" type="slidenum">
               <a:rPr lang="en-US"/>
-              <a:t>14</a:t>
+              <a:t>13</a:t>
             </a:fld>
             <a:endParaRPr lang="en-US"/>
           </a:p>
@@ -415,7 +442,7 @@
     </p:spTree>
     <p:extLst>
       <p:ext uri="{BB962C8B-B14F-4D97-AF65-F5344CB8AC3E}">
-        <p14:creationId xmlns:p14="http://schemas.microsoft.com/office/powerpoint/2010/main" val="1024086991"/>
+        <p14:creationId xmlns:p14="http://schemas.microsoft.com/office/powerpoint/2010/main" val="1890241574"/>
       </p:ext>
     </p:extLst>
   </p:cSld>
@@ -430,7 +457,13 @@
   <p:cSld>
     <p:spTree>
       <p:nvGrpSpPr>
-        <p:cNvPr id="1" name=""/>
+        <p:cNvPr id="1" name="">
+          <a:extLst>
+            <a:ext uri="{FF2B5EF4-FFF2-40B4-BE49-F238E27FC236}">
+              <a16:creationId xmlns:a16="http://schemas.microsoft.com/office/drawing/2014/main" id="{6D73BD88-33DA-50CC-B86F-70B2F2C6BF64}"/>
+            </a:ext>
+          </a:extLst>
+        </p:cNvPr>
         <p:cNvGrpSpPr/>
         <p:nvPr/>
       </p:nvGrpSpPr>
@@ -444,7 +477,13 @@
       </p:grpSpPr>
       <p:sp>
         <p:nvSpPr>
-          <p:cNvPr id="2" name="Slide Image Placeholder 1"/>
+          <p:cNvPr id="2" name="Slide Image Placeholder 1">
+            <a:extLst>
+              <a:ext uri="{FF2B5EF4-FFF2-40B4-BE49-F238E27FC236}">
+                <a16:creationId xmlns:a16="http://schemas.microsoft.com/office/drawing/2014/main" id="{0CE5A7D8-1F24-A979-F2A6-C32C486A345E}"/>
+              </a:ext>
+            </a:extLst>
+          </p:cNvPr>
           <p:cNvSpPr>
             <a:spLocks noGrp="1" noRot="1" noChangeAspect="1"/>
           </p:cNvSpPr>
@@ -456,7 +495,13 @@
       </p:sp>
       <p:sp>
         <p:nvSpPr>
-          <p:cNvPr id="3" name="Notes Placeholder 2"/>
+          <p:cNvPr id="3" name="Notes Placeholder 2">
+            <a:extLst>
+              <a:ext uri="{FF2B5EF4-FFF2-40B4-BE49-F238E27FC236}">
+                <a16:creationId xmlns:a16="http://schemas.microsoft.com/office/drawing/2014/main" id="{34CED909-7C8B-644F-1D59-75B3503F5297}"/>
+              </a:ext>
+            </a:extLst>
+          </p:cNvPr>
           <p:cNvSpPr>
             <a:spLocks noGrp="1"/>
           </p:cNvSpPr>
@@ -475,7 +520,13 @@
       </p:sp>
       <p:sp>
         <p:nvSpPr>
-          <p:cNvPr id="4" name="Slide Number Placeholder 3"/>
+          <p:cNvPr id="4" name="Slide Number Placeholder 3">
+            <a:extLst>
+              <a:ext uri="{FF2B5EF4-FFF2-40B4-BE49-F238E27FC236}">
+                <a16:creationId xmlns:a16="http://schemas.microsoft.com/office/drawing/2014/main" id="{81540C1D-DBAF-ECD9-F278-B423F0A5E724}"/>
+              </a:ext>
+            </a:extLst>
+          </p:cNvPr>
           <p:cNvSpPr>
             <a:spLocks noGrp="1"/>
           </p:cNvSpPr>
@@ -490,7 +541,7 @@
           <a:p>
             <a:fld id="{F7021451-1387-4CA6-816F-3879F97B5CBC}" type="slidenum">
               <a:rPr lang="en-US"/>
-              <a:t>15</a:t>
+              <a:t>14</a:t>
             </a:fld>
             <a:endParaRPr lang="en-US"/>
           </a:p>
@@ -499,7 +550,7 @@
     </p:spTree>
     <p:extLst>
       <p:ext uri="{BB962C8B-B14F-4D97-AF65-F5344CB8AC3E}">
-        <p14:creationId xmlns:p14="http://schemas.microsoft.com/office/powerpoint/2010/main" val="1024086991"/>
+        <p14:creationId xmlns:p14="http://schemas.microsoft.com/office/powerpoint/2010/main" val="3596678165"/>
       </p:ext>
     </p:extLst>
   </p:cSld>
@@ -742,7 +793,7 @@
           <a:p>
             <a:fld id="{F7021451-1387-4CA6-816F-3879F97B5CBC}" type="slidenum">
               <a:rPr lang="en-US"/>
-              <a:t>19</a:t>
+              <a:t>18</a:t>
             </a:fld>
             <a:endParaRPr lang="en-US"/>
           </a:p>
@@ -826,7 +877,283 @@
           <a:p>
             <a:fld id="{F7021451-1387-4CA6-816F-3879F97B5CBC}" type="slidenum">
               <a:rPr lang="en-US"/>
+              <a:t>19</a:t>
+            </a:fld>
+            <a:endParaRPr lang="en-US"/>
+          </a:p>
+        </p:txBody>
+      </p:sp>
+    </p:spTree>
+    <p:extLst>
+      <p:ext uri="{BB962C8B-B14F-4D97-AF65-F5344CB8AC3E}">
+        <p14:creationId xmlns:p14="http://schemas.microsoft.com/office/powerpoint/2010/main" val="1024086991"/>
+      </p:ext>
+    </p:extLst>
+  </p:cSld>
+  <p:clrMapOvr>
+    <a:masterClrMapping/>
+  </p:clrMapOvr>
+</p:notes>
+</file>
+
+<file path=ppt/notesSlides/notesSlide16.xml><?xml version="1.0" encoding="utf-8"?>
+<p:notes xmlns:a="http://schemas.openxmlformats.org/drawingml/2006/main" xmlns:r="http://schemas.openxmlformats.org/officeDocument/2006/relationships" xmlns:p="http://schemas.openxmlformats.org/presentationml/2006/main">
+  <p:cSld>
+    <p:spTree>
+      <p:nvGrpSpPr>
+        <p:cNvPr id="1" name="">
+          <a:extLst>
+            <a:ext uri="{FF2B5EF4-FFF2-40B4-BE49-F238E27FC236}">
+              <a16:creationId xmlns:a16="http://schemas.microsoft.com/office/drawing/2014/main" id="{E47E3340-099A-B437-D1E2-0E7701395681}"/>
+            </a:ext>
+          </a:extLst>
+        </p:cNvPr>
+        <p:cNvGrpSpPr/>
+        <p:nvPr/>
+      </p:nvGrpSpPr>
+      <p:grpSpPr>
+        <a:xfrm>
+          <a:off x="0" y="0"/>
+          <a:ext cx="0" cy="0"/>
+          <a:chOff x="0" y="0"/>
+          <a:chExt cx="0" cy="0"/>
+        </a:xfrm>
+      </p:grpSpPr>
+      <p:sp>
+        <p:nvSpPr>
+          <p:cNvPr id="2" name="Slide Image Placeholder 1">
+            <a:extLst>
+              <a:ext uri="{FF2B5EF4-FFF2-40B4-BE49-F238E27FC236}">
+                <a16:creationId xmlns:a16="http://schemas.microsoft.com/office/drawing/2014/main" id="{1BE9B2D7-820B-154A-9A2E-2C5E57BFBF24}"/>
+              </a:ext>
+            </a:extLst>
+          </p:cNvPr>
+          <p:cNvSpPr>
+            <a:spLocks noGrp="1" noRot="1" noChangeAspect="1"/>
+          </p:cNvSpPr>
+          <p:nvPr>
+            <p:ph type="sldImg"/>
+          </p:nvPr>
+        </p:nvSpPr>
+        <p:spPr/>
+      </p:sp>
+      <p:sp>
+        <p:nvSpPr>
+          <p:cNvPr id="3" name="Notes Placeholder 2">
+            <a:extLst>
+              <a:ext uri="{FF2B5EF4-FFF2-40B4-BE49-F238E27FC236}">
+                <a16:creationId xmlns:a16="http://schemas.microsoft.com/office/drawing/2014/main" id="{757686B1-8B57-C265-871E-B0F181CFDBAF}"/>
+              </a:ext>
+            </a:extLst>
+          </p:cNvPr>
+          <p:cNvSpPr>
+            <a:spLocks noGrp="1"/>
+          </p:cNvSpPr>
+          <p:nvPr>
+            <p:ph type="body" idx="1"/>
+          </p:nvPr>
+        </p:nvSpPr>
+        <p:spPr/>
+        <p:txBody>
+          <a:bodyPr/>
+          <a:lstStyle/>
+          <a:p>
+            <a:endParaRPr lang="en-US" dirty="0"/>
+          </a:p>
+        </p:txBody>
+      </p:sp>
+      <p:sp>
+        <p:nvSpPr>
+          <p:cNvPr id="4" name="Slide Number Placeholder 3">
+            <a:extLst>
+              <a:ext uri="{FF2B5EF4-FFF2-40B4-BE49-F238E27FC236}">
+                <a16:creationId xmlns:a16="http://schemas.microsoft.com/office/drawing/2014/main" id="{D265D907-FC18-8BE6-BEB9-4DA33FD0653A}"/>
+              </a:ext>
+            </a:extLst>
+          </p:cNvPr>
+          <p:cNvSpPr>
+            <a:spLocks noGrp="1"/>
+          </p:cNvSpPr>
+          <p:nvPr>
+            <p:ph type="sldNum" sz="quarter" idx="10"/>
+          </p:nvPr>
+        </p:nvSpPr>
+        <p:spPr/>
+        <p:txBody>
+          <a:bodyPr/>
+          <a:lstStyle/>
+          <a:p>
+            <a:fld id="{F7021451-1387-4CA6-816F-3879F97B5CBC}" type="slidenum">
+              <a:rPr lang="en-US"/>
               <a:t>20</a:t>
+            </a:fld>
+            <a:endParaRPr lang="en-US"/>
+          </a:p>
+        </p:txBody>
+      </p:sp>
+    </p:spTree>
+    <p:extLst>
+      <p:ext uri="{BB962C8B-B14F-4D97-AF65-F5344CB8AC3E}">
+        <p14:creationId xmlns:p14="http://schemas.microsoft.com/office/powerpoint/2010/main" val="1428753512"/>
+      </p:ext>
+    </p:extLst>
+  </p:cSld>
+  <p:clrMapOvr>
+    <a:masterClrMapping/>
+  </p:clrMapOvr>
+</p:notes>
+</file>
+
+<file path=ppt/notesSlides/notesSlide17.xml><?xml version="1.0" encoding="utf-8"?>
+<p:notes xmlns:a="http://schemas.openxmlformats.org/drawingml/2006/main" xmlns:r="http://schemas.openxmlformats.org/officeDocument/2006/relationships" xmlns:p="http://schemas.openxmlformats.org/presentationml/2006/main">
+  <p:cSld>
+    <p:spTree>
+      <p:nvGrpSpPr>
+        <p:cNvPr id="1" name=""/>
+        <p:cNvGrpSpPr/>
+        <p:nvPr/>
+      </p:nvGrpSpPr>
+      <p:grpSpPr>
+        <a:xfrm>
+          <a:off x="0" y="0"/>
+          <a:ext cx="0" cy="0"/>
+          <a:chOff x="0" y="0"/>
+          <a:chExt cx="0" cy="0"/>
+        </a:xfrm>
+      </p:grpSpPr>
+      <p:sp>
+        <p:nvSpPr>
+          <p:cNvPr id="2" name="Slide Image Placeholder 1"/>
+          <p:cNvSpPr>
+            <a:spLocks noGrp="1" noRot="1" noChangeAspect="1"/>
+          </p:cNvSpPr>
+          <p:nvPr>
+            <p:ph type="sldImg"/>
+          </p:nvPr>
+        </p:nvSpPr>
+        <p:spPr/>
+      </p:sp>
+      <p:sp>
+        <p:nvSpPr>
+          <p:cNvPr id="3" name="Notes Placeholder 2"/>
+          <p:cNvSpPr>
+            <a:spLocks noGrp="1"/>
+          </p:cNvSpPr>
+          <p:nvPr>
+            <p:ph type="body" idx="1"/>
+          </p:nvPr>
+        </p:nvSpPr>
+        <p:spPr/>
+        <p:txBody>
+          <a:bodyPr/>
+          <a:lstStyle/>
+          <a:p>
+            <a:endParaRPr lang="en-US" dirty="0"/>
+          </a:p>
+        </p:txBody>
+      </p:sp>
+      <p:sp>
+        <p:nvSpPr>
+          <p:cNvPr id="4" name="Slide Number Placeholder 3"/>
+          <p:cNvSpPr>
+            <a:spLocks noGrp="1"/>
+          </p:cNvSpPr>
+          <p:nvPr>
+            <p:ph type="sldNum" sz="quarter" idx="10"/>
+          </p:nvPr>
+        </p:nvSpPr>
+        <p:spPr/>
+        <p:txBody>
+          <a:bodyPr/>
+          <a:lstStyle/>
+          <a:p>
+            <a:fld id="{F7021451-1387-4CA6-816F-3879F97B5CBC}" type="slidenum">
+              <a:rPr lang="en-US"/>
+              <a:t>22</a:t>
+            </a:fld>
+            <a:endParaRPr lang="en-US"/>
+          </a:p>
+        </p:txBody>
+      </p:sp>
+    </p:spTree>
+    <p:extLst>
+      <p:ext uri="{BB962C8B-B14F-4D97-AF65-F5344CB8AC3E}">
+        <p14:creationId xmlns:p14="http://schemas.microsoft.com/office/powerpoint/2010/main" val="1024086991"/>
+      </p:ext>
+    </p:extLst>
+  </p:cSld>
+  <p:clrMapOvr>
+    <a:masterClrMapping/>
+  </p:clrMapOvr>
+</p:notes>
+</file>
+
+<file path=ppt/notesSlides/notesSlide18.xml><?xml version="1.0" encoding="utf-8"?>
+<p:notes xmlns:a="http://schemas.openxmlformats.org/drawingml/2006/main" xmlns:r="http://schemas.openxmlformats.org/officeDocument/2006/relationships" xmlns:p="http://schemas.openxmlformats.org/presentationml/2006/main">
+  <p:cSld>
+    <p:spTree>
+      <p:nvGrpSpPr>
+        <p:cNvPr id="1" name=""/>
+        <p:cNvGrpSpPr/>
+        <p:nvPr/>
+      </p:nvGrpSpPr>
+      <p:grpSpPr>
+        <a:xfrm>
+          <a:off x="0" y="0"/>
+          <a:ext cx="0" cy="0"/>
+          <a:chOff x="0" y="0"/>
+          <a:chExt cx="0" cy="0"/>
+        </a:xfrm>
+      </p:grpSpPr>
+      <p:sp>
+        <p:nvSpPr>
+          <p:cNvPr id="2" name="Slide Image Placeholder 1"/>
+          <p:cNvSpPr>
+            <a:spLocks noGrp="1" noRot="1" noChangeAspect="1"/>
+          </p:cNvSpPr>
+          <p:nvPr>
+            <p:ph type="sldImg"/>
+          </p:nvPr>
+        </p:nvSpPr>
+        <p:spPr/>
+      </p:sp>
+      <p:sp>
+        <p:nvSpPr>
+          <p:cNvPr id="3" name="Notes Placeholder 2"/>
+          <p:cNvSpPr>
+            <a:spLocks noGrp="1"/>
+          </p:cNvSpPr>
+          <p:nvPr>
+            <p:ph type="body" idx="1"/>
+          </p:nvPr>
+        </p:nvSpPr>
+        <p:spPr/>
+        <p:txBody>
+          <a:bodyPr/>
+          <a:lstStyle/>
+          <a:p>
+            <a:endParaRPr lang="en-US" dirty="0"/>
+          </a:p>
+        </p:txBody>
+      </p:sp>
+      <p:sp>
+        <p:nvSpPr>
+          <p:cNvPr id="4" name="Slide Number Placeholder 3"/>
+          <p:cNvSpPr>
+            <a:spLocks noGrp="1"/>
+          </p:cNvSpPr>
+          <p:nvPr>
+            <p:ph type="sldNum" sz="quarter" idx="10"/>
+          </p:nvPr>
+        </p:nvSpPr>
+        <p:spPr/>
+        <p:txBody>
+          <a:bodyPr/>
+          <a:lstStyle/>
+          <a:p>
+            <a:fld id="{F7021451-1387-4CA6-816F-3879F97B5CBC}" type="slidenum">
+              <a:rPr lang="en-US"/>
+              <a:t>23</a:t>
             </a:fld>
             <a:endParaRPr lang="en-US"/>
           </a:p>
@@ -4853,6 +5180,310 @@
 
 <file path=ppt/slides/slide13.xml><?xml version="1.0" encoding="utf-8"?>
 <p:sld xmlns:a="http://schemas.openxmlformats.org/drawingml/2006/main" xmlns:r="http://schemas.openxmlformats.org/officeDocument/2006/relationships" xmlns:p="http://schemas.openxmlformats.org/presentationml/2006/main">
+  <p:cSld>
+    <p:bg>
+      <p:bgPr>
+        <a:solidFill>
+          <a:srgbClr val="111111"/>
+        </a:solidFill>
+        <a:effectLst/>
+      </p:bgPr>
+    </p:bg>
+    <p:spTree>
+      <p:nvGrpSpPr>
+        <p:cNvPr id="1" name="">
+          <a:extLst>
+            <a:ext uri="{FF2B5EF4-FFF2-40B4-BE49-F238E27FC236}">
+              <a16:creationId xmlns:a16="http://schemas.microsoft.com/office/drawing/2014/main" id="{C59C7BD8-3F7D-D71D-3A14-2B5769B1643E}"/>
+            </a:ext>
+          </a:extLst>
+        </p:cNvPr>
+        <p:cNvGrpSpPr/>
+        <p:nvPr/>
+      </p:nvGrpSpPr>
+      <p:grpSpPr>
+        <a:xfrm>
+          <a:off x="0" y="0"/>
+          <a:ext cx="0" cy="0"/>
+          <a:chOff x="0" y="0"/>
+          <a:chExt cx="0" cy="0"/>
+        </a:xfrm>
+      </p:grpSpPr>
+      <p:sp>
+        <p:nvSpPr>
+          <p:cNvPr id="2" name="Shape 0">
+            <a:extLst>
+              <a:ext uri="{FF2B5EF4-FFF2-40B4-BE49-F238E27FC236}">
+                <a16:creationId xmlns:a16="http://schemas.microsoft.com/office/drawing/2014/main" id="{5B63A78D-C0C5-F398-F111-1F4A3BE40017}"/>
+              </a:ext>
+            </a:extLst>
+          </p:cNvPr>
+          <p:cNvSpPr/>
+          <p:nvPr/>
+        </p:nvSpPr>
+        <p:spPr>
+          <a:xfrm>
+            <a:off x="0" y="0"/>
+            <a:ext cx="9144000" cy="54864"/>
+          </a:xfrm>
+          <a:prstGeom prst="rect">
+            <a:avLst/>
+          </a:prstGeom>
+          <a:solidFill>
+            <a:srgbClr val="F39C12"/>
+          </a:solidFill>
+          <a:ln/>
+        </p:spPr>
+        <p:txBody>
+          <a:bodyPr/>
+          <a:lstStyle/>
+          <a:p>
+            <a:endParaRPr lang="en-US"/>
+          </a:p>
+        </p:txBody>
+      </p:sp>
+      <p:pic>
+        <p:nvPicPr>
+          <p:cNvPr id="25" name="Picture 24">
+            <a:extLst>
+              <a:ext uri="{FF2B5EF4-FFF2-40B4-BE49-F238E27FC236}">
+                <a16:creationId xmlns:a16="http://schemas.microsoft.com/office/drawing/2014/main" id="{EBE13FD4-5694-1DC2-D098-CF6DC950668E}"/>
+              </a:ext>
+            </a:extLst>
+          </p:cNvPr>
+          <p:cNvPicPr>
+            <a:picLocks noChangeAspect="1"/>
+          </p:cNvPicPr>
+          <p:nvPr/>
+        </p:nvPicPr>
+        <p:blipFill>
+          <a:blip r:embed="rId3"/>
+          <a:stretch>
+            <a:fillRect/>
+          </a:stretch>
+        </p:blipFill>
+        <p:spPr>
+          <a:xfrm>
+            <a:off x="1234440" y="1024128"/>
+            <a:ext cx="6675120" cy="3681910"/>
+          </a:xfrm>
+          <a:prstGeom prst="rect">
+            <a:avLst/>
+          </a:prstGeom>
+        </p:spPr>
+      </p:pic>
+      <p:sp>
+        <p:nvSpPr>
+          <p:cNvPr id="26" name="Text 1">
+            <a:extLst>
+              <a:ext uri="{FF2B5EF4-FFF2-40B4-BE49-F238E27FC236}">
+                <a16:creationId xmlns:a16="http://schemas.microsoft.com/office/drawing/2014/main" id="{70F0FF75-590F-4607-FCE2-848820FBFA12}"/>
+              </a:ext>
+            </a:extLst>
+          </p:cNvPr>
+          <p:cNvSpPr/>
+          <p:nvPr/>
+        </p:nvSpPr>
+        <p:spPr>
+          <a:xfrm>
+            <a:off x="487680" y="219456"/>
+            <a:ext cx="7680960" cy="640080"/>
+          </a:xfrm>
+          <a:prstGeom prst="rect">
+            <a:avLst/>
+          </a:prstGeom>
+          <a:noFill/>
+          <a:ln/>
+        </p:spPr>
+        <p:txBody>
+          <a:bodyPr wrap="square" lIns="0" tIns="0" rIns="0" bIns="0" rtlCol="0" anchor="ctr"/>
+          <a:lstStyle/>
+          <a:p>
+            <a:pPr marL="0" indent="0">
+              <a:buNone/>
+            </a:pPr>
+            <a:r>
+              <a:rPr lang="en-US" sz="3600" b="1" dirty="0">
+                <a:solidFill>
+                  <a:srgbClr val="FFFFFF"/>
+                </a:solidFill>
+                <a:latin typeface="Georgia" pitchFamily="34" charset="0"/>
+                <a:ea typeface="Georgia" pitchFamily="34" charset="-122"/>
+                <a:cs typeface="Georgia" pitchFamily="34" charset="-120"/>
+              </a:rPr>
+              <a:t>Amazon EMR</a:t>
+            </a:r>
+            <a:endParaRPr lang="en-US" sz="3600" dirty="0"/>
+          </a:p>
+        </p:txBody>
+      </p:sp>
+    </p:spTree>
+    <p:extLst>
+      <p:ext uri="{BB962C8B-B14F-4D97-AF65-F5344CB8AC3E}">
+        <p14:creationId xmlns:p14="http://schemas.microsoft.com/office/powerpoint/2010/main" val="414337970"/>
+      </p:ext>
+    </p:extLst>
+  </p:cSld>
+  <p:clrMapOvr>
+    <a:masterClrMapping/>
+  </p:clrMapOvr>
+</p:sld>
+</file>
+
+<file path=ppt/slides/slide14.xml><?xml version="1.0" encoding="utf-8"?>
+<p:sld xmlns:a="http://schemas.openxmlformats.org/drawingml/2006/main" xmlns:r="http://schemas.openxmlformats.org/officeDocument/2006/relationships" xmlns:p="http://schemas.openxmlformats.org/presentationml/2006/main">
+  <p:cSld>
+    <p:bg>
+      <p:bgPr>
+        <a:solidFill>
+          <a:srgbClr val="111111"/>
+        </a:solidFill>
+        <a:effectLst/>
+      </p:bgPr>
+    </p:bg>
+    <p:spTree>
+      <p:nvGrpSpPr>
+        <p:cNvPr id="1" name="">
+          <a:extLst>
+            <a:ext uri="{FF2B5EF4-FFF2-40B4-BE49-F238E27FC236}">
+              <a16:creationId xmlns:a16="http://schemas.microsoft.com/office/drawing/2014/main" id="{C0BC0D6C-9D66-D96C-6778-1D5B4E14BA75}"/>
+            </a:ext>
+          </a:extLst>
+        </p:cNvPr>
+        <p:cNvGrpSpPr/>
+        <p:nvPr/>
+      </p:nvGrpSpPr>
+      <p:grpSpPr>
+        <a:xfrm>
+          <a:off x="0" y="0"/>
+          <a:ext cx="0" cy="0"/>
+          <a:chOff x="0" y="0"/>
+          <a:chExt cx="0" cy="0"/>
+        </a:xfrm>
+      </p:grpSpPr>
+      <p:sp>
+        <p:nvSpPr>
+          <p:cNvPr id="2" name="Shape 0">
+            <a:extLst>
+              <a:ext uri="{FF2B5EF4-FFF2-40B4-BE49-F238E27FC236}">
+                <a16:creationId xmlns:a16="http://schemas.microsoft.com/office/drawing/2014/main" id="{F31DD295-30BE-1A7D-639D-A2D048506AA7}"/>
+              </a:ext>
+            </a:extLst>
+          </p:cNvPr>
+          <p:cNvSpPr/>
+          <p:nvPr/>
+        </p:nvSpPr>
+        <p:spPr>
+          <a:xfrm>
+            <a:off x="0" y="0"/>
+            <a:ext cx="9144000" cy="54864"/>
+          </a:xfrm>
+          <a:prstGeom prst="rect">
+            <a:avLst/>
+          </a:prstGeom>
+          <a:solidFill>
+            <a:srgbClr val="F39C12"/>
+          </a:solidFill>
+          <a:ln/>
+        </p:spPr>
+        <p:txBody>
+          <a:bodyPr/>
+          <a:lstStyle/>
+          <a:p>
+            <a:endParaRPr lang="en-US"/>
+          </a:p>
+        </p:txBody>
+      </p:sp>
+      <p:sp>
+        <p:nvSpPr>
+          <p:cNvPr id="26" name="Text 1">
+            <a:extLst>
+              <a:ext uri="{FF2B5EF4-FFF2-40B4-BE49-F238E27FC236}">
+                <a16:creationId xmlns:a16="http://schemas.microsoft.com/office/drawing/2014/main" id="{21797732-B850-0033-1E31-50931DC138AA}"/>
+              </a:ext>
+            </a:extLst>
+          </p:cNvPr>
+          <p:cNvSpPr/>
+          <p:nvPr/>
+        </p:nvSpPr>
+        <p:spPr>
+          <a:xfrm>
+            <a:off x="487680" y="219456"/>
+            <a:ext cx="7680960" cy="640080"/>
+          </a:xfrm>
+          <a:prstGeom prst="rect">
+            <a:avLst/>
+          </a:prstGeom>
+          <a:noFill/>
+          <a:ln/>
+        </p:spPr>
+        <p:txBody>
+          <a:bodyPr wrap="square" lIns="0" tIns="0" rIns="0" bIns="0" rtlCol="0" anchor="ctr"/>
+          <a:lstStyle/>
+          <a:p>
+            <a:pPr marL="0" indent="0">
+              <a:buNone/>
+            </a:pPr>
+            <a:r>
+              <a:rPr lang="en-US" sz="3600" b="1" dirty="0">
+                <a:solidFill>
+                  <a:srgbClr val="FFFFFF"/>
+                </a:solidFill>
+                <a:latin typeface="Georgia" pitchFamily="34" charset="0"/>
+                <a:ea typeface="Georgia" pitchFamily="34" charset="-122"/>
+                <a:cs typeface="Georgia" pitchFamily="34" charset="-120"/>
+              </a:rPr>
+              <a:t>Amazon MSK</a:t>
+            </a:r>
+            <a:endParaRPr lang="en-US" sz="3600" dirty="0"/>
+          </a:p>
+        </p:txBody>
+      </p:sp>
+      <p:pic>
+        <p:nvPicPr>
+          <p:cNvPr id="4" name="Picture 3">
+            <a:extLst>
+              <a:ext uri="{FF2B5EF4-FFF2-40B4-BE49-F238E27FC236}">
+                <a16:creationId xmlns:a16="http://schemas.microsoft.com/office/drawing/2014/main" id="{07B89158-84D5-F3CE-D2F5-16520131A944}"/>
+              </a:ext>
+            </a:extLst>
+          </p:cNvPr>
+          <p:cNvPicPr>
+            <a:picLocks noChangeAspect="1"/>
+          </p:cNvPicPr>
+          <p:nvPr/>
+        </p:nvPicPr>
+        <p:blipFill>
+          <a:blip r:embed="rId3"/>
+          <a:stretch>
+            <a:fillRect/>
+          </a:stretch>
+        </p:blipFill>
+        <p:spPr>
+          <a:xfrm>
+            <a:off x="685800" y="955597"/>
+            <a:ext cx="7772400" cy="3968447"/>
+          </a:xfrm>
+          <a:prstGeom prst="rect">
+            <a:avLst/>
+          </a:prstGeom>
+        </p:spPr>
+      </p:pic>
+    </p:spTree>
+    <p:extLst>
+      <p:ext uri="{BB962C8B-B14F-4D97-AF65-F5344CB8AC3E}">
+        <p14:creationId xmlns:p14="http://schemas.microsoft.com/office/powerpoint/2010/main" val="3558425185"/>
+      </p:ext>
+    </p:extLst>
+  </p:cSld>
+  <p:clrMapOvr>
+    <a:masterClrMapping/>
+  </p:clrMapOvr>
+</p:sld>
+</file>
+
+<file path=ppt/slides/slide15.xml><?xml version="1.0" encoding="utf-8"?>
+<p:sld xmlns:a="http://schemas.openxmlformats.org/drawingml/2006/main" xmlns:r="http://schemas.openxmlformats.org/officeDocument/2006/relationships" xmlns:p="http://schemas.openxmlformats.org/presentationml/2006/main">
   <p:cSld name="AWS Meets the Rule">
     <p:bg>
       <p:bgPr>
@@ -5591,8 +6222,8 @@
 </p:sld>
 </file>
 
-<file path=ppt/slides/slide14.xml><?xml version="1.0" encoding="utf-8"?>
-<p:sld xmlns:a="http://schemas.openxmlformats.org/drawingml/2006/main" xmlns:r="http://schemas.openxmlformats.org/officeDocument/2006/relationships" xmlns:p="http://schemas.openxmlformats.org/presentationml/2006/main">
+<file path=ppt/slides/slide16.xml><?xml version="1.0" encoding="utf-8"?>
+<p:sld xmlns:a="http://schemas.openxmlformats.org/drawingml/2006/main" xmlns:r="http://schemas.openxmlformats.org/officeDocument/2006/relationships" xmlns:p="http://schemas.openxmlformats.org/presentationml/2006/main" show="0">
   <p:cSld name="Slide 10">
     <p:bg>
       <p:bgPr>
@@ -5729,7 +6360,7 @@
 </p:sld>
 </file>
 
-<file path=ppt/slides/slide15.xml><?xml version="1.0" encoding="utf-8"?>
+<file path=ppt/slides/slide17.xml><?xml version="1.0" encoding="utf-8"?>
 <p:sld xmlns:a="http://schemas.openxmlformats.org/drawingml/2006/main" xmlns:r="http://schemas.openxmlformats.org/officeDocument/2006/relationships" xmlns:p="http://schemas.openxmlformats.org/presentationml/2006/main">
   <p:cSld name="Slide 11">
     <p:bg>
@@ -6461,7 +7092,7 @@
 </p:sld>
 </file>
 
-<file path=ppt/slides/slide16.xml><?xml version="1.0" encoding="utf-8"?>
+<file path=ppt/slides/slide18.xml><?xml version="1.0" encoding="utf-8"?>
 <p:sld xmlns:a="http://schemas.openxmlformats.org/drawingml/2006/main" xmlns:r="http://schemas.openxmlformats.org/officeDocument/2006/relationships" xmlns:p="http://schemas.openxmlformats.org/presentationml/2006/main">
   <p:cSld name="Slide 12">
     <p:bg>
@@ -7075,7 +7706,7 @@
 </p:sld>
 </file>
 
-<file path=ppt/slides/slide17.xml><?xml version="1.0" encoding="utf-8"?>
+<file path=ppt/slides/slide19.xml><?xml version="1.0" encoding="utf-8"?>
 <p:sld xmlns:a="http://schemas.openxmlformats.org/drawingml/2006/main" xmlns:r="http://schemas.openxmlformats.org/officeDocument/2006/relationships" xmlns:p="http://schemas.openxmlformats.org/presentationml/2006/main">
   <p:cSld name="Slide 13">
     <p:bg>
@@ -8028,1184 +8659,6 @@
               <a:t>$4-6</a:t>
             </a:r>
             <a:endParaRPr lang="en-US" sz="1200" dirty="0"/>
-          </a:p>
-        </p:txBody>
-      </p:sp>
-    </p:spTree>
-  </p:cSld>
-  <p:clrMapOvr>
-    <a:masterClrMapping/>
-  </p:clrMapOvr>
-</p:sld>
-</file>
-
-<file path=ppt/slides/slide18.xml><?xml version="1.0" encoding="utf-8"?>
-<p:sld xmlns:a="http://schemas.openxmlformats.org/drawingml/2006/main" xmlns:r="http://schemas.openxmlformats.org/officeDocument/2006/relationships" xmlns:p="http://schemas.openxmlformats.org/presentationml/2006/main">
-  <p:cSld name="Security and Compliance">
-    <p:bg>
-      <p:bgPr>
-        <a:solidFill>
-          <a:srgbClr val="111111"/>
-        </a:solidFill>
-        <a:effectLst/>
-      </p:bgPr>
-    </p:bg>
-    <p:spTree>
-      <p:nvGrpSpPr>
-        <p:cNvPr id="1" name=""/>
-        <p:cNvGrpSpPr/>
-        <p:nvPr/>
-      </p:nvGrpSpPr>
-      <p:grpSpPr>
-        <a:xfrm>
-          <a:off x="0" y="0"/>
-          <a:ext cx="0" cy="0"/>
-          <a:chOff x="0" y="0"/>
-          <a:chExt cx="0" cy="0"/>
-        </a:xfrm>
-      </p:grpSpPr>
-      <p:sp>
-        <p:nvSpPr>
-          <p:cNvPr id="2" name="TopBar"/>
-          <p:cNvSpPr/>
-          <p:nvPr/>
-        </p:nvSpPr>
-        <p:spPr>
-          <a:xfrm>
-            <a:off x="0" y="0"/>
-            <a:ext cx="9144000" cy="54864"/>
-          </a:xfrm>
-          <a:prstGeom prst="rect">
-            <a:avLst/>
-          </a:prstGeom>
-          <a:solidFill>
-            <a:srgbClr val="00703C"/>
-          </a:solidFill>
-          <a:ln/>
-        </p:spPr>
-        <p:txBody>
-          <a:bodyPr/>
-          <a:lstStyle/>
-          <a:p>
-            <a:endParaRPr lang="en-US"/>
-          </a:p>
-        </p:txBody>
-      </p:sp>
-      <p:sp>
-        <p:nvSpPr>
-          <p:cNvPr id="3" name="Title"/>
-          <p:cNvSpPr/>
-          <p:nvPr/>
-        </p:nvSpPr>
-        <p:spPr>
-          <a:xfrm>
-            <a:off x="731520" y="137160"/>
-            <a:ext cx="7680960" cy="548640"/>
-          </a:xfrm>
-          <a:prstGeom prst="rect">
-            <a:avLst/>
-          </a:prstGeom>
-          <a:noFill/>
-          <a:ln/>
-        </p:spPr>
-        <p:txBody>
-          <a:bodyPr wrap="square" lIns="0" tIns="0" rIns="0" bIns="0" rtlCol="0" anchor="t"/>
-          <a:lstStyle/>
-          <a:p>
-            <a:pPr marL="0" indent="0">
-              <a:buNone/>
-            </a:pPr>
-            <a:r>
-              <a:rPr lang="en-US" sz="3200" b="1" dirty="0">
-                <a:solidFill>
-                  <a:srgbClr val="FFFFFF"/>
-                </a:solidFill>
-                <a:latin typeface="Georgia" pitchFamily="34" charset="0"/>
-              </a:rPr>
-              <a:t>Security &amp; Production Gaps</a:t>
-            </a:r>
-          </a:p>
-        </p:txBody>
-      </p:sp>
-      <p:sp>
-        <p:nvSpPr>
-          <p:cNvPr id="4" name="Sub"/>
-          <p:cNvSpPr/>
-          <p:nvPr/>
-        </p:nvSpPr>
-        <p:spPr>
-          <a:xfrm>
-            <a:off x="731520" y="594360"/>
-            <a:ext cx="7680960" cy="274320"/>
-          </a:xfrm>
-          <a:prstGeom prst="rect">
-            <a:avLst/>
-          </a:prstGeom>
-          <a:noFill/>
-          <a:ln/>
-        </p:spPr>
-        <p:txBody>
-          <a:bodyPr wrap="square" lIns="0" tIns="0" rIns="0" bIns="0" rtlCol="0" anchor="t"/>
-          <a:lstStyle/>
-          <a:p>
-            <a:pPr marL="0" indent="0">
-              <a:buNone/>
-            </a:pPr>
-            <a:r>
-              <a:rPr lang="en-US" sz="1600" dirty="0">
-                <a:solidFill>
-                  <a:srgbClr val="718096"/>
-                </a:solidFill>
-                <a:latin typeface="Calibri" pitchFamily="34" charset="0"/>
-              </a:rPr>
-              <a:t>What this demo does well, and what a real broker-dealer would need</a:t>
-            </a:r>
-          </a:p>
-        </p:txBody>
-      </p:sp>
-      <p:sp>
-        <p:nvSpPr>
-          <p:cNvPr id="10" name="HaveBg"/>
-          <p:cNvSpPr/>
-          <p:nvPr/>
-        </p:nvSpPr>
-        <p:spPr>
-          <a:xfrm>
-            <a:off x="731520" y="1005840"/>
-            <a:ext cx="3749040" cy="2468880"/>
-          </a:xfrm>
-          <a:prstGeom prst="rect">
-            <a:avLst/>
-          </a:prstGeom>
-          <a:solidFill>
-            <a:srgbClr val="1A1A1A"/>
-          </a:solidFill>
-          <a:ln/>
-        </p:spPr>
-        <p:txBody>
-          <a:bodyPr/>
-          <a:lstStyle/>
-          <a:p>
-            <a:endParaRPr lang="en-US"/>
-          </a:p>
-        </p:txBody>
-      </p:sp>
-      <p:sp>
-        <p:nvSpPr>
-          <p:cNvPr id="11" name="Have"/>
-          <p:cNvSpPr/>
-          <p:nvPr/>
-        </p:nvSpPr>
-        <p:spPr>
-          <a:xfrm>
-            <a:off x="868680" y="1005840"/>
-            <a:ext cx="3474720" cy="2468880"/>
-          </a:xfrm>
-          <a:prstGeom prst="rect">
-            <a:avLst/>
-          </a:prstGeom>
-          <a:noFill/>
-          <a:ln/>
-        </p:spPr>
-        <p:txBody>
-          <a:bodyPr wrap="square" lIns="91440" tIns="91440" rIns="0" bIns="0" rtlCol="0" anchor="t"/>
-          <a:lstStyle/>
-          <a:p>
-            <a:pPr marL="0" indent="0">
-              <a:buNone/>
-            </a:pPr>
-            <a:r>
-              <a:rPr lang="en-US" sz="1600" b="1" dirty="0">
-                <a:solidFill>
-                  <a:srgbClr val="00703C"/>
-                </a:solidFill>
-                <a:latin typeface="Calibri" pitchFamily="34" charset="0"/>
-              </a:rPr>
-              <a:t>What This Demo Includes</a:t>
-            </a:r>
-          </a:p>
-          <a:p>
-            <a:pPr marL="0" indent="0">
-              <a:lnSpc>
-                <a:spcPts val="2200"/>
-              </a:lnSpc>
-              <a:buNone/>
-            </a:pPr>
-            <a:r>
-              <a:rPr lang="en-US" sz="1200" dirty="0">
-                <a:solidFill>
-                  <a:srgbClr val="A0AEC0"/>
-                </a:solidFill>
-                <a:latin typeface="Calibri" pitchFamily="34" charset="0"/>
-              </a:rPr>
-              <a:t>Least-privilege IAM roles per Lambda</a:t>
-            </a:r>
-          </a:p>
-          <a:p>
-            <a:pPr marL="0" indent="0">
-              <a:lnSpc>
-                <a:spcPts val="2200"/>
-              </a:lnSpc>
-              <a:buNone/>
-            </a:pPr>
-            <a:r>
-              <a:rPr lang="en-US" sz="1200" dirty="0">
-                <a:solidFill>
-                  <a:srgbClr val="A0AEC0"/>
-                </a:solidFill>
-                <a:latin typeface="Calibri" pitchFamily="34" charset="0"/>
-              </a:rPr>
-              <a:t>VPC isolation for MSK and Lambda</a:t>
-            </a:r>
-          </a:p>
-          <a:p>
-            <a:pPr marL="0" indent="0">
-              <a:lnSpc>
-                <a:spcPts val="2200"/>
-              </a:lnSpc>
-              <a:buNone/>
-            </a:pPr>
-            <a:r>
-              <a:rPr lang="en-US" sz="1200" dirty="0">
-                <a:solidFill>
-                  <a:srgbClr val="A0AEC0"/>
-                </a:solidFill>
-                <a:latin typeface="Calibri" pitchFamily="34" charset="0"/>
-              </a:rPr>
-              <a:t>IAM authentication for Kafka (SASL_IAM)</a:t>
-            </a:r>
-          </a:p>
-          <a:p>
-            <a:pPr marL="0" indent="0">
-              <a:lnSpc>
-                <a:spcPts val="2200"/>
-              </a:lnSpc>
-              <a:buNone/>
-            </a:pPr>
-            <a:r>
-              <a:rPr lang="en-US" sz="1200" dirty="0">
-                <a:solidFill>
-                  <a:srgbClr val="A0AEC0"/>
-                </a:solidFill>
-                <a:latin typeface="Calibri" pitchFamily="34" charset="0"/>
-              </a:rPr>
-              <a:t>TLS encryption in transit</a:t>
-            </a:r>
-          </a:p>
-          <a:p>
-            <a:pPr marL="0" indent="0">
-              <a:lnSpc>
-                <a:spcPts val="2200"/>
-              </a:lnSpc>
-              <a:buNone/>
-            </a:pPr>
-            <a:r>
-              <a:rPr lang="en-US" sz="1200" dirty="0">
-                <a:solidFill>
-                  <a:srgbClr val="A0AEC0"/>
-                </a:solidFill>
-                <a:latin typeface="Calibri" pitchFamily="34" charset="0"/>
-              </a:rPr>
-              <a:t>Immutable audit trail with correlation IDs</a:t>
-            </a:r>
-          </a:p>
-          <a:p>
-            <a:pPr marL="0" indent="0">
-              <a:lnSpc>
-                <a:spcPts val="2200"/>
-              </a:lnSpc>
-              <a:buNone/>
-            </a:pPr>
-            <a:r>
-              <a:rPr lang="en-US" sz="1200" dirty="0">
-                <a:solidFill>
-                  <a:srgbClr val="A0AEC0"/>
-                </a:solidFill>
-                <a:latin typeface="Calibri" pitchFamily="34" charset="0"/>
-              </a:rPr>
-              <a:t>No hardcoded credentials</a:t>
-            </a:r>
-          </a:p>
-        </p:txBody>
-      </p:sp>
-      <p:sp>
-        <p:nvSpPr>
-          <p:cNvPr id="12" name="NeedBg"/>
-          <p:cNvSpPr/>
-          <p:nvPr/>
-        </p:nvSpPr>
-        <p:spPr>
-          <a:xfrm>
-            <a:off x="4663440" y="1005840"/>
-            <a:ext cx="3749040" cy="2468880"/>
-          </a:xfrm>
-          <a:prstGeom prst="rect">
-            <a:avLst/>
-          </a:prstGeom>
-          <a:solidFill>
-            <a:srgbClr val="1A1A1A"/>
-          </a:solidFill>
-          <a:ln/>
-        </p:spPr>
-        <p:txBody>
-          <a:bodyPr/>
-          <a:lstStyle/>
-          <a:p>
-            <a:endParaRPr lang="en-US"/>
-          </a:p>
-        </p:txBody>
-      </p:sp>
-      <p:sp>
-        <p:nvSpPr>
-          <p:cNvPr id="13" name="Need"/>
-          <p:cNvSpPr/>
-          <p:nvPr/>
-        </p:nvSpPr>
-        <p:spPr>
-          <a:xfrm>
-            <a:off x="4800600" y="1005840"/>
-            <a:ext cx="3474720" cy="2468880"/>
-          </a:xfrm>
-          <a:prstGeom prst="rect">
-            <a:avLst/>
-          </a:prstGeom>
-          <a:noFill/>
-          <a:ln/>
-        </p:spPr>
-        <p:txBody>
-          <a:bodyPr wrap="square" lIns="91440" tIns="91440" rIns="0" bIns="0" rtlCol="0" anchor="t"/>
-          <a:lstStyle/>
-          <a:p>
-            <a:pPr marL="0" indent="0">
-              <a:buNone/>
-            </a:pPr>
-            <a:r>
-              <a:rPr lang="en-US" sz="1600" b="1" dirty="0">
-                <a:solidFill>
-                  <a:srgbClr val="E25444"/>
-                </a:solidFill>
-                <a:latin typeface="Calibri" pitchFamily="34" charset="0"/>
-              </a:rPr>
-              <a:t>What Production Needs</a:t>
-            </a:r>
-          </a:p>
-          <a:p>
-            <a:pPr marL="0" indent="0">
-              <a:lnSpc>
-                <a:spcPts val="2200"/>
-              </a:lnSpc>
-              <a:buNone/>
-            </a:pPr>
-            <a:r>
-              <a:rPr lang="en-US" sz="1200" dirty="0">
-                <a:solidFill>
-                  <a:srgbClr val="A0AEC0"/>
-                </a:solidFill>
-                <a:latin typeface="Calibri" pitchFamily="34" charset="0"/>
-              </a:rPr>
-              <a:t>Encryption at rest (KMS for MSK, DynamoDB, S3)</a:t>
-            </a:r>
-          </a:p>
-          <a:p>
-            <a:pPr marL="0" indent="0">
-              <a:lnSpc>
-                <a:spcPts val="2200"/>
-              </a:lnSpc>
-              <a:buNone/>
-            </a:pPr>
-            <a:r>
-              <a:rPr lang="en-US" sz="1200" dirty="0">
-                <a:solidFill>
-                  <a:srgbClr val="A0AEC0"/>
-                </a:solidFill>
-                <a:latin typeface="Calibri" pitchFamily="34" charset="0"/>
-              </a:rPr>
-              <a:t>API authentication (OAuth/IAM on operator API)</a:t>
-            </a:r>
-          </a:p>
-          <a:p>
-            <a:pPr marL="0" indent="0">
-              <a:lnSpc>
-                <a:spcPts val="2200"/>
-              </a:lnSpc>
-              <a:buNone/>
-            </a:pPr>
-            <a:r>
-              <a:rPr lang="en-US" sz="1200" dirty="0">
-                <a:solidFill>
-                  <a:srgbClr val="A0AEC0"/>
-                </a:solidFill>
-                <a:latin typeface="Calibri" pitchFamily="34" charset="0"/>
-              </a:rPr>
-              <a:t>Rate limiting and input validation</a:t>
-            </a:r>
-          </a:p>
-          <a:p>
-            <a:pPr marL="0" indent="0">
-              <a:lnSpc>
-                <a:spcPts val="2200"/>
-              </a:lnSpc>
-              <a:buNone/>
-            </a:pPr>
-            <a:r>
-              <a:rPr lang="en-US" sz="1200" dirty="0">
-                <a:solidFill>
-                  <a:srgbClr val="A0AEC0"/>
-                </a:solidFill>
-                <a:latin typeface="Calibri" pitchFamily="34" charset="0"/>
-              </a:rPr>
-              <a:t>7-year audit retention (SEC requirement)</a:t>
-            </a:r>
-          </a:p>
-          <a:p>
-            <a:pPr marL="0" indent="0">
-              <a:lnSpc>
-                <a:spcPts val="2200"/>
-              </a:lnSpc>
-              <a:buNone/>
-            </a:pPr>
-            <a:r>
-              <a:rPr lang="en-US" sz="1200" dirty="0">
-                <a:solidFill>
-                  <a:srgbClr val="A0AEC0"/>
-                </a:solidFill>
-                <a:latin typeface="Calibri" pitchFamily="34" charset="0"/>
-              </a:rPr>
-              <a:t>Compliance officer sign-off and testing</a:t>
-            </a:r>
-          </a:p>
-          <a:p>
-            <a:pPr marL="0" indent="0">
-              <a:lnSpc>
-                <a:spcPts val="2200"/>
-              </a:lnSpc>
-              <a:buNone/>
-            </a:pPr>
-            <a:r>
-              <a:rPr lang="en-US" sz="1200" dirty="0">
-                <a:solidFill>
-                  <a:srgbClr val="A0AEC0"/>
-                </a:solidFill>
-                <a:latin typeface="Calibri" pitchFamily="34" charset="0"/>
-              </a:rPr>
-              <a:t>Disaster recovery and incident response</a:t>
-            </a:r>
-          </a:p>
-        </p:txBody>
-      </p:sp>
-      <p:sp>
-        <p:nvSpPr>
-          <p:cNvPr id="14" name="Footer"/>
-          <p:cNvSpPr/>
-          <p:nvPr/>
-        </p:nvSpPr>
-        <p:spPr>
-          <a:xfrm>
-            <a:off x="731520" y="3657600"/>
-            <a:ext cx="7680960" cy="548640"/>
-          </a:xfrm>
-          <a:prstGeom prst="rect">
-            <a:avLst/>
-          </a:prstGeom>
-          <a:noFill/>
-          <a:ln/>
-        </p:spPr>
-        <p:txBody>
-          <a:bodyPr wrap="square" lIns="0" tIns="0" rIns="0" bIns="0" rtlCol="0" anchor="ctr"/>
-          <a:lstStyle/>
-          <a:p>
-            <a:pPr marL="0" indent="0">
-              <a:buNone/>
-            </a:pPr>
-            <a:r>
-              <a:rPr lang="en-US" sz="1400" dirty="0">
-                <a:solidFill>
-                  <a:srgbClr val="718096"/>
-                </a:solidFill>
-                <a:latin typeface="Calibri" pitchFamily="34" charset="0"/>
-              </a:rPr>
-              <a:t>This demo prioritizes education over production hardening. Always engage security and compliance teams before deploying trading systems.</a:t>
-            </a:r>
-          </a:p>
-        </p:txBody>
-      </p:sp>
-    </p:spTree>
-  </p:cSld>
-  <p:clrMapOvr>
-    <a:masterClrMapping/>
-  </p:clrMapOvr>
-</p:sld>
-</file>
-
-<file path=ppt/slides/slide19.xml><?xml version="1.0" encoding="utf-8"?>
-<p:sld xmlns:a="http://schemas.openxmlformats.org/drawingml/2006/main" xmlns:r="http://schemas.openxmlformats.org/officeDocument/2006/relationships" xmlns:p="http://schemas.openxmlformats.org/presentationml/2006/main">
-  <p:cSld name="Slide 14">
-    <p:bg>
-      <p:bgPr>
-        <a:solidFill>
-          <a:srgbClr val="111111"/>
-        </a:solidFill>
-        <a:effectLst/>
-      </p:bgPr>
-    </p:bg>
-    <p:spTree>
-      <p:nvGrpSpPr>
-        <p:cNvPr id="1" name=""/>
-        <p:cNvGrpSpPr/>
-        <p:nvPr/>
-      </p:nvGrpSpPr>
-      <p:grpSpPr>
-        <a:xfrm>
-          <a:off x="0" y="0"/>
-          <a:ext cx="0" cy="0"/>
-          <a:chOff x="0" y="0"/>
-          <a:chExt cx="0" cy="0"/>
-        </a:xfrm>
-      </p:grpSpPr>
-      <p:sp>
-        <p:nvSpPr>
-          <p:cNvPr id="2" name="Shape 0"/>
-          <p:cNvSpPr/>
-          <p:nvPr/>
-        </p:nvSpPr>
-        <p:spPr>
-          <a:xfrm>
-            <a:off x="0" y="0"/>
-            <a:ext cx="9144000" cy="54864"/>
-          </a:xfrm>
-          <a:prstGeom prst="rect">
-            <a:avLst/>
-          </a:prstGeom>
-          <a:solidFill>
-            <a:srgbClr val="27AE60"/>
-          </a:solidFill>
-          <a:ln/>
-        </p:spPr>
-        <p:txBody>
-          <a:bodyPr/>
-          <a:lstStyle/>
-          <a:p>
-            <a:endParaRPr lang="en-US"/>
-          </a:p>
-        </p:txBody>
-      </p:sp>
-      <p:sp>
-        <p:nvSpPr>
-          <p:cNvPr id="3" name="Text 1"/>
-          <p:cNvSpPr/>
-          <p:nvPr/>
-        </p:nvSpPr>
-        <p:spPr>
-          <a:xfrm>
-            <a:off x="731520" y="274320"/>
-            <a:ext cx="7680960" cy="640080"/>
-          </a:xfrm>
-          <a:prstGeom prst="rect">
-            <a:avLst/>
-          </a:prstGeom>
-          <a:noFill/>
-          <a:ln/>
-        </p:spPr>
-        <p:txBody>
-          <a:bodyPr wrap="square" lIns="0" tIns="0" rIns="0" bIns="0" rtlCol="0" anchor="ctr"/>
-          <a:lstStyle/>
-          <a:p>
-            <a:pPr marL="0" indent="0">
-              <a:buNone/>
-            </a:pPr>
-            <a:r>
-              <a:rPr lang="en-US" sz="3200" b="1" dirty="0">
-                <a:solidFill>
-                  <a:srgbClr val="FFFFFF"/>
-                </a:solidFill>
-                <a:latin typeface="Georgia" pitchFamily="34" charset="0"/>
-                <a:ea typeface="Georgia" pitchFamily="34" charset="-122"/>
-                <a:cs typeface="Georgia" pitchFamily="34" charset="-120"/>
-              </a:rPr>
-              <a:t>Why This Matters for Your Career</a:t>
-            </a:r>
-            <a:endParaRPr lang="en-US" sz="3200" dirty="0"/>
-          </a:p>
-        </p:txBody>
-      </p:sp>
-      <p:sp>
-        <p:nvSpPr>
-          <p:cNvPr id="4" name="Shape 2"/>
-          <p:cNvSpPr/>
-          <p:nvPr/>
-        </p:nvSpPr>
-        <p:spPr>
-          <a:xfrm>
-            <a:off x="731520" y="1188720"/>
-            <a:ext cx="7680960" cy="502920"/>
-          </a:xfrm>
-          <a:prstGeom prst="rect">
-            <a:avLst/>
-          </a:prstGeom>
-          <a:solidFill>
-            <a:srgbClr val="1A1A1A"/>
-          </a:solidFill>
-          <a:ln/>
-        </p:spPr>
-        <p:txBody>
-          <a:bodyPr/>
-          <a:lstStyle/>
-          <a:p>
-            <a:endParaRPr lang="en-US"/>
-          </a:p>
-        </p:txBody>
-      </p:sp>
-      <p:sp>
-        <p:nvSpPr>
-          <p:cNvPr id="5" name="Text 3"/>
-          <p:cNvSpPr/>
-          <p:nvPr/>
-        </p:nvSpPr>
-        <p:spPr>
-          <a:xfrm>
-            <a:off x="914400" y="1188720"/>
-            <a:ext cx="2743200" cy="502920"/>
-          </a:xfrm>
-          <a:prstGeom prst="rect">
-            <a:avLst/>
-          </a:prstGeom>
-          <a:noFill/>
-          <a:ln/>
-        </p:spPr>
-        <p:txBody>
-          <a:bodyPr wrap="square" lIns="0" tIns="0" rIns="0" bIns="0" rtlCol="0" anchor="ctr"/>
-          <a:lstStyle/>
-          <a:p>
-            <a:pPr marL="0" indent="0">
-              <a:buNone/>
-            </a:pPr>
-            <a:r>
-              <a:rPr lang="en-US" sz="1500" b="1" dirty="0">
-                <a:solidFill>
-                  <a:srgbClr val="27AE60"/>
-                </a:solidFill>
-                <a:latin typeface="Calibri" pitchFamily="34" charset="0"/>
-                <a:ea typeface="Calibri" pitchFamily="34" charset="-122"/>
-                <a:cs typeface="Calibri" pitchFamily="34" charset="-120"/>
-              </a:rPr>
-              <a:t>Kafka</a:t>
-            </a:r>
-            <a:endParaRPr lang="en-US" sz="1500" dirty="0"/>
-          </a:p>
-        </p:txBody>
-      </p:sp>
-      <p:sp>
-        <p:nvSpPr>
-          <p:cNvPr id="6" name="Text 4"/>
-          <p:cNvSpPr/>
-          <p:nvPr/>
-        </p:nvSpPr>
-        <p:spPr>
-          <a:xfrm>
-            <a:off x="3657600" y="1188720"/>
-            <a:ext cx="4572000" cy="502920"/>
-          </a:xfrm>
-          <a:prstGeom prst="rect">
-            <a:avLst/>
-          </a:prstGeom>
-          <a:noFill/>
-          <a:ln/>
-        </p:spPr>
-        <p:txBody>
-          <a:bodyPr wrap="square" lIns="0" tIns="0" rIns="0" bIns="0" rtlCol="0" anchor="ctr"/>
-          <a:lstStyle/>
-          <a:p>
-            <a:pPr marL="0" indent="0">
-              <a:buNone/>
-            </a:pPr>
-            <a:r>
-              <a:rPr lang="en-US" sz="1300" dirty="0">
-                <a:solidFill>
-                  <a:srgbClr val="A0AEC0"/>
-                </a:solidFill>
-                <a:latin typeface="Calibri" pitchFamily="34" charset="0"/>
-                <a:ea typeface="Calibri" pitchFamily="34" charset="-122"/>
-                <a:cs typeface="Calibri" pitchFamily="34" charset="-120"/>
-              </a:rPr>
-              <a:t>LinkedIn, Netflix, Uber, every major bank</a:t>
-            </a:r>
-            <a:endParaRPr lang="en-US" sz="1300" dirty="0"/>
-          </a:p>
-        </p:txBody>
-      </p:sp>
-      <p:sp>
-        <p:nvSpPr>
-          <p:cNvPr id="7" name="Shape 5"/>
-          <p:cNvSpPr/>
-          <p:nvPr/>
-        </p:nvSpPr>
-        <p:spPr>
-          <a:xfrm>
-            <a:off x="731520" y="1828800"/>
-            <a:ext cx="7680960" cy="502920"/>
-          </a:xfrm>
-          <a:prstGeom prst="rect">
-            <a:avLst/>
-          </a:prstGeom>
-          <a:solidFill>
-            <a:srgbClr val="1A1A1A"/>
-          </a:solidFill>
-          <a:ln/>
-        </p:spPr>
-        <p:txBody>
-          <a:bodyPr/>
-          <a:lstStyle/>
-          <a:p>
-            <a:endParaRPr lang="en-US"/>
-          </a:p>
-        </p:txBody>
-      </p:sp>
-      <p:sp>
-        <p:nvSpPr>
-          <p:cNvPr id="8" name="Text 6"/>
-          <p:cNvSpPr/>
-          <p:nvPr/>
-        </p:nvSpPr>
-        <p:spPr>
-          <a:xfrm>
-            <a:off x="914400" y="1828800"/>
-            <a:ext cx="2743200" cy="502920"/>
-          </a:xfrm>
-          <a:prstGeom prst="rect">
-            <a:avLst/>
-          </a:prstGeom>
-          <a:noFill/>
-          <a:ln/>
-        </p:spPr>
-        <p:txBody>
-          <a:bodyPr wrap="square" lIns="0" tIns="0" rIns="0" bIns="0" rtlCol="0" anchor="ctr"/>
-          <a:lstStyle/>
-          <a:p>
-            <a:pPr marL="0" indent="0">
-              <a:buNone/>
-            </a:pPr>
-            <a:r>
-              <a:rPr lang="en-US" sz="1500" b="1" dirty="0">
-                <a:solidFill>
-                  <a:srgbClr val="27AE60"/>
-                </a:solidFill>
-                <a:latin typeface="Calibri" pitchFamily="34" charset="0"/>
-                <a:ea typeface="Calibri" pitchFamily="34" charset="-122"/>
-                <a:cs typeface="Calibri" pitchFamily="34" charset="-120"/>
-              </a:rPr>
-              <a:t>Spark Streaming</a:t>
-            </a:r>
-            <a:endParaRPr lang="en-US" sz="1500" dirty="0"/>
-          </a:p>
-        </p:txBody>
-      </p:sp>
-      <p:sp>
-        <p:nvSpPr>
-          <p:cNvPr id="9" name="Text 7"/>
-          <p:cNvSpPr/>
-          <p:nvPr/>
-        </p:nvSpPr>
-        <p:spPr>
-          <a:xfrm>
-            <a:off x="3657600" y="1828800"/>
-            <a:ext cx="4572000" cy="502920"/>
-          </a:xfrm>
-          <a:prstGeom prst="rect">
-            <a:avLst/>
-          </a:prstGeom>
-          <a:noFill/>
-          <a:ln/>
-        </p:spPr>
-        <p:txBody>
-          <a:bodyPr wrap="square" lIns="0" tIns="0" rIns="0" bIns="0" rtlCol="0" anchor="ctr"/>
-          <a:lstStyle/>
-          <a:p>
-            <a:pPr marL="0" indent="0">
-              <a:buNone/>
-            </a:pPr>
-            <a:r>
-              <a:rPr lang="en-US" sz="1300" dirty="0">
-                <a:solidFill>
-                  <a:srgbClr val="A0AEC0"/>
-                </a:solidFill>
-                <a:latin typeface="Calibri" pitchFamily="34" charset="0"/>
-                <a:ea typeface="Calibri" pitchFamily="34" charset="-122"/>
-                <a:cs typeface="Calibri" pitchFamily="34" charset="-120"/>
-              </a:rPr>
-              <a:t>Fraud detection, risk analytics, recommendations</a:t>
-            </a:r>
-            <a:endParaRPr lang="en-US" sz="1300" dirty="0"/>
-          </a:p>
-        </p:txBody>
-      </p:sp>
-      <p:sp>
-        <p:nvSpPr>
-          <p:cNvPr id="10" name="Shape 8"/>
-          <p:cNvSpPr/>
-          <p:nvPr/>
-        </p:nvSpPr>
-        <p:spPr>
-          <a:xfrm>
-            <a:off x="731520" y="2468880"/>
-            <a:ext cx="7680960" cy="502920"/>
-          </a:xfrm>
-          <a:prstGeom prst="rect">
-            <a:avLst/>
-          </a:prstGeom>
-          <a:solidFill>
-            <a:srgbClr val="1A1A1A"/>
-          </a:solidFill>
-          <a:ln/>
-        </p:spPr>
-        <p:txBody>
-          <a:bodyPr/>
-          <a:lstStyle/>
-          <a:p>
-            <a:endParaRPr lang="en-US"/>
-          </a:p>
-        </p:txBody>
-      </p:sp>
-      <p:sp>
-        <p:nvSpPr>
-          <p:cNvPr id="11" name="Text 9"/>
-          <p:cNvSpPr/>
-          <p:nvPr/>
-        </p:nvSpPr>
-        <p:spPr>
-          <a:xfrm>
-            <a:off x="914400" y="2468880"/>
-            <a:ext cx="2743200" cy="502920"/>
-          </a:xfrm>
-          <a:prstGeom prst="rect">
-            <a:avLst/>
-          </a:prstGeom>
-          <a:noFill/>
-          <a:ln/>
-        </p:spPr>
-        <p:txBody>
-          <a:bodyPr wrap="square" lIns="0" tIns="0" rIns="0" bIns="0" rtlCol="0" anchor="ctr"/>
-          <a:lstStyle/>
-          <a:p>
-            <a:pPr marL="0" indent="0">
-              <a:buNone/>
-            </a:pPr>
-            <a:r>
-              <a:rPr lang="en-US" sz="1500" b="1" dirty="0">
-                <a:solidFill>
-                  <a:srgbClr val="27AE60"/>
-                </a:solidFill>
-                <a:latin typeface="Calibri" pitchFamily="34" charset="0"/>
-                <a:ea typeface="Calibri" pitchFamily="34" charset="-122"/>
-                <a:cs typeface="Calibri" pitchFamily="34" charset="-120"/>
-              </a:rPr>
-              <a:t>AWS Managed Services</a:t>
-            </a:r>
-            <a:endParaRPr lang="en-US" sz="1500" dirty="0"/>
-          </a:p>
-        </p:txBody>
-      </p:sp>
-      <p:sp>
-        <p:nvSpPr>
-          <p:cNvPr id="12" name="Text 10"/>
-          <p:cNvSpPr/>
-          <p:nvPr/>
-        </p:nvSpPr>
-        <p:spPr>
-          <a:xfrm>
-            <a:off x="3657600" y="2468880"/>
-            <a:ext cx="4572000" cy="502920"/>
-          </a:xfrm>
-          <a:prstGeom prst="rect">
-            <a:avLst/>
-          </a:prstGeom>
-          <a:noFill/>
-          <a:ln/>
-        </p:spPr>
-        <p:txBody>
-          <a:bodyPr wrap="square" lIns="0" tIns="0" rIns="0" bIns="0" rtlCol="0" anchor="ctr"/>
-          <a:lstStyle/>
-          <a:p>
-            <a:pPr marL="0" indent="0">
-              <a:buNone/>
-            </a:pPr>
-            <a:r>
-              <a:rPr lang="en-US" sz="1300" dirty="0">
-                <a:solidFill>
-                  <a:srgbClr val="A0AEC0"/>
-                </a:solidFill>
-                <a:latin typeface="Calibri" pitchFamily="34" charset="0"/>
-                <a:ea typeface="Calibri" pitchFamily="34" charset="-122"/>
-                <a:cs typeface="Calibri" pitchFamily="34" charset="-120"/>
-              </a:rPr>
-              <a:t>How teams ship without managing infrastructure</a:t>
-            </a:r>
-            <a:endParaRPr lang="en-US" sz="1300" dirty="0"/>
-          </a:p>
-        </p:txBody>
-      </p:sp>
-      <p:sp>
-        <p:nvSpPr>
-          <p:cNvPr id="13" name="Shape 11"/>
-          <p:cNvSpPr/>
-          <p:nvPr/>
-        </p:nvSpPr>
-        <p:spPr>
-          <a:xfrm>
-            <a:off x="731520" y="3108960"/>
-            <a:ext cx="7680960" cy="502920"/>
-          </a:xfrm>
-          <a:prstGeom prst="rect">
-            <a:avLst/>
-          </a:prstGeom>
-          <a:solidFill>
-            <a:srgbClr val="1A1A1A"/>
-          </a:solidFill>
-          <a:ln/>
-        </p:spPr>
-        <p:txBody>
-          <a:bodyPr/>
-          <a:lstStyle/>
-          <a:p>
-            <a:endParaRPr lang="en-US"/>
-          </a:p>
-        </p:txBody>
-      </p:sp>
-      <p:sp>
-        <p:nvSpPr>
-          <p:cNvPr id="14" name="Text 12"/>
-          <p:cNvSpPr/>
-          <p:nvPr/>
-        </p:nvSpPr>
-        <p:spPr>
-          <a:xfrm>
-            <a:off x="914400" y="3108960"/>
-            <a:ext cx="2743200" cy="502920"/>
-          </a:xfrm>
-          <a:prstGeom prst="rect">
-            <a:avLst/>
-          </a:prstGeom>
-          <a:noFill/>
-          <a:ln/>
-        </p:spPr>
-        <p:txBody>
-          <a:bodyPr wrap="square" lIns="0" tIns="0" rIns="0" bIns="0" rtlCol="0" anchor="ctr"/>
-          <a:lstStyle/>
-          <a:p>
-            <a:pPr marL="0" indent="0">
-              <a:buNone/>
-            </a:pPr>
-            <a:r>
-              <a:rPr lang="en-US" sz="1500" b="1" dirty="0">
-                <a:solidFill>
-                  <a:srgbClr val="27AE60"/>
-                </a:solidFill>
-                <a:latin typeface="Calibri" pitchFamily="34" charset="0"/>
-                <a:ea typeface="Calibri" pitchFamily="34" charset="-122"/>
-                <a:cs typeface="Calibri" pitchFamily="34" charset="-120"/>
-              </a:rPr>
-              <a:t>Terraform</a:t>
-            </a:r>
-            <a:endParaRPr lang="en-US" sz="1500" dirty="0"/>
-          </a:p>
-        </p:txBody>
-      </p:sp>
-      <p:sp>
-        <p:nvSpPr>
-          <p:cNvPr id="15" name="Text 13"/>
-          <p:cNvSpPr/>
-          <p:nvPr/>
-        </p:nvSpPr>
-        <p:spPr>
-          <a:xfrm>
-            <a:off x="3657600" y="3108960"/>
-            <a:ext cx="4572000" cy="502920"/>
-          </a:xfrm>
-          <a:prstGeom prst="rect">
-            <a:avLst/>
-          </a:prstGeom>
-          <a:noFill/>
-          <a:ln/>
-        </p:spPr>
-        <p:txBody>
-          <a:bodyPr wrap="square" lIns="0" tIns="0" rIns="0" bIns="0" rtlCol="0" anchor="ctr"/>
-          <a:lstStyle/>
-          <a:p>
-            <a:pPr marL="0" indent="0">
-              <a:buNone/>
-            </a:pPr>
-            <a:r>
-              <a:rPr lang="en-US" sz="1300" dirty="0">
-                <a:solidFill>
-                  <a:srgbClr val="A0AEC0"/>
-                </a:solidFill>
-                <a:latin typeface="Calibri" pitchFamily="34" charset="0"/>
-                <a:ea typeface="Calibri" pitchFamily="34" charset="-122"/>
-                <a:cs typeface="Calibri" pitchFamily="34" charset="-120"/>
-              </a:rPr>
-              <a:t>Baseline expectation for cloud engineering roles</a:t>
-            </a:r>
-            <a:endParaRPr lang="en-US" sz="1300" dirty="0"/>
-          </a:p>
-        </p:txBody>
-      </p:sp>
-      <p:sp>
-        <p:nvSpPr>
-          <p:cNvPr id="16" name="Shape 14"/>
-          <p:cNvSpPr/>
-          <p:nvPr/>
-        </p:nvSpPr>
-        <p:spPr>
-          <a:xfrm>
-            <a:off x="731520" y="3749040"/>
-            <a:ext cx="7680960" cy="502920"/>
-          </a:xfrm>
-          <a:prstGeom prst="rect">
-            <a:avLst/>
-          </a:prstGeom>
-          <a:solidFill>
-            <a:srgbClr val="1A1A1A"/>
-          </a:solidFill>
-          <a:ln/>
-        </p:spPr>
-        <p:txBody>
-          <a:bodyPr/>
-          <a:lstStyle/>
-          <a:p>
-            <a:endParaRPr lang="en-US"/>
-          </a:p>
-        </p:txBody>
-      </p:sp>
-      <p:sp>
-        <p:nvSpPr>
-          <p:cNvPr id="17" name="Text 15"/>
-          <p:cNvSpPr/>
-          <p:nvPr/>
-        </p:nvSpPr>
-        <p:spPr>
-          <a:xfrm>
-            <a:off x="914400" y="3749040"/>
-            <a:ext cx="2743200" cy="502920"/>
-          </a:xfrm>
-          <a:prstGeom prst="rect">
-            <a:avLst/>
-          </a:prstGeom>
-          <a:noFill/>
-          <a:ln/>
-        </p:spPr>
-        <p:txBody>
-          <a:bodyPr wrap="square" lIns="0" tIns="0" rIns="0" bIns="0" rtlCol="0" anchor="ctr"/>
-          <a:lstStyle/>
-          <a:p>
-            <a:pPr marL="0" indent="0">
-              <a:buNone/>
-            </a:pPr>
-            <a:r>
-              <a:rPr lang="en-US" sz="1500" b="1" dirty="0">
-                <a:solidFill>
-                  <a:srgbClr val="27AE60"/>
-                </a:solidFill>
-                <a:latin typeface="Calibri" pitchFamily="34" charset="0"/>
-                <a:ea typeface="Calibri" pitchFamily="34" charset="-122"/>
-                <a:cs typeface="Calibri" pitchFamily="34" charset="-120"/>
-              </a:rPr>
-              <a:t>Event-Driven Architecture</a:t>
-            </a:r>
-            <a:endParaRPr lang="en-US" sz="1500" dirty="0"/>
-          </a:p>
-        </p:txBody>
-      </p:sp>
-      <p:sp>
-        <p:nvSpPr>
-          <p:cNvPr id="18" name="Text 16"/>
-          <p:cNvSpPr/>
-          <p:nvPr/>
-        </p:nvSpPr>
-        <p:spPr>
-          <a:xfrm>
-            <a:off x="3657600" y="3749040"/>
-            <a:ext cx="4572000" cy="502920"/>
-          </a:xfrm>
-          <a:prstGeom prst="rect">
-            <a:avLst/>
-          </a:prstGeom>
-          <a:noFill/>
-          <a:ln/>
-        </p:spPr>
-        <p:txBody>
-          <a:bodyPr wrap="square" lIns="0" tIns="0" rIns="0" bIns="0" rtlCol="0" anchor="ctr"/>
-          <a:lstStyle/>
-          <a:p>
-            <a:pPr marL="0" indent="0">
-              <a:buNone/>
-            </a:pPr>
-            <a:r>
-              <a:rPr lang="en-US" sz="1300" dirty="0">
-                <a:solidFill>
-                  <a:srgbClr val="A0AEC0"/>
-                </a:solidFill>
-                <a:latin typeface="Calibri" pitchFamily="34" charset="0"/>
-                <a:ea typeface="Calibri" pitchFamily="34" charset="-122"/>
-                <a:cs typeface="Calibri" pitchFamily="34" charset="-120"/>
-              </a:rPr>
-              <a:t>The dominant pattern for systems that scale</a:t>
-            </a:r>
-            <a:endParaRPr lang="en-US" sz="1300" dirty="0"/>
-          </a:p>
-        </p:txBody>
-      </p:sp>
-      <p:sp>
-        <p:nvSpPr>
-          <p:cNvPr id="19" name="Text 17"/>
-          <p:cNvSpPr/>
-          <p:nvPr/>
-        </p:nvSpPr>
-        <p:spPr>
-          <a:xfrm>
-            <a:off x="731520" y="4389120"/>
-            <a:ext cx="7680960" cy="548640"/>
-          </a:xfrm>
-          <a:prstGeom prst="rect">
-            <a:avLst/>
-          </a:prstGeom>
-          <a:noFill/>
-          <a:ln/>
-        </p:spPr>
-        <p:txBody>
-          <a:bodyPr wrap="square" lIns="0" tIns="0" rIns="0" bIns="0" rtlCol="0" anchor="ctr"/>
-          <a:lstStyle/>
-          <a:p>
-            <a:pPr marL="0" indent="0">
-              <a:buNone/>
-            </a:pPr>
-            <a:r>
-              <a:rPr lang="en-US" sz="1300" dirty="0">
-                <a:solidFill>
-                  <a:srgbClr val="718096"/>
-                </a:solidFill>
-                <a:latin typeface="Calibri" pitchFamily="34" charset="0"/>
-                <a:ea typeface="Calibri" pitchFamily="34" charset="-122"/>
-                <a:cs typeface="Calibri" pitchFamily="34" charset="-120"/>
-              </a:rPr>
-              <a:t>These patterns apply beyond finance: fraud detection, infrastructure monitoring,</a:t>
-            </a:r>
-            <a:endParaRPr lang="en-US" sz="1300" dirty="0"/>
-          </a:p>
-          <a:p>
-            <a:pPr marL="0" indent="0">
-              <a:buNone/>
-            </a:pPr>
-            <a:r>
-              <a:rPr lang="en-US" sz="1300" dirty="0">
-                <a:solidFill>
-                  <a:srgbClr val="718096"/>
-                </a:solidFill>
-                <a:latin typeface="Calibri" pitchFamily="34" charset="0"/>
-                <a:ea typeface="Calibri" pitchFamily="34" charset="-122"/>
-                <a:cs typeface="Calibri" pitchFamily="34" charset="-120"/>
-              </a:rPr>
-              <a:t>IoT alerting, content moderation, and anywhere anomalies need real-time response.</a:t>
-            </a:r>
-            <a:endParaRPr lang="en-US" sz="1300" dirty="0"/>
           </a:p>
         </p:txBody>
       </p:sp>
@@ -9494,7 +8947,7 @@
         </p:blipFill>
         <p:spPr>
           <a:xfrm>
-            <a:off x="6262371" y="1270635"/>
+            <a:off x="6163311" y="2023110"/>
             <a:ext cx="1831337" cy="1832610"/>
           </a:xfrm>
           <a:prstGeom prst="rect">
@@ -9511,6 +8964,1469 @@
 </file>
 
 <file path=ppt/slides/slide20.xml><?xml version="1.0" encoding="utf-8"?>
+<p:sld xmlns:a="http://schemas.openxmlformats.org/drawingml/2006/main" xmlns:r="http://schemas.openxmlformats.org/officeDocument/2006/relationships" xmlns:p="http://schemas.openxmlformats.org/presentationml/2006/main">
+  <p:cSld>
+    <p:bg>
+      <p:bgPr>
+        <a:solidFill>
+          <a:srgbClr val="111111"/>
+        </a:solidFill>
+        <a:effectLst/>
+      </p:bgPr>
+    </p:bg>
+    <p:spTree>
+      <p:nvGrpSpPr>
+        <p:cNvPr id="1" name="">
+          <a:extLst>
+            <a:ext uri="{FF2B5EF4-FFF2-40B4-BE49-F238E27FC236}">
+              <a16:creationId xmlns:a16="http://schemas.microsoft.com/office/drawing/2014/main" id="{84E1752B-15D2-9206-ACF0-DB6FDE1498A7}"/>
+            </a:ext>
+          </a:extLst>
+        </p:cNvPr>
+        <p:cNvGrpSpPr/>
+        <p:nvPr/>
+      </p:nvGrpSpPr>
+      <p:grpSpPr>
+        <a:xfrm>
+          <a:off x="0" y="0"/>
+          <a:ext cx="0" cy="0"/>
+          <a:chOff x="0" y="0"/>
+          <a:chExt cx="0" cy="0"/>
+        </a:xfrm>
+      </p:grpSpPr>
+      <p:sp>
+        <p:nvSpPr>
+          <p:cNvPr id="2" name="Shape 0">
+            <a:extLst>
+              <a:ext uri="{FF2B5EF4-FFF2-40B4-BE49-F238E27FC236}">
+                <a16:creationId xmlns:a16="http://schemas.microsoft.com/office/drawing/2014/main" id="{EBD07AF3-66AE-460A-62D5-2CD2ED62831F}"/>
+              </a:ext>
+            </a:extLst>
+          </p:cNvPr>
+          <p:cNvSpPr/>
+          <p:nvPr/>
+        </p:nvSpPr>
+        <p:spPr>
+          <a:xfrm>
+            <a:off x="0" y="0"/>
+            <a:ext cx="9144000" cy="54864"/>
+          </a:xfrm>
+          <a:prstGeom prst="rect">
+            <a:avLst/>
+          </a:prstGeom>
+          <a:solidFill>
+            <a:srgbClr val="00703C"/>
+          </a:solidFill>
+          <a:ln/>
+        </p:spPr>
+        <p:txBody>
+          <a:bodyPr/>
+          <a:lstStyle/>
+          <a:p>
+            <a:endParaRPr lang="en-US"/>
+          </a:p>
+        </p:txBody>
+      </p:sp>
+      <p:sp>
+        <p:nvSpPr>
+          <p:cNvPr id="3" name="Text 1">
+            <a:extLst>
+              <a:ext uri="{FF2B5EF4-FFF2-40B4-BE49-F238E27FC236}">
+                <a16:creationId xmlns:a16="http://schemas.microsoft.com/office/drawing/2014/main" id="{995607F2-EDAF-A7E8-96D5-54473E01B704}"/>
+              </a:ext>
+            </a:extLst>
+          </p:cNvPr>
+          <p:cNvSpPr/>
+          <p:nvPr/>
+        </p:nvSpPr>
+        <p:spPr>
+          <a:xfrm>
+            <a:off x="731520" y="274320"/>
+            <a:ext cx="7680960" cy="640080"/>
+          </a:xfrm>
+          <a:prstGeom prst="rect">
+            <a:avLst/>
+          </a:prstGeom>
+          <a:noFill/>
+          <a:ln/>
+        </p:spPr>
+        <p:txBody>
+          <a:bodyPr wrap="square" lIns="0" tIns="0" rIns="0" bIns="0" rtlCol="0" anchor="ctr"/>
+          <a:lstStyle/>
+          <a:p>
+            <a:pPr marL="0" indent="0">
+              <a:buNone/>
+            </a:pPr>
+            <a:r>
+              <a:rPr lang="en-US" sz="3200" b="1" dirty="0">
+                <a:solidFill>
+                  <a:srgbClr val="FFFFFF"/>
+                </a:solidFill>
+                <a:latin typeface="Georgia" pitchFamily="34" charset="0"/>
+                <a:ea typeface="Georgia" pitchFamily="34" charset="-122"/>
+                <a:cs typeface="Georgia" pitchFamily="34" charset="-120"/>
+              </a:rPr>
+              <a:t>AWS Demo Console</a:t>
+            </a:r>
+            <a:endParaRPr lang="en-US" sz="3200" dirty="0"/>
+          </a:p>
+        </p:txBody>
+      </p:sp>
+      <p:sp>
+        <p:nvSpPr>
+          <p:cNvPr id="11" name="Shape 9">
+            <a:extLst>
+              <a:ext uri="{FF2B5EF4-FFF2-40B4-BE49-F238E27FC236}">
+                <a16:creationId xmlns:a16="http://schemas.microsoft.com/office/drawing/2014/main" id="{3B17F44C-7C8E-B989-FD24-992F63C5187F}"/>
+              </a:ext>
+            </a:extLst>
+          </p:cNvPr>
+          <p:cNvSpPr/>
+          <p:nvPr/>
+        </p:nvSpPr>
+        <p:spPr>
+          <a:xfrm>
+            <a:off x="731520" y="3429000"/>
+            <a:ext cx="7680960" cy="347472"/>
+          </a:xfrm>
+          <a:prstGeom prst="rect">
+            <a:avLst/>
+          </a:prstGeom>
+          <a:solidFill>
+            <a:srgbClr val="111111"/>
+          </a:solidFill>
+          <a:ln/>
+        </p:spPr>
+        <p:txBody>
+          <a:bodyPr/>
+          <a:lstStyle/>
+          <a:p>
+            <a:endParaRPr lang="en-US"/>
+          </a:p>
+        </p:txBody>
+      </p:sp>
+      <p:sp>
+        <p:nvSpPr>
+          <p:cNvPr id="15" name="Shape 13">
+            <a:extLst>
+              <a:ext uri="{FF2B5EF4-FFF2-40B4-BE49-F238E27FC236}">
+                <a16:creationId xmlns:a16="http://schemas.microsoft.com/office/drawing/2014/main" id="{34F5363C-B4C2-B0FC-6285-ECE0E299C199}"/>
+              </a:ext>
+            </a:extLst>
+          </p:cNvPr>
+          <p:cNvSpPr/>
+          <p:nvPr/>
+        </p:nvSpPr>
+        <p:spPr>
+          <a:xfrm>
+            <a:off x="731520" y="3794760"/>
+            <a:ext cx="7680960" cy="347472"/>
+          </a:xfrm>
+          <a:prstGeom prst="rect">
+            <a:avLst/>
+          </a:prstGeom>
+          <a:solidFill>
+            <a:srgbClr val="111111"/>
+          </a:solidFill>
+          <a:ln/>
+        </p:spPr>
+        <p:txBody>
+          <a:bodyPr/>
+          <a:lstStyle/>
+          <a:p>
+            <a:endParaRPr lang="en-US"/>
+          </a:p>
+        </p:txBody>
+      </p:sp>
+      <p:sp>
+        <p:nvSpPr>
+          <p:cNvPr id="19" name="Shape 17">
+            <a:extLst>
+              <a:ext uri="{FF2B5EF4-FFF2-40B4-BE49-F238E27FC236}">
+                <a16:creationId xmlns:a16="http://schemas.microsoft.com/office/drawing/2014/main" id="{713525F0-09DD-1606-1C1A-7069BDE15F75}"/>
+              </a:ext>
+            </a:extLst>
+          </p:cNvPr>
+          <p:cNvSpPr/>
+          <p:nvPr/>
+        </p:nvSpPr>
+        <p:spPr>
+          <a:xfrm>
+            <a:off x="731520" y="4160520"/>
+            <a:ext cx="7680960" cy="347472"/>
+          </a:xfrm>
+          <a:prstGeom prst="rect">
+            <a:avLst/>
+          </a:prstGeom>
+          <a:solidFill>
+            <a:srgbClr val="111111"/>
+          </a:solidFill>
+          <a:ln/>
+        </p:spPr>
+        <p:txBody>
+          <a:bodyPr/>
+          <a:lstStyle/>
+          <a:p>
+            <a:endParaRPr lang="en-US"/>
+          </a:p>
+        </p:txBody>
+      </p:sp>
+      <p:sp>
+        <p:nvSpPr>
+          <p:cNvPr id="25" name="Text 23">
+            <a:extLst>
+              <a:ext uri="{FF2B5EF4-FFF2-40B4-BE49-F238E27FC236}">
+                <a16:creationId xmlns:a16="http://schemas.microsoft.com/office/drawing/2014/main" id="{6A571F57-37B9-94B6-8E14-E4B844B1E649}"/>
+              </a:ext>
+            </a:extLst>
+          </p:cNvPr>
+          <p:cNvSpPr/>
+          <p:nvPr/>
+        </p:nvSpPr>
+        <p:spPr>
+          <a:xfrm>
+            <a:off x="3657600" y="4526280"/>
+            <a:ext cx="2743200" cy="347472"/>
+          </a:xfrm>
+          <a:prstGeom prst="rect">
+            <a:avLst/>
+          </a:prstGeom>
+          <a:noFill/>
+          <a:ln/>
+        </p:spPr>
+        <p:txBody>
+          <a:bodyPr wrap="square" lIns="0" tIns="0" rIns="0" bIns="0" rtlCol="0" anchor="ctr"/>
+          <a:lstStyle/>
+          <a:p>
+            <a:pPr marL="0" indent="0">
+              <a:buNone/>
+            </a:pPr>
+            <a:endParaRPr lang="en-US" sz="1200" dirty="0"/>
+          </a:p>
+        </p:txBody>
+      </p:sp>
+      <p:pic>
+        <p:nvPicPr>
+          <p:cNvPr id="28" name="Picture 27">
+            <a:extLst>
+              <a:ext uri="{FF2B5EF4-FFF2-40B4-BE49-F238E27FC236}">
+                <a16:creationId xmlns:a16="http://schemas.microsoft.com/office/drawing/2014/main" id="{FC3BC04A-2238-E5DE-499D-A9E87FCA7C5A}"/>
+              </a:ext>
+            </a:extLst>
+          </p:cNvPr>
+          <p:cNvPicPr>
+            <a:picLocks noChangeAspect="1"/>
+          </p:cNvPicPr>
+          <p:nvPr/>
+        </p:nvPicPr>
+        <p:blipFill>
+          <a:blip r:embed="rId3"/>
+          <a:stretch>
+            <a:fillRect/>
+          </a:stretch>
+        </p:blipFill>
+        <p:spPr>
+          <a:xfrm>
+            <a:off x="1074420" y="1001268"/>
+            <a:ext cx="6995160" cy="3983354"/>
+          </a:xfrm>
+          <a:prstGeom prst="rect">
+            <a:avLst/>
+          </a:prstGeom>
+        </p:spPr>
+      </p:pic>
+    </p:spTree>
+    <p:extLst>
+      <p:ext uri="{BB962C8B-B14F-4D97-AF65-F5344CB8AC3E}">
+        <p14:creationId xmlns:p14="http://schemas.microsoft.com/office/powerpoint/2010/main" val="3883101542"/>
+      </p:ext>
+    </p:extLst>
+  </p:cSld>
+  <p:clrMapOvr>
+    <a:masterClrMapping/>
+  </p:clrMapOvr>
+</p:sld>
+</file>
+
+<file path=ppt/slides/slide21.xml><?xml version="1.0" encoding="utf-8"?>
+<p:sld xmlns:a="http://schemas.openxmlformats.org/drawingml/2006/main" xmlns:r="http://schemas.openxmlformats.org/officeDocument/2006/relationships" xmlns:p="http://schemas.openxmlformats.org/presentationml/2006/main">
+  <p:cSld name="Security and Compliance">
+    <p:bg>
+      <p:bgPr>
+        <a:solidFill>
+          <a:srgbClr val="111111"/>
+        </a:solidFill>
+        <a:effectLst/>
+      </p:bgPr>
+    </p:bg>
+    <p:spTree>
+      <p:nvGrpSpPr>
+        <p:cNvPr id="1" name=""/>
+        <p:cNvGrpSpPr/>
+        <p:nvPr/>
+      </p:nvGrpSpPr>
+      <p:grpSpPr>
+        <a:xfrm>
+          <a:off x="0" y="0"/>
+          <a:ext cx="0" cy="0"/>
+          <a:chOff x="0" y="0"/>
+          <a:chExt cx="0" cy="0"/>
+        </a:xfrm>
+      </p:grpSpPr>
+      <p:sp>
+        <p:nvSpPr>
+          <p:cNvPr id="2" name="TopBar"/>
+          <p:cNvSpPr/>
+          <p:nvPr/>
+        </p:nvSpPr>
+        <p:spPr>
+          <a:xfrm>
+            <a:off x="0" y="0"/>
+            <a:ext cx="9144000" cy="54864"/>
+          </a:xfrm>
+          <a:prstGeom prst="rect">
+            <a:avLst/>
+          </a:prstGeom>
+          <a:solidFill>
+            <a:srgbClr val="00703C"/>
+          </a:solidFill>
+          <a:ln/>
+        </p:spPr>
+        <p:txBody>
+          <a:bodyPr/>
+          <a:lstStyle/>
+          <a:p>
+            <a:endParaRPr lang="en-US"/>
+          </a:p>
+        </p:txBody>
+      </p:sp>
+      <p:sp>
+        <p:nvSpPr>
+          <p:cNvPr id="3" name="Title"/>
+          <p:cNvSpPr/>
+          <p:nvPr/>
+        </p:nvSpPr>
+        <p:spPr>
+          <a:xfrm>
+            <a:off x="731520" y="137160"/>
+            <a:ext cx="7680960" cy="548640"/>
+          </a:xfrm>
+          <a:prstGeom prst="rect">
+            <a:avLst/>
+          </a:prstGeom>
+          <a:noFill/>
+          <a:ln/>
+        </p:spPr>
+        <p:txBody>
+          <a:bodyPr wrap="square" lIns="0" tIns="0" rIns="0" bIns="0" rtlCol="0" anchor="t"/>
+          <a:lstStyle/>
+          <a:p>
+            <a:pPr marL="0" indent="0">
+              <a:buNone/>
+            </a:pPr>
+            <a:r>
+              <a:rPr lang="en-US" sz="3200" b="1" dirty="0">
+                <a:solidFill>
+                  <a:srgbClr val="FFFFFF"/>
+                </a:solidFill>
+                <a:latin typeface="Georgia" pitchFamily="34" charset="0"/>
+              </a:rPr>
+              <a:t>Security &amp; Production Gaps</a:t>
+            </a:r>
+          </a:p>
+        </p:txBody>
+      </p:sp>
+      <p:sp>
+        <p:nvSpPr>
+          <p:cNvPr id="4" name="Sub"/>
+          <p:cNvSpPr/>
+          <p:nvPr/>
+        </p:nvSpPr>
+        <p:spPr>
+          <a:xfrm>
+            <a:off x="731520" y="594360"/>
+            <a:ext cx="7680960" cy="274320"/>
+          </a:xfrm>
+          <a:prstGeom prst="rect">
+            <a:avLst/>
+          </a:prstGeom>
+          <a:noFill/>
+          <a:ln/>
+        </p:spPr>
+        <p:txBody>
+          <a:bodyPr wrap="square" lIns="0" tIns="0" rIns="0" bIns="0" rtlCol="0" anchor="t"/>
+          <a:lstStyle/>
+          <a:p>
+            <a:pPr marL="0" indent="0">
+              <a:buNone/>
+            </a:pPr>
+            <a:r>
+              <a:rPr lang="en-US" sz="1600" dirty="0">
+                <a:solidFill>
+                  <a:srgbClr val="718096"/>
+                </a:solidFill>
+                <a:latin typeface="Calibri" pitchFamily="34" charset="0"/>
+              </a:rPr>
+              <a:t>What this demo does well, and what a real broker-dealer would need</a:t>
+            </a:r>
+          </a:p>
+        </p:txBody>
+      </p:sp>
+      <p:sp>
+        <p:nvSpPr>
+          <p:cNvPr id="10" name="HaveBg"/>
+          <p:cNvSpPr/>
+          <p:nvPr/>
+        </p:nvSpPr>
+        <p:spPr>
+          <a:xfrm>
+            <a:off x="731520" y="1005840"/>
+            <a:ext cx="3749040" cy="2468880"/>
+          </a:xfrm>
+          <a:prstGeom prst="rect">
+            <a:avLst/>
+          </a:prstGeom>
+          <a:solidFill>
+            <a:srgbClr val="1A1A1A"/>
+          </a:solidFill>
+          <a:ln/>
+        </p:spPr>
+        <p:txBody>
+          <a:bodyPr/>
+          <a:lstStyle/>
+          <a:p>
+            <a:endParaRPr lang="en-US"/>
+          </a:p>
+        </p:txBody>
+      </p:sp>
+      <p:sp>
+        <p:nvSpPr>
+          <p:cNvPr id="11" name="Have"/>
+          <p:cNvSpPr/>
+          <p:nvPr/>
+        </p:nvSpPr>
+        <p:spPr>
+          <a:xfrm>
+            <a:off x="868680" y="1005840"/>
+            <a:ext cx="3474720" cy="2468880"/>
+          </a:xfrm>
+          <a:prstGeom prst="rect">
+            <a:avLst/>
+          </a:prstGeom>
+          <a:noFill/>
+          <a:ln/>
+        </p:spPr>
+        <p:txBody>
+          <a:bodyPr wrap="square" lIns="91440" tIns="91440" rIns="0" bIns="0" rtlCol="0" anchor="t"/>
+          <a:lstStyle/>
+          <a:p>
+            <a:pPr marL="0" indent="0">
+              <a:buNone/>
+            </a:pPr>
+            <a:r>
+              <a:rPr lang="en-US" sz="1600" b="1" dirty="0">
+                <a:solidFill>
+                  <a:srgbClr val="00703C"/>
+                </a:solidFill>
+                <a:latin typeface="Calibri" pitchFamily="34" charset="0"/>
+              </a:rPr>
+              <a:t>What This Demo Includes</a:t>
+            </a:r>
+          </a:p>
+          <a:p>
+            <a:pPr marL="0" indent="0">
+              <a:lnSpc>
+                <a:spcPts val="2200"/>
+              </a:lnSpc>
+              <a:buNone/>
+            </a:pPr>
+            <a:r>
+              <a:rPr lang="en-US" sz="1200" dirty="0">
+                <a:solidFill>
+                  <a:srgbClr val="A0AEC0"/>
+                </a:solidFill>
+                <a:latin typeface="Calibri" pitchFamily="34" charset="0"/>
+              </a:rPr>
+              <a:t>Least-privilege IAM roles per Lambda</a:t>
+            </a:r>
+          </a:p>
+          <a:p>
+            <a:pPr marL="0" indent="0">
+              <a:lnSpc>
+                <a:spcPts val="2200"/>
+              </a:lnSpc>
+              <a:buNone/>
+            </a:pPr>
+            <a:r>
+              <a:rPr lang="en-US" sz="1200" dirty="0">
+                <a:solidFill>
+                  <a:srgbClr val="A0AEC0"/>
+                </a:solidFill>
+                <a:latin typeface="Calibri" pitchFamily="34" charset="0"/>
+              </a:rPr>
+              <a:t>VPC isolation for MSK and Lambda</a:t>
+            </a:r>
+          </a:p>
+          <a:p>
+            <a:pPr marL="0" indent="0">
+              <a:lnSpc>
+                <a:spcPts val="2200"/>
+              </a:lnSpc>
+              <a:buNone/>
+            </a:pPr>
+            <a:r>
+              <a:rPr lang="en-US" sz="1200" dirty="0">
+                <a:solidFill>
+                  <a:srgbClr val="A0AEC0"/>
+                </a:solidFill>
+                <a:latin typeface="Calibri" pitchFamily="34" charset="0"/>
+              </a:rPr>
+              <a:t>IAM authentication for Kafka (SASL_IAM)</a:t>
+            </a:r>
+          </a:p>
+          <a:p>
+            <a:pPr marL="0" indent="0">
+              <a:lnSpc>
+                <a:spcPts val="2200"/>
+              </a:lnSpc>
+              <a:buNone/>
+            </a:pPr>
+            <a:r>
+              <a:rPr lang="en-US" sz="1200" dirty="0">
+                <a:solidFill>
+                  <a:srgbClr val="A0AEC0"/>
+                </a:solidFill>
+                <a:latin typeface="Calibri" pitchFamily="34" charset="0"/>
+              </a:rPr>
+              <a:t>TLS encryption in transit</a:t>
+            </a:r>
+          </a:p>
+          <a:p>
+            <a:pPr marL="0" indent="0">
+              <a:lnSpc>
+                <a:spcPts val="2200"/>
+              </a:lnSpc>
+              <a:buNone/>
+            </a:pPr>
+            <a:r>
+              <a:rPr lang="en-US" sz="1200" dirty="0">
+                <a:solidFill>
+                  <a:srgbClr val="A0AEC0"/>
+                </a:solidFill>
+                <a:latin typeface="Calibri" pitchFamily="34" charset="0"/>
+              </a:rPr>
+              <a:t>Immutable audit trail with correlation IDs</a:t>
+            </a:r>
+          </a:p>
+          <a:p>
+            <a:pPr marL="0" indent="0">
+              <a:lnSpc>
+                <a:spcPts val="2200"/>
+              </a:lnSpc>
+              <a:buNone/>
+            </a:pPr>
+            <a:r>
+              <a:rPr lang="en-US" sz="1200" dirty="0">
+                <a:solidFill>
+                  <a:srgbClr val="A0AEC0"/>
+                </a:solidFill>
+                <a:latin typeface="Calibri" pitchFamily="34" charset="0"/>
+              </a:rPr>
+              <a:t>No hardcoded credentials</a:t>
+            </a:r>
+          </a:p>
+        </p:txBody>
+      </p:sp>
+      <p:sp>
+        <p:nvSpPr>
+          <p:cNvPr id="12" name="NeedBg"/>
+          <p:cNvSpPr/>
+          <p:nvPr/>
+        </p:nvSpPr>
+        <p:spPr>
+          <a:xfrm>
+            <a:off x="4663440" y="1005840"/>
+            <a:ext cx="3749040" cy="2468880"/>
+          </a:xfrm>
+          <a:prstGeom prst="rect">
+            <a:avLst/>
+          </a:prstGeom>
+          <a:solidFill>
+            <a:srgbClr val="1A1A1A"/>
+          </a:solidFill>
+          <a:ln/>
+        </p:spPr>
+        <p:txBody>
+          <a:bodyPr/>
+          <a:lstStyle/>
+          <a:p>
+            <a:endParaRPr lang="en-US"/>
+          </a:p>
+        </p:txBody>
+      </p:sp>
+      <p:sp>
+        <p:nvSpPr>
+          <p:cNvPr id="13" name="Need"/>
+          <p:cNvSpPr/>
+          <p:nvPr/>
+        </p:nvSpPr>
+        <p:spPr>
+          <a:xfrm>
+            <a:off x="4800600" y="1005840"/>
+            <a:ext cx="3474720" cy="2468880"/>
+          </a:xfrm>
+          <a:prstGeom prst="rect">
+            <a:avLst/>
+          </a:prstGeom>
+          <a:noFill/>
+          <a:ln/>
+        </p:spPr>
+        <p:txBody>
+          <a:bodyPr wrap="square" lIns="91440" tIns="91440" rIns="0" bIns="0" rtlCol="0" anchor="t"/>
+          <a:lstStyle/>
+          <a:p>
+            <a:pPr marL="0" indent="0">
+              <a:buNone/>
+            </a:pPr>
+            <a:r>
+              <a:rPr lang="en-US" sz="1600" b="1" dirty="0">
+                <a:solidFill>
+                  <a:srgbClr val="E25444"/>
+                </a:solidFill>
+                <a:latin typeface="Calibri" pitchFamily="34" charset="0"/>
+              </a:rPr>
+              <a:t>What Production Needs</a:t>
+            </a:r>
+          </a:p>
+          <a:p>
+            <a:pPr marL="0" indent="0">
+              <a:lnSpc>
+                <a:spcPts val="2200"/>
+              </a:lnSpc>
+              <a:buNone/>
+            </a:pPr>
+            <a:r>
+              <a:rPr lang="en-US" sz="1200" dirty="0">
+                <a:solidFill>
+                  <a:srgbClr val="A0AEC0"/>
+                </a:solidFill>
+                <a:latin typeface="Calibri" pitchFamily="34" charset="0"/>
+              </a:rPr>
+              <a:t>Encryption at rest (KMS for MSK, DynamoDB, S3)</a:t>
+            </a:r>
+          </a:p>
+          <a:p>
+            <a:pPr marL="0" indent="0">
+              <a:lnSpc>
+                <a:spcPts val="2200"/>
+              </a:lnSpc>
+              <a:buNone/>
+            </a:pPr>
+            <a:r>
+              <a:rPr lang="en-US" sz="1200" dirty="0">
+                <a:solidFill>
+                  <a:srgbClr val="A0AEC0"/>
+                </a:solidFill>
+                <a:latin typeface="Calibri" pitchFamily="34" charset="0"/>
+              </a:rPr>
+              <a:t>API authentication (OAuth/IAM on operator API)</a:t>
+            </a:r>
+          </a:p>
+          <a:p>
+            <a:pPr marL="0" indent="0">
+              <a:lnSpc>
+                <a:spcPts val="2200"/>
+              </a:lnSpc>
+              <a:buNone/>
+            </a:pPr>
+            <a:r>
+              <a:rPr lang="en-US" sz="1200" dirty="0">
+                <a:solidFill>
+                  <a:srgbClr val="A0AEC0"/>
+                </a:solidFill>
+                <a:latin typeface="Calibri" pitchFamily="34" charset="0"/>
+              </a:rPr>
+              <a:t>Rate limiting and input validation</a:t>
+            </a:r>
+          </a:p>
+          <a:p>
+            <a:pPr marL="0" indent="0">
+              <a:lnSpc>
+                <a:spcPts val="2200"/>
+              </a:lnSpc>
+              <a:buNone/>
+            </a:pPr>
+            <a:r>
+              <a:rPr lang="en-US" sz="1200" dirty="0">
+                <a:solidFill>
+                  <a:srgbClr val="A0AEC0"/>
+                </a:solidFill>
+                <a:latin typeface="Calibri" pitchFamily="34" charset="0"/>
+              </a:rPr>
+              <a:t>7-year audit retention (SEC requirement)</a:t>
+            </a:r>
+          </a:p>
+          <a:p>
+            <a:pPr marL="0" indent="0">
+              <a:lnSpc>
+                <a:spcPts val="2200"/>
+              </a:lnSpc>
+              <a:buNone/>
+            </a:pPr>
+            <a:r>
+              <a:rPr lang="en-US" sz="1200" dirty="0">
+                <a:solidFill>
+                  <a:srgbClr val="A0AEC0"/>
+                </a:solidFill>
+                <a:latin typeface="Calibri" pitchFamily="34" charset="0"/>
+              </a:rPr>
+              <a:t>Compliance officer sign-off and testing</a:t>
+            </a:r>
+          </a:p>
+          <a:p>
+            <a:pPr marL="0" indent="0">
+              <a:lnSpc>
+                <a:spcPts val="2200"/>
+              </a:lnSpc>
+              <a:buNone/>
+            </a:pPr>
+            <a:r>
+              <a:rPr lang="en-US" sz="1200" dirty="0">
+                <a:solidFill>
+                  <a:srgbClr val="A0AEC0"/>
+                </a:solidFill>
+                <a:latin typeface="Calibri" pitchFamily="34" charset="0"/>
+              </a:rPr>
+              <a:t>Disaster recovery and incident response</a:t>
+            </a:r>
+          </a:p>
+        </p:txBody>
+      </p:sp>
+      <p:sp>
+        <p:nvSpPr>
+          <p:cNvPr id="14" name="Footer"/>
+          <p:cNvSpPr/>
+          <p:nvPr/>
+        </p:nvSpPr>
+        <p:spPr>
+          <a:xfrm>
+            <a:off x="731520" y="3657600"/>
+            <a:ext cx="7680960" cy="548640"/>
+          </a:xfrm>
+          <a:prstGeom prst="rect">
+            <a:avLst/>
+          </a:prstGeom>
+          <a:noFill/>
+          <a:ln/>
+        </p:spPr>
+        <p:txBody>
+          <a:bodyPr wrap="square" lIns="0" tIns="0" rIns="0" bIns="0" rtlCol="0" anchor="ctr"/>
+          <a:lstStyle/>
+          <a:p>
+            <a:pPr marL="0" indent="0">
+              <a:buNone/>
+            </a:pPr>
+            <a:r>
+              <a:rPr lang="en-US" sz="1400" dirty="0">
+                <a:solidFill>
+                  <a:srgbClr val="718096"/>
+                </a:solidFill>
+                <a:latin typeface="Calibri" pitchFamily="34" charset="0"/>
+              </a:rPr>
+              <a:t>This demo prioritizes education over production hardening. Always engage security and compliance teams before deploying trading systems.</a:t>
+            </a:r>
+          </a:p>
+        </p:txBody>
+      </p:sp>
+    </p:spTree>
+  </p:cSld>
+  <p:clrMapOvr>
+    <a:masterClrMapping/>
+  </p:clrMapOvr>
+</p:sld>
+</file>
+
+<file path=ppt/slides/slide22.xml><?xml version="1.0" encoding="utf-8"?>
+<p:sld xmlns:a="http://schemas.openxmlformats.org/drawingml/2006/main" xmlns:r="http://schemas.openxmlformats.org/officeDocument/2006/relationships" xmlns:p="http://schemas.openxmlformats.org/presentationml/2006/main">
+  <p:cSld name="Slide 14">
+    <p:bg>
+      <p:bgPr>
+        <a:solidFill>
+          <a:srgbClr val="111111"/>
+        </a:solidFill>
+        <a:effectLst/>
+      </p:bgPr>
+    </p:bg>
+    <p:spTree>
+      <p:nvGrpSpPr>
+        <p:cNvPr id="1" name=""/>
+        <p:cNvGrpSpPr/>
+        <p:nvPr/>
+      </p:nvGrpSpPr>
+      <p:grpSpPr>
+        <a:xfrm>
+          <a:off x="0" y="0"/>
+          <a:ext cx="0" cy="0"/>
+          <a:chOff x="0" y="0"/>
+          <a:chExt cx="0" cy="0"/>
+        </a:xfrm>
+      </p:grpSpPr>
+      <p:sp>
+        <p:nvSpPr>
+          <p:cNvPr id="2" name="Shape 0"/>
+          <p:cNvSpPr/>
+          <p:nvPr/>
+        </p:nvSpPr>
+        <p:spPr>
+          <a:xfrm>
+            <a:off x="0" y="0"/>
+            <a:ext cx="9144000" cy="54864"/>
+          </a:xfrm>
+          <a:prstGeom prst="rect">
+            <a:avLst/>
+          </a:prstGeom>
+          <a:solidFill>
+            <a:srgbClr val="27AE60"/>
+          </a:solidFill>
+          <a:ln/>
+        </p:spPr>
+        <p:txBody>
+          <a:bodyPr/>
+          <a:lstStyle/>
+          <a:p>
+            <a:endParaRPr lang="en-US"/>
+          </a:p>
+        </p:txBody>
+      </p:sp>
+      <p:sp>
+        <p:nvSpPr>
+          <p:cNvPr id="3" name="Text 1"/>
+          <p:cNvSpPr/>
+          <p:nvPr/>
+        </p:nvSpPr>
+        <p:spPr>
+          <a:xfrm>
+            <a:off x="731520" y="274320"/>
+            <a:ext cx="7680960" cy="640080"/>
+          </a:xfrm>
+          <a:prstGeom prst="rect">
+            <a:avLst/>
+          </a:prstGeom>
+          <a:noFill/>
+          <a:ln/>
+        </p:spPr>
+        <p:txBody>
+          <a:bodyPr wrap="square" lIns="0" tIns="0" rIns="0" bIns="0" rtlCol="0" anchor="ctr"/>
+          <a:lstStyle/>
+          <a:p>
+            <a:pPr marL="0" indent="0">
+              <a:buNone/>
+            </a:pPr>
+            <a:r>
+              <a:rPr lang="en-US" sz="3200" b="1" dirty="0">
+                <a:solidFill>
+                  <a:srgbClr val="FFFFFF"/>
+                </a:solidFill>
+                <a:latin typeface="Georgia" pitchFamily="34" charset="0"/>
+                <a:ea typeface="Georgia" pitchFamily="34" charset="-122"/>
+                <a:cs typeface="Georgia" pitchFamily="34" charset="-120"/>
+              </a:rPr>
+              <a:t>Why This Matters for Your Career</a:t>
+            </a:r>
+            <a:endParaRPr lang="en-US" sz="3200" dirty="0"/>
+          </a:p>
+        </p:txBody>
+      </p:sp>
+      <p:sp>
+        <p:nvSpPr>
+          <p:cNvPr id="4" name="Shape 2"/>
+          <p:cNvSpPr/>
+          <p:nvPr/>
+        </p:nvSpPr>
+        <p:spPr>
+          <a:xfrm>
+            <a:off x="731520" y="1188720"/>
+            <a:ext cx="7680960" cy="502920"/>
+          </a:xfrm>
+          <a:prstGeom prst="rect">
+            <a:avLst/>
+          </a:prstGeom>
+          <a:solidFill>
+            <a:srgbClr val="1A1A1A"/>
+          </a:solidFill>
+          <a:ln/>
+        </p:spPr>
+        <p:txBody>
+          <a:bodyPr/>
+          <a:lstStyle/>
+          <a:p>
+            <a:endParaRPr lang="en-US"/>
+          </a:p>
+        </p:txBody>
+      </p:sp>
+      <p:sp>
+        <p:nvSpPr>
+          <p:cNvPr id="5" name="Text 3"/>
+          <p:cNvSpPr/>
+          <p:nvPr/>
+        </p:nvSpPr>
+        <p:spPr>
+          <a:xfrm>
+            <a:off x="914400" y="1188720"/>
+            <a:ext cx="2743200" cy="502920"/>
+          </a:xfrm>
+          <a:prstGeom prst="rect">
+            <a:avLst/>
+          </a:prstGeom>
+          <a:noFill/>
+          <a:ln/>
+        </p:spPr>
+        <p:txBody>
+          <a:bodyPr wrap="square" lIns="0" tIns="0" rIns="0" bIns="0" rtlCol="0" anchor="ctr"/>
+          <a:lstStyle/>
+          <a:p>
+            <a:pPr marL="0" indent="0">
+              <a:buNone/>
+            </a:pPr>
+            <a:r>
+              <a:rPr lang="en-US" sz="1500" b="1" dirty="0">
+                <a:solidFill>
+                  <a:srgbClr val="27AE60"/>
+                </a:solidFill>
+                <a:latin typeface="Calibri" pitchFamily="34" charset="0"/>
+                <a:ea typeface="Calibri" pitchFamily="34" charset="-122"/>
+                <a:cs typeface="Calibri" pitchFamily="34" charset="-120"/>
+              </a:rPr>
+              <a:t>Kafka</a:t>
+            </a:r>
+            <a:endParaRPr lang="en-US" sz="1500" dirty="0"/>
+          </a:p>
+        </p:txBody>
+      </p:sp>
+      <p:sp>
+        <p:nvSpPr>
+          <p:cNvPr id="6" name="Text 4"/>
+          <p:cNvSpPr/>
+          <p:nvPr/>
+        </p:nvSpPr>
+        <p:spPr>
+          <a:xfrm>
+            <a:off x="3657600" y="1188720"/>
+            <a:ext cx="4572000" cy="502920"/>
+          </a:xfrm>
+          <a:prstGeom prst="rect">
+            <a:avLst/>
+          </a:prstGeom>
+          <a:noFill/>
+          <a:ln/>
+        </p:spPr>
+        <p:txBody>
+          <a:bodyPr wrap="square" lIns="0" tIns="0" rIns="0" bIns="0" rtlCol="0" anchor="ctr"/>
+          <a:lstStyle/>
+          <a:p>
+            <a:pPr marL="0" indent="0">
+              <a:buNone/>
+            </a:pPr>
+            <a:r>
+              <a:rPr lang="en-US" sz="1300" dirty="0">
+                <a:solidFill>
+                  <a:srgbClr val="A0AEC0"/>
+                </a:solidFill>
+                <a:latin typeface="Calibri" pitchFamily="34" charset="0"/>
+                <a:ea typeface="Calibri" pitchFamily="34" charset="-122"/>
+                <a:cs typeface="Calibri" pitchFamily="34" charset="-120"/>
+              </a:rPr>
+              <a:t>LinkedIn, Netflix, Uber, every major bank</a:t>
+            </a:r>
+            <a:endParaRPr lang="en-US" sz="1300" dirty="0"/>
+          </a:p>
+        </p:txBody>
+      </p:sp>
+      <p:sp>
+        <p:nvSpPr>
+          <p:cNvPr id="7" name="Shape 5"/>
+          <p:cNvSpPr/>
+          <p:nvPr/>
+        </p:nvSpPr>
+        <p:spPr>
+          <a:xfrm>
+            <a:off x="731520" y="1828800"/>
+            <a:ext cx="7680960" cy="502920"/>
+          </a:xfrm>
+          <a:prstGeom prst="rect">
+            <a:avLst/>
+          </a:prstGeom>
+          <a:solidFill>
+            <a:srgbClr val="1A1A1A"/>
+          </a:solidFill>
+          <a:ln/>
+        </p:spPr>
+        <p:txBody>
+          <a:bodyPr/>
+          <a:lstStyle/>
+          <a:p>
+            <a:endParaRPr lang="en-US"/>
+          </a:p>
+        </p:txBody>
+      </p:sp>
+      <p:sp>
+        <p:nvSpPr>
+          <p:cNvPr id="8" name="Text 6"/>
+          <p:cNvSpPr/>
+          <p:nvPr/>
+        </p:nvSpPr>
+        <p:spPr>
+          <a:xfrm>
+            <a:off x="914400" y="1828800"/>
+            <a:ext cx="2743200" cy="502920"/>
+          </a:xfrm>
+          <a:prstGeom prst="rect">
+            <a:avLst/>
+          </a:prstGeom>
+          <a:noFill/>
+          <a:ln/>
+        </p:spPr>
+        <p:txBody>
+          <a:bodyPr wrap="square" lIns="0" tIns="0" rIns="0" bIns="0" rtlCol="0" anchor="ctr"/>
+          <a:lstStyle/>
+          <a:p>
+            <a:pPr marL="0" indent="0">
+              <a:buNone/>
+            </a:pPr>
+            <a:r>
+              <a:rPr lang="en-US" sz="1500" b="1" dirty="0">
+                <a:solidFill>
+                  <a:srgbClr val="27AE60"/>
+                </a:solidFill>
+                <a:latin typeface="Calibri" pitchFamily="34" charset="0"/>
+                <a:ea typeface="Calibri" pitchFamily="34" charset="-122"/>
+                <a:cs typeface="Calibri" pitchFamily="34" charset="-120"/>
+              </a:rPr>
+              <a:t>Spark Streaming</a:t>
+            </a:r>
+            <a:endParaRPr lang="en-US" sz="1500" dirty="0"/>
+          </a:p>
+        </p:txBody>
+      </p:sp>
+      <p:sp>
+        <p:nvSpPr>
+          <p:cNvPr id="9" name="Text 7"/>
+          <p:cNvSpPr/>
+          <p:nvPr/>
+        </p:nvSpPr>
+        <p:spPr>
+          <a:xfrm>
+            <a:off x="3657600" y="1828800"/>
+            <a:ext cx="4572000" cy="502920"/>
+          </a:xfrm>
+          <a:prstGeom prst="rect">
+            <a:avLst/>
+          </a:prstGeom>
+          <a:noFill/>
+          <a:ln/>
+        </p:spPr>
+        <p:txBody>
+          <a:bodyPr wrap="square" lIns="0" tIns="0" rIns="0" bIns="0" rtlCol="0" anchor="ctr"/>
+          <a:lstStyle/>
+          <a:p>
+            <a:pPr marL="0" indent="0">
+              <a:buNone/>
+            </a:pPr>
+            <a:r>
+              <a:rPr lang="en-US" sz="1300" dirty="0">
+                <a:solidFill>
+                  <a:srgbClr val="A0AEC0"/>
+                </a:solidFill>
+                <a:latin typeface="Calibri" pitchFamily="34" charset="0"/>
+                <a:ea typeface="Calibri" pitchFamily="34" charset="-122"/>
+                <a:cs typeface="Calibri" pitchFamily="34" charset="-120"/>
+              </a:rPr>
+              <a:t>Fraud detection, risk analytics, recommendations</a:t>
+            </a:r>
+            <a:endParaRPr lang="en-US" sz="1300" dirty="0"/>
+          </a:p>
+        </p:txBody>
+      </p:sp>
+      <p:sp>
+        <p:nvSpPr>
+          <p:cNvPr id="10" name="Shape 8"/>
+          <p:cNvSpPr/>
+          <p:nvPr/>
+        </p:nvSpPr>
+        <p:spPr>
+          <a:xfrm>
+            <a:off x="731520" y="2468880"/>
+            <a:ext cx="7680960" cy="502920"/>
+          </a:xfrm>
+          <a:prstGeom prst="rect">
+            <a:avLst/>
+          </a:prstGeom>
+          <a:solidFill>
+            <a:srgbClr val="1A1A1A"/>
+          </a:solidFill>
+          <a:ln/>
+        </p:spPr>
+        <p:txBody>
+          <a:bodyPr/>
+          <a:lstStyle/>
+          <a:p>
+            <a:endParaRPr lang="en-US"/>
+          </a:p>
+        </p:txBody>
+      </p:sp>
+      <p:sp>
+        <p:nvSpPr>
+          <p:cNvPr id="11" name="Text 9"/>
+          <p:cNvSpPr/>
+          <p:nvPr/>
+        </p:nvSpPr>
+        <p:spPr>
+          <a:xfrm>
+            <a:off x="914400" y="2468880"/>
+            <a:ext cx="2743200" cy="502920"/>
+          </a:xfrm>
+          <a:prstGeom prst="rect">
+            <a:avLst/>
+          </a:prstGeom>
+          <a:noFill/>
+          <a:ln/>
+        </p:spPr>
+        <p:txBody>
+          <a:bodyPr wrap="square" lIns="0" tIns="0" rIns="0" bIns="0" rtlCol="0" anchor="ctr"/>
+          <a:lstStyle/>
+          <a:p>
+            <a:pPr marL="0" indent="0">
+              <a:buNone/>
+            </a:pPr>
+            <a:r>
+              <a:rPr lang="en-US" sz="1500" b="1" dirty="0">
+                <a:solidFill>
+                  <a:srgbClr val="27AE60"/>
+                </a:solidFill>
+                <a:latin typeface="Calibri" pitchFamily="34" charset="0"/>
+                <a:ea typeface="Calibri" pitchFamily="34" charset="-122"/>
+                <a:cs typeface="Calibri" pitchFamily="34" charset="-120"/>
+              </a:rPr>
+              <a:t>AWS Managed Services</a:t>
+            </a:r>
+            <a:endParaRPr lang="en-US" sz="1500" dirty="0"/>
+          </a:p>
+        </p:txBody>
+      </p:sp>
+      <p:sp>
+        <p:nvSpPr>
+          <p:cNvPr id="12" name="Text 10"/>
+          <p:cNvSpPr/>
+          <p:nvPr/>
+        </p:nvSpPr>
+        <p:spPr>
+          <a:xfrm>
+            <a:off x="3657600" y="2468880"/>
+            <a:ext cx="4572000" cy="502920"/>
+          </a:xfrm>
+          <a:prstGeom prst="rect">
+            <a:avLst/>
+          </a:prstGeom>
+          <a:noFill/>
+          <a:ln/>
+        </p:spPr>
+        <p:txBody>
+          <a:bodyPr wrap="square" lIns="0" tIns="0" rIns="0" bIns="0" rtlCol="0" anchor="ctr"/>
+          <a:lstStyle/>
+          <a:p>
+            <a:pPr marL="0" indent="0">
+              <a:buNone/>
+            </a:pPr>
+            <a:r>
+              <a:rPr lang="en-US" sz="1300" dirty="0">
+                <a:solidFill>
+                  <a:srgbClr val="A0AEC0"/>
+                </a:solidFill>
+                <a:latin typeface="Calibri" pitchFamily="34" charset="0"/>
+                <a:ea typeface="Calibri" pitchFamily="34" charset="-122"/>
+                <a:cs typeface="Calibri" pitchFamily="34" charset="-120"/>
+              </a:rPr>
+              <a:t>How teams ship without managing infrastructure</a:t>
+            </a:r>
+            <a:endParaRPr lang="en-US" sz="1300" dirty="0"/>
+          </a:p>
+        </p:txBody>
+      </p:sp>
+      <p:sp>
+        <p:nvSpPr>
+          <p:cNvPr id="13" name="Shape 11"/>
+          <p:cNvSpPr/>
+          <p:nvPr/>
+        </p:nvSpPr>
+        <p:spPr>
+          <a:xfrm>
+            <a:off x="731520" y="3108960"/>
+            <a:ext cx="7680960" cy="502920"/>
+          </a:xfrm>
+          <a:prstGeom prst="rect">
+            <a:avLst/>
+          </a:prstGeom>
+          <a:solidFill>
+            <a:srgbClr val="1A1A1A"/>
+          </a:solidFill>
+          <a:ln/>
+        </p:spPr>
+        <p:txBody>
+          <a:bodyPr/>
+          <a:lstStyle/>
+          <a:p>
+            <a:endParaRPr lang="en-US"/>
+          </a:p>
+        </p:txBody>
+      </p:sp>
+      <p:sp>
+        <p:nvSpPr>
+          <p:cNvPr id="14" name="Text 12"/>
+          <p:cNvSpPr/>
+          <p:nvPr/>
+        </p:nvSpPr>
+        <p:spPr>
+          <a:xfrm>
+            <a:off x="914400" y="3108960"/>
+            <a:ext cx="2743200" cy="502920"/>
+          </a:xfrm>
+          <a:prstGeom prst="rect">
+            <a:avLst/>
+          </a:prstGeom>
+          <a:noFill/>
+          <a:ln/>
+        </p:spPr>
+        <p:txBody>
+          <a:bodyPr wrap="square" lIns="0" tIns="0" rIns="0" bIns="0" rtlCol="0" anchor="ctr"/>
+          <a:lstStyle/>
+          <a:p>
+            <a:pPr marL="0" indent="0">
+              <a:buNone/>
+            </a:pPr>
+            <a:r>
+              <a:rPr lang="en-US" sz="1500" b="1" dirty="0">
+                <a:solidFill>
+                  <a:srgbClr val="27AE60"/>
+                </a:solidFill>
+                <a:latin typeface="Calibri" pitchFamily="34" charset="0"/>
+                <a:ea typeface="Calibri" pitchFamily="34" charset="-122"/>
+                <a:cs typeface="Calibri" pitchFamily="34" charset="-120"/>
+              </a:rPr>
+              <a:t>Terraform</a:t>
+            </a:r>
+            <a:endParaRPr lang="en-US" sz="1500" dirty="0"/>
+          </a:p>
+        </p:txBody>
+      </p:sp>
+      <p:sp>
+        <p:nvSpPr>
+          <p:cNvPr id="15" name="Text 13"/>
+          <p:cNvSpPr/>
+          <p:nvPr/>
+        </p:nvSpPr>
+        <p:spPr>
+          <a:xfrm>
+            <a:off x="3657600" y="3108960"/>
+            <a:ext cx="4572000" cy="502920"/>
+          </a:xfrm>
+          <a:prstGeom prst="rect">
+            <a:avLst/>
+          </a:prstGeom>
+          <a:noFill/>
+          <a:ln/>
+        </p:spPr>
+        <p:txBody>
+          <a:bodyPr wrap="square" lIns="0" tIns="0" rIns="0" bIns="0" rtlCol="0" anchor="ctr"/>
+          <a:lstStyle/>
+          <a:p>
+            <a:pPr marL="0" indent="0">
+              <a:buNone/>
+            </a:pPr>
+            <a:r>
+              <a:rPr lang="en-US" sz="1300" dirty="0">
+                <a:solidFill>
+                  <a:srgbClr val="A0AEC0"/>
+                </a:solidFill>
+                <a:latin typeface="Calibri" pitchFamily="34" charset="0"/>
+                <a:ea typeface="Calibri" pitchFamily="34" charset="-122"/>
+                <a:cs typeface="Calibri" pitchFamily="34" charset="-120"/>
+              </a:rPr>
+              <a:t>Baseline expectation for cloud engineering roles</a:t>
+            </a:r>
+            <a:endParaRPr lang="en-US" sz="1300" dirty="0"/>
+          </a:p>
+        </p:txBody>
+      </p:sp>
+      <p:sp>
+        <p:nvSpPr>
+          <p:cNvPr id="16" name="Shape 14"/>
+          <p:cNvSpPr/>
+          <p:nvPr/>
+        </p:nvSpPr>
+        <p:spPr>
+          <a:xfrm>
+            <a:off x="731520" y="3749040"/>
+            <a:ext cx="7680960" cy="502920"/>
+          </a:xfrm>
+          <a:prstGeom prst="rect">
+            <a:avLst/>
+          </a:prstGeom>
+          <a:solidFill>
+            <a:srgbClr val="1A1A1A"/>
+          </a:solidFill>
+          <a:ln/>
+        </p:spPr>
+        <p:txBody>
+          <a:bodyPr/>
+          <a:lstStyle/>
+          <a:p>
+            <a:endParaRPr lang="en-US"/>
+          </a:p>
+        </p:txBody>
+      </p:sp>
+      <p:sp>
+        <p:nvSpPr>
+          <p:cNvPr id="17" name="Text 15"/>
+          <p:cNvSpPr/>
+          <p:nvPr/>
+        </p:nvSpPr>
+        <p:spPr>
+          <a:xfrm>
+            <a:off x="914400" y="3749040"/>
+            <a:ext cx="2743200" cy="502920"/>
+          </a:xfrm>
+          <a:prstGeom prst="rect">
+            <a:avLst/>
+          </a:prstGeom>
+          <a:noFill/>
+          <a:ln/>
+        </p:spPr>
+        <p:txBody>
+          <a:bodyPr wrap="square" lIns="0" tIns="0" rIns="0" bIns="0" rtlCol="0" anchor="ctr"/>
+          <a:lstStyle/>
+          <a:p>
+            <a:pPr marL="0" indent="0">
+              <a:buNone/>
+            </a:pPr>
+            <a:r>
+              <a:rPr lang="en-US" sz="1500" b="1" dirty="0">
+                <a:solidFill>
+                  <a:srgbClr val="27AE60"/>
+                </a:solidFill>
+                <a:latin typeface="Calibri" pitchFamily="34" charset="0"/>
+                <a:ea typeface="Calibri" pitchFamily="34" charset="-122"/>
+                <a:cs typeface="Calibri" pitchFamily="34" charset="-120"/>
+              </a:rPr>
+              <a:t>Event-Driven Architecture</a:t>
+            </a:r>
+            <a:endParaRPr lang="en-US" sz="1500" dirty="0"/>
+          </a:p>
+        </p:txBody>
+      </p:sp>
+      <p:sp>
+        <p:nvSpPr>
+          <p:cNvPr id="18" name="Text 16"/>
+          <p:cNvSpPr/>
+          <p:nvPr/>
+        </p:nvSpPr>
+        <p:spPr>
+          <a:xfrm>
+            <a:off x="3657600" y="3749040"/>
+            <a:ext cx="4572000" cy="502920"/>
+          </a:xfrm>
+          <a:prstGeom prst="rect">
+            <a:avLst/>
+          </a:prstGeom>
+          <a:noFill/>
+          <a:ln/>
+        </p:spPr>
+        <p:txBody>
+          <a:bodyPr wrap="square" lIns="0" tIns="0" rIns="0" bIns="0" rtlCol="0" anchor="ctr"/>
+          <a:lstStyle/>
+          <a:p>
+            <a:pPr marL="0" indent="0">
+              <a:buNone/>
+            </a:pPr>
+            <a:r>
+              <a:rPr lang="en-US" sz="1300" dirty="0">
+                <a:solidFill>
+                  <a:srgbClr val="A0AEC0"/>
+                </a:solidFill>
+                <a:latin typeface="Calibri" pitchFamily="34" charset="0"/>
+                <a:ea typeface="Calibri" pitchFamily="34" charset="-122"/>
+                <a:cs typeface="Calibri" pitchFamily="34" charset="-120"/>
+              </a:rPr>
+              <a:t>The dominant pattern for systems that scale</a:t>
+            </a:r>
+            <a:endParaRPr lang="en-US" sz="1300" dirty="0"/>
+          </a:p>
+        </p:txBody>
+      </p:sp>
+      <p:sp>
+        <p:nvSpPr>
+          <p:cNvPr id="19" name="Text 17"/>
+          <p:cNvSpPr/>
+          <p:nvPr/>
+        </p:nvSpPr>
+        <p:spPr>
+          <a:xfrm>
+            <a:off x="731520" y="4389120"/>
+            <a:ext cx="7680960" cy="548640"/>
+          </a:xfrm>
+          <a:prstGeom prst="rect">
+            <a:avLst/>
+          </a:prstGeom>
+          <a:noFill/>
+          <a:ln/>
+        </p:spPr>
+        <p:txBody>
+          <a:bodyPr wrap="square" lIns="0" tIns="0" rIns="0" bIns="0" rtlCol="0" anchor="ctr"/>
+          <a:lstStyle/>
+          <a:p>
+            <a:pPr marL="0" indent="0">
+              <a:buNone/>
+            </a:pPr>
+            <a:r>
+              <a:rPr lang="en-US" sz="1300" dirty="0">
+                <a:solidFill>
+                  <a:srgbClr val="718096"/>
+                </a:solidFill>
+                <a:latin typeface="Calibri" pitchFamily="34" charset="0"/>
+                <a:ea typeface="Calibri" pitchFamily="34" charset="-122"/>
+                <a:cs typeface="Calibri" pitchFamily="34" charset="-120"/>
+              </a:rPr>
+              <a:t>These patterns apply beyond finance: fraud detection, infrastructure monitoring,</a:t>
+            </a:r>
+            <a:endParaRPr lang="en-US" sz="1300" dirty="0"/>
+          </a:p>
+          <a:p>
+            <a:pPr marL="0" indent="0">
+              <a:buNone/>
+            </a:pPr>
+            <a:r>
+              <a:rPr lang="en-US" sz="1300" dirty="0">
+                <a:solidFill>
+                  <a:srgbClr val="718096"/>
+                </a:solidFill>
+                <a:latin typeface="Calibri" pitchFamily="34" charset="0"/>
+                <a:ea typeface="Calibri" pitchFamily="34" charset="-122"/>
+                <a:cs typeface="Calibri" pitchFamily="34" charset="-120"/>
+              </a:rPr>
+              <a:t>IoT alerting, content moderation, and anywhere anomalies need real-time response.</a:t>
+            </a:r>
+            <a:endParaRPr lang="en-US" sz="1300" dirty="0"/>
+          </a:p>
+        </p:txBody>
+      </p:sp>
+    </p:spTree>
+  </p:cSld>
+  <p:clrMapOvr>
+    <a:masterClrMapping/>
+  </p:clrMapOvr>
+</p:sld>
+</file>
+
+<file path=ppt/slides/slide23.xml><?xml version="1.0" encoding="utf-8"?>
 <p:sld xmlns:a="http://schemas.openxmlformats.org/drawingml/2006/main" xmlns:r="http://schemas.openxmlformats.org/officeDocument/2006/relationships" xmlns:p="http://schemas.openxmlformats.org/presentationml/2006/main">
   <p:cSld name="Slide 15">
     <p:bg>
@@ -10251,7 +11167,7 @@
 </p:sld>
 </file>
 
-<file path=ppt/slides/slide21.xml><?xml version="1.0" encoding="utf-8"?>
+<file path=ppt/slides/slide24.xml><?xml version="1.0" encoding="utf-8"?>
 <p:sld xmlns:a="http://schemas.openxmlformats.org/drawingml/2006/main" xmlns:r="http://schemas.openxmlformats.org/officeDocument/2006/relationships" xmlns:p="http://schemas.openxmlformats.org/presentationml/2006/main">
   <p:cSld name="Connect">
     <p:bg>
@@ -11879,7 +12795,7 @@
         </p:blipFill>
         <p:spPr>
           <a:xfrm>
-            <a:off x="3810000" y="218786"/>
+            <a:off x="3070860" y="279746"/>
             <a:ext cx="4671060" cy="4741834"/>
           </a:xfrm>
           <a:prstGeom prst="rect">
